--- a/python_course/chapter_04_loops/presentation.pptx
+++ b/python_course/chapter_04_loops/presentation.pptx
@@ -21,7 +21,7 @@
     <p:sldId id="269" r:id="rId20"/>
     <p:sldId id="270" r:id="rId21"/>
   </p:sldIdLst>
-  <p:sldSz cx="9144000" cy="6858000" type="screen4x3"/>
+  <p:sldSz cx="12191695" cy="6858000" type="screen4x3"/>
   <p:notesSz cx="6858000" cy="9144000"/>
   <p:defaultTextStyle>
     <a:defPPr>
@@ -3095,14 +3095,6 @@
 <file path=ppt/slides/slide1.xml><?xml version="1.0" encoding="utf-8"?>
 <p:sld xmlns:a="http://schemas.openxmlformats.org/drawingml/2006/main" xmlns:p="http://schemas.openxmlformats.org/presentationml/2006/main" xmlns:r="http://schemas.openxmlformats.org/officeDocument/2006/relationships">
   <p:cSld>
-    <p:bg>
-      <p:bgPr>
-        <a:solidFill>
-          <a:srgbClr val="FFFFFF"/>
-        </a:solidFill>
-        <a:effectLst/>
-      </p:bgPr>
-    </p:bg>
     <p:spTree>
       <p:nvGrpSpPr>
         <p:cNvPr id="1" name=""/>
@@ -3118,14 +3110,14 @@
         </p:nvSpPr>
         <p:spPr>
           <a:xfrm>
-            <a:off x="6858000" y="457200"/>
-            <a:ext cx="1828800" cy="1828800"/>
+            <a:off x="0" y="0"/>
+            <a:ext cx="12191695" cy="6858000"/>
           </a:xfrm>
           <a:prstGeom prst="rect">
             <a:avLst/>
           </a:prstGeom>
           <a:solidFill>
-            <a:srgbClr val="DBEAFE"/>
+            <a:srgbClr val="F0F8FF"/>
           </a:solidFill>
           <a:ln>
             <a:noFill/>
@@ -3155,44 +3147,36 @@
       </p:sp>
       <p:sp>
         <p:nvSpPr>
-          <p:cNvPr id="3" name="Rectangle 2"/>
-          <p:cNvSpPr/>
+          <p:cNvPr id="3" name="TextBox 2"/>
+          <p:cNvSpPr txBox="1"/>
           <p:nvPr/>
         </p:nvSpPr>
         <p:spPr>
           <a:xfrm>
-            <a:off x="457200" y="5029200"/>
-            <a:ext cx="1371600" cy="1371600"/>
-          </a:xfrm>
-          <a:prstGeom prst="rect">
-            <a:avLst/>
-          </a:prstGeom>
-          <a:solidFill>
-            <a:srgbClr val="DBEAFE"/>
-          </a:solidFill>
-          <a:ln>
-            <a:noFill/>
-          </a:ln>
-        </p:spPr>
-        <p:style>
-          <a:lnRef idx="1">
-            <a:schemeClr val="accent1"/>
-          </a:lnRef>
-          <a:fillRef idx="3">
-            <a:schemeClr val="accent1"/>
-          </a:fillRef>
-          <a:effectRef idx="2">
-            <a:schemeClr val="accent1"/>
-          </a:effectRef>
-          <a:fontRef idx="minor">
-            <a:schemeClr val="lt1"/>
-          </a:fontRef>
-        </p:style>
-        <p:txBody>
-          <a:bodyPr rtlCol="0" anchor="ctr"/>
-          <a:lstStyle/>
-          <a:p>
-            <a:pPr algn="ctr"/>
+            <a:off x="914400" y="1828800"/>
+            <a:ext cx="10360152" cy="1371600"/>
+          </a:xfrm>
+          <a:prstGeom prst="rect">
+            <a:avLst/>
+          </a:prstGeom>
+          <a:noFill/>
+        </p:spPr>
+        <p:txBody>
+          <a:bodyPr wrap="none">
+            <a:spAutoFit/>
+          </a:bodyPr>
+          <a:lstStyle/>
+          <a:p>
+            <a:pPr algn="ctr">
+              <a:defRPr sz="5400" b="1">
+                <a:solidFill>
+                  <a:srgbClr val="003366"/>
+                </a:solidFill>
+              </a:defRPr>
+            </a:pPr>
+            <a:r>
+              <a:t>Chapter 4</a:t>
+            </a:r>
           </a:p>
         </p:txBody>
       </p:sp>
@@ -3204,8 +3188,8 @@
         </p:nvSpPr>
         <p:spPr>
           <a:xfrm>
-            <a:off x="914400" y="2286000"/>
-            <a:ext cx="7315200" cy="914400"/>
+            <a:off x="914400" y="3657600"/>
+            <a:ext cx="10360152" cy="548640"/>
           </a:xfrm>
           <a:prstGeom prst="rect">
             <a:avLst/>
@@ -3219,14 +3203,14 @@
           <a:lstStyle/>
           <a:p>
             <a:pPr algn="ctr">
-              <a:defRPr sz="4800" b="1">
-                <a:solidFill>
-                  <a:srgbClr val="1F2937"/>
-                </a:solidFill>
-              </a:defRPr>
-            </a:pPr>
-            <a:r>
-              <a:t>Chapter 4: Repetition with Loops</a:t>
+              <a:defRPr sz="2800">
+                <a:solidFill>
+                  <a:srgbClr val="4682B4"/>
+                </a:solidFill>
+              </a:defRPr>
+            </a:pPr>
+            <a:r>
+              <a:t>Repetition with Loops</a:t>
             </a:r>
           </a:p>
         </p:txBody>
@@ -3239,8 +3223,8 @@
         </p:nvSpPr>
         <p:spPr>
           <a:xfrm>
-            <a:off x="914400" y="3474720"/>
-            <a:ext cx="7315200" cy="914400"/>
+            <a:off x="914400" y="4297680"/>
+            <a:ext cx="10360152" cy="548640"/>
           </a:xfrm>
           <a:prstGeom prst="rect">
             <a:avLst/>
@@ -3254,58 +3238,15 @@
           <a:lstStyle/>
           <a:p>
             <a:pPr algn="ctr">
-              <a:defRPr sz="3200">
-                <a:solidFill>
-                  <a:srgbClr val="2563EB"/>
-                </a:solidFill>
-              </a:defRPr>
-            </a:pPr>
-            <a:r>
-              <a:t>Automating Repetitive Tasks</a:t>
-            </a:r>
-          </a:p>
-        </p:txBody>
-      </p:sp>
-      <p:sp>
-        <p:nvSpPr>
-          <p:cNvPr id="6" name="Rectangle 5"/>
-          <p:cNvSpPr/>
-          <p:nvPr/>
-        </p:nvSpPr>
-        <p:spPr>
-          <a:xfrm>
-            <a:off x="0" y="6675120"/>
-            <a:ext cx="9144000" cy="182880"/>
-          </a:xfrm>
-          <a:prstGeom prst="rect">
-            <a:avLst/>
-          </a:prstGeom>
-          <a:solidFill>
-            <a:srgbClr val="2563EB"/>
-          </a:solidFill>
-          <a:ln>
-            <a:noFill/>
-          </a:ln>
-        </p:spPr>
-        <p:style>
-          <a:lnRef idx="1">
-            <a:schemeClr val="accent1"/>
-          </a:lnRef>
-          <a:fillRef idx="3">
-            <a:schemeClr val="accent1"/>
-          </a:fillRef>
-          <a:effectRef idx="2">
-            <a:schemeClr val="accent1"/>
-          </a:effectRef>
-          <a:fontRef idx="minor">
-            <a:schemeClr val="lt1"/>
-          </a:fontRef>
-        </p:style>
-        <p:txBody>
-          <a:bodyPr rtlCol="0" anchor="ctr"/>
-          <a:lstStyle/>
-          <a:p>
-            <a:pPr algn="ctr"/>
+              <a:defRPr sz="2800">
+                <a:solidFill>
+                  <a:srgbClr val="4682B4"/>
+                </a:solidFill>
+              </a:defRPr>
+            </a:pPr>
+            <a:r>
+              <a:t>Making Programs Work Smarter, Not Harder</a:t>
+            </a:r>
           </a:p>
         </p:txBody>
       </p:sp>
@@ -3320,14 +3261,6 @@
 <file path=ppt/slides/slide10.xml><?xml version="1.0" encoding="utf-8"?>
 <p:sld xmlns:a="http://schemas.openxmlformats.org/drawingml/2006/main" xmlns:p="http://schemas.openxmlformats.org/presentationml/2006/main" xmlns:r="http://schemas.openxmlformats.org/officeDocument/2006/relationships">
   <p:cSld>
-    <p:bg>
-      <p:bgPr>
-        <a:solidFill>
-          <a:srgbClr val="FFFFFF"/>
-        </a:solidFill>
-        <a:effectLst/>
-      </p:bgPr>
-    </p:bg>
     <p:spTree>
       <p:nvGrpSpPr>
         <p:cNvPr id="1" name=""/>
@@ -3337,55 +3270,20 @@
       <p:grpSpPr/>
       <p:sp>
         <p:nvSpPr>
-          <p:cNvPr id="2" name="TextBox 1"/>
-          <p:cNvSpPr txBox="1"/>
-          <p:nvPr/>
-        </p:nvSpPr>
-        <p:spPr>
-          <a:xfrm>
-            <a:off x="457200" y="457200"/>
-            <a:ext cx="8229600" cy="731520"/>
-          </a:xfrm>
-          <a:prstGeom prst="rect">
-            <a:avLst/>
-          </a:prstGeom>
-          <a:noFill/>
-        </p:spPr>
-        <p:txBody>
-          <a:bodyPr wrap="none">
-            <a:spAutoFit/>
-          </a:bodyPr>
-          <a:lstStyle/>
-          <a:p>
-            <a:pPr>
-              <a:defRPr sz="4000" b="1">
-                <a:solidFill>
-                  <a:srgbClr val="1F2937"/>
-                </a:solidFill>
-              </a:defRPr>
-            </a:pPr>
-            <a:r>
-              <a:t>Continue Statement</a:t>
-            </a:r>
-          </a:p>
-        </p:txBody>
-      </p:sp>
-      <p:sp>
-        <p:nvSpPr>
-          <p:cNvPr id="3" name="Rectangle 2"/>
+          <p:cNvPr id="2" name="Rectangle 1"/>
           <p:cNvSpPr/>
           <p:nvPr/>
         </p:nvSpPr>
         <p:spPr>
           <a:xfrm>
-            <a:off x="457200" y="1280160"/>
-            <a:ext cx="1371600" cy="73152"/>
+            <a:off x="0" y="0"/>
+            <a:ext cx="12191695" cy="6858000"/>
           </a:xfrm>
           <a:prstGeom prst="rect">
             <a:avLst/>
           </a:prstGeom>
           <a:solidFill>
-            <a:srgbClr val="2563EB"/>
+            <a:srgbClr val="FFFFFF"/>
           </a:solidFill>
           <a:ln>
             <a:noFill/>
@@ -3415,95 +3313,23 @@
       </p:sp>
       <p:sp>
         <p:nvSpPr>
-          <p:cNvPr id="4" name="TextBox 3"/>
-          <p:cNvSpPr txBox="1"/>
-          <p:nvPr/>
-        </p:nvSpPr>
-        <p:spPr>
-          <a:xfrm>
-            <a:off x="457200" y="1828800"/>
-            <a:ext cx="8229600" cy="548640"/>
-          </a:xfrm>
-          <a:prstGeom prst="rect">
-            <a:avLst/>
-          </a:prstGeom>
-          <a:noFill/>
-        </p:spPr>
-        <p:txBody>
-          <a:bodyPr wrap="none">
-            <a:spAutoFit/>
-          </a:bodyPr>
-          <a:lstStyle/>
-          <a:p>
-            <a:pPr>
-              <a:defRPr sz="2400">
-                <a:solidFill>
-                  <a:srgbClr val="4B5563"/>
-                </a:solidFill>
-              </a:defRPr>
-            </a:pPr>
-            <a:r>
-              <a:t>The continue statement skips the rest of the current iteration</a:t>
-            </a:r>
-          </a:p>
-        </p:txBody>
-      </p:sp>
-      <p:sp>
-        <p:nvSpPr>
-          <p:cNvPr id="5" name="TextBox 4"/>
-          <p:cNvSpPr txBox="1"/>
-          <p:nvPr/>
-        </p:nvSpPr>
-        <p:spPr>
-          <a:xfrm>
-            <a:off x="457200" y="2560320"/>
-            <a:ext cx="4114800" cy="365760"/>
-          </a:xfrm>
-          <a:prstGeom prst="rect">
-            <a:avLst/>
-          </a:prstGeom>
-          <a:noFill/>
-        </p:spPr>
-        <p:txBody>
-          <a:bodyPr wrap="none">
-            <a:spAutoFit/>
-          </a:bodyPr>
-          <a:lstStyle/>
-          <a:p>
-            <a:pPr>
-              <a:defRPr sz="2200" b="1">
-                <a:solidFill>
-                  <a:srgbClr val="1F2937"/>
-                </a:solidFill>
-              </a:defRPr>
-            </a:pPr>
-            <a:r>
-              <a:t>Skip Odd Numbers:</a:t>
-            </a:r>
-          </a:p>
-        </p:txBody>
-      </p:sp>
-      <p:sp>
-        <p:nvSpPr>
-          <p:cNvPr id="6" name="Rectangle 5"/>
+          <p:cNvPr id="3" name="Rectangle 2"/>
           <p:cNvSpPr/>
           <p:nvPr/>
         </p:nvSpPr>
         <p:spPr>
           <a:xfrm>
-            <a:off x="457200" y="2926080"/>
-            <a:ext cx="4114800" cy="2286000"/>
+            <a:off x="0" y="0"/>
+            <a:ext cx="12191695" cy="137160"/>
           </a:xfrm>
           <a:prstGeom prst="rect">
             <a:avLst/>
           </a:prstGeom>
           <a:solidFill>
-            <a:srgbClr val="DBEAFE"/>
+            <a:srgbClr val="0066CC"/>
           </a:solidFill>
-          <a:ln w="25400">
-            <a:solidFill>
-              <a:srgbClr val="2563EB"/>
-            </a:solidFill>
+          <a:ln>
+            <a:noFill/>
           </a:ln>
         </p:spPr>
         <p:style>
@@ -3521,95 +3347,23 @@
           </a:fontRef>
         </p:style>
         <p:txBody>
-          <a:bodyPr rtlCol="0" anchor="ctr" wrap="square" lIns="182880" tIns="137160"/>
-          <a:lstStyle/>
-          <a:p>
-            <a:pPr algn="ctr">
-              <a:defRPr sz="1800">
-                <a:solidFill>
-                  <a:srgbClr val="1F2937"/>
-                </a:solidFill>
-                <a:latin typeface="Courier New"/>
-              </a:defRPr>
-            </a:pPr>
-            <a:r>
-              <a:t>for i in range(10):</a:t>
-            </a:r>
-          </a:p>
-          <a:p>
-            <a:pPr>
-              <a:defRPr sz="1800">
-                <a:solidFill>
-                  <a:srgbClr val="1F2937"/>
-                </a:solidFill>
-                <a:latin typeface="Courier New"/>
-              </a:defRPr>
-            </a:pPr>
-            <a:r>
-              <a:t>    if i % 2 == 1:</a:t>
-            </a:r>
-          </a:p>
-          <a:p>
-            <a:pPr>
-              <a:defRPr sz="1800">
-                <a:solidFill>
-                  <a:srgbClr val="1F2937"/>
-                </a:solidFill>
-                <a:latin typeface="Courier New"/>
-              </a:defRPr>
-            </a:pPr>
-            <a:r>
-              <a:t>        continue</a:t>
-            </a:r>
-          </a:p>
-          <a:p>
-            <a:pPr>
-              <a:defRPr sz="1800">
-                <a:solidFill>
-                  <a:srgbClr val="1F2937"/>
-                </a:solidFill>
-                <a:latin typeface="Courier New"/>
-              </a:defRPr>
-            </a:pPr>
-            <a:r>
-              <a:t>    print(i)</a:t>
-            </a:r>
-          </a:p>
-          <a:p>
-            <a:pPr>
-              <a:defRPr sz="1800">
-                <a:solidFill>
-                  <a:srgbClr val="1F2937"/>
-                </a:solidFill>
-                <a:latin typeface="Courier New"/>
-              </a:defRPr>
-            </a:pPr>
-          </a:p>
-          <a:p>
-            <a:pPr>
-              <a:defRPr sz="1800">
-                <a:solidFill>
-                  <a:srgbClr val="1F2937"/>
-                </a:solidFill>
-                <a:latin typeface="Courier New"/>
-              </a:defRPr>
-            </a:pPr>
-            <a:r>
-              <a:t># Output: 0 2 4 6 8</a:t>
-            </a:r>
-          </a:p>
-        </p:txBody>
-      </p:sp>
-      <p:sp>
-        <p:nvSpPr>
-          <p:cNvPr id="7" name="TextBox 6"/>
+          <a:bodyPr rtlCol="0" anchor="ctr"/>
+          <a:lstStyle/>
+          <a:p>
+            <a:pPr algn="ctr"/>
+          </a:p>
+        </p:txBody>
+      </p:sp>
+      <p:sp>
+        <p:nvSpPr>
+          <p:cNvPr id="4" name="TextBox 3"/>
           <p:cNvSpPr txBox="1"/>
           <p:nvPr/>
         </p:nvSpPr>
         <p:spPr>
           <a:xfrm>
-            <a:off x="5029200" y="2560320"/>
-            <a:ext cx="3657600" cy="365760"/>
+            <a:off x="457200" y="365760"/>
+            <a:ext cx="10972800" cy="731520"/>
           </a:xfrm>
           <a:prstGeom prst="rect">
             <a:avLst/>
@@ -3623,39 +3377,37 @@
           <a:lstStyle/>
           <a:p>
             <a:pPr>
-              <a:defRPr sz="2200" b="1">
-                <a:solidFill>
-                  <a:srgbClr val="1F2937"/>
-                </a:solidFill>
-              </a:defRPr>
-            </a:pPr>
-            <a:r>
-              <a:t>Skip Vowels:</a:t>
-            </a:r>
-          </a:p>
-        </p:txBody>
-      </p:sp>
-      <p:sp>
-        <p:nvSpPr>
-          <p:cNvPr id="8" name="Rectangle 7"/>
+              <a:defRPr sz="4000" b="1">
+                <a:solidFill>
+                  <a:srgbClr val="003366"/>
+                </a:solidFill>
+              </a:defRPr>
+            </a:pPr>
+            <a:r>
+              <a:t>Continue Statement: Skip Iteration ⏭️</a:t>
+            </a:r>
+          </a:p>
+        </p:txBody>
+      </p:sp>
+      <p:sp>
+        <p:nvSpPr>
+          <p:cNvPr id="5" name="Rectangle 4"/>
           <p:cNvSpPr/>
           <p:nvPr/>
         </p:nvSpPr>
         <p:spPr>
           <a:xfrm>
-            <a:off x="5029200" y="2926080"/>
-            <a:ext cx="3657600" cy="2286000"/>
+            <a:off x="457200" y="1005840"/>
+            <a:ext cx="1828800" cy="45720"/>
           </a:xfrm>
           <a:prstGeom prst="rect">
             <a:avLst/>
           </a:prstGeom>
           <a:solidFill>
-            <a:srgbClr val="DBEAFE"/>
+            <a:srgbClr val="0066CC"/>
           </a:solidFill>
-          <a:ln w="25400">
-            <a:solidFill>
-              <a:srgbClr val="2563EB"/>
-            </a:solidFill>
+          <a:ln>
+            <a:noFill/>
           </a:ln>
         </p:spPr>
         <p:style>
@@ -3673,95 +3425,23 @@
           </a:fontRef>
         </p:style>
         <p:txBody>
-          <a:bodyPr rtlCol="0" anchor="ctr" wrap="square" lIns="182880" tIns="137160"/>
-          <a:lstStyle/>
-          <a:p>
-            <a:pPr algn="ctr">
-              <a:defRPr sz="1800">
-                <a:solidFill>
-                  <a:srgbClr val="1F2937"/>
-                </a:solidFill>
-                <a:latin typeface="Courier New"/>
-              </a:defRPr>
-            </a:pPr>
-            <a:r>
-              <a:t>for char in "Python":</a:t>
-            </a:r>
-          </a:p>
-          <a:p>
-            <a:pPr>
-              <a:defRPr sz="1800">
-                <a:solidFill>
-                  <a:srgbClr val="1F2937"/>
-                </a:solidFill>
-                <a:latin typeface="Courier New"/>
-              </a:defRPr>
-            </a:pPr>
-            <a:r>
-              <a:t>    if char in "aeiou":</a:t>
-            </a:r>
-          </a:p>
-          <a:p>
-            <a:pPr>
-              <a:defRPr sz="1800">
-                <a:solidFill>
-                  <a:srgbClr val="1F2937"/>
-                </a:solidFill>
-                <a:latin typeface="Courier New"/>
-              </a:defRPr>
-            </a:pPr>
-            <a:r>
-              <a:t>        continue</a:t>
-            </a:r>
-          </a:p>
-          <a:p>
-            <a:pPr>
-              <a:defRPr sz="1800">
-                <a:solidFill>
-                  <a:srgbClr val="1F2937"/>
-                </a:solidFill>
-                <a:latin typeface="Courier New"/>
-              </a:defRPr>
-            </a:pPr>
-            <a:r>
-              <a:t>    print(char)</a:t>
-            </a:r>
-          </a:p>
-          <a:p>
-            <a:pPr>
-              <a:defRPr sz="1800">
-                <a:solidFill>
-                  <a:srgbClr val="1F2937"/>
-                </a:solidFill>
-                <a:latin typeface="Courier New"/>
-              </a:defRPr>
-            </a:pPr>
-          </a:p>
-          <a:p>
-            <a:pPr>
-              <a:defRPr sz="1800">
-                <a:solidFill>
-                  <a:srgbClr val="1F2937"/>
-                </a:solidFill>
-                <a:latin typeface="Courier New"/>
-              </a:defRPr>
-            </a:pPr>
-            <a:r>
-              <a:t># Output: P y t h n</a:t>
-            </a:r>
-          </a:p>
-        </p:txBody>
-      </p:sp>
-      <p:sp>
-        <p:nvSpPr>
-          <p:cNvPr id="9" name="TextBox 8"/>
+          <a:bodyPr rtlCol="0" anchor="ctr"/>
+          <a:lstStyle/>
+          <a:p>
+            <a:pPr algn="ctr"/>
+          </a:p>
+        </p:txBody>
+      </p:sp>
+      <p:sp>
+        <p:nvSpPr>
+          <p:cNvPr id="6" name="TextBox 5"/>
           <p:cNvSpPr txBox="1"/>
           <p:nvPr/>
         </p:nvSpPr>
         <p:spPr>
           <a:xfrm>
-            <a:off x="457200" y="5486400"/>
-            <a:ext cx="8229600" cy="731520"/>
+            <a:off x="640080" y="1371600"/>
+            <a:ext cx="10789920" cy="4572000"/>
           </a:xfrm>
           <a:prstGeom prst="rect">
             <a:avLst/>
@@ -3769,20 +3449,68 @@
           <a:noFill/>
         </p:spPr>
         <p:txBody>
-          <a:bodyPr wrap="none">
+          <a:bodyPr wrap="square">
             <a:spAutoFit/>
           </a:bodyPr>
           <a:lstStyle/>
           <a:p>
             <a:pPr>
+              <a:spcAft>
+                <a:spcPts val="800"/>
+              </a:spcAft>
               <a:defRPr sz="2000" b="1">
                 <a:solidFill>
-                  <a:srgbClr val="2563EB"/>
-                </a:solidFill>
-              </a:defRPr>
-            </a:pPr>
-            <a:r>
-              <a:t>💡 Use continue when you want to skip certain items but keep looping</a:t>
+                  <a:srgbClr val="333333"/>
+                </a:solidFill>
+              </a:defRPr>
+            </a:pPr>
+            <a:r>
+              <a:t>The continue statement skips the rest of the current iteration</a:t>
+            </a:r>
+          </a:p>
+          <a:p>
+            <a:pPr>
+              <a:spcAft>
+                <a:spcPts val="800"/>
+              </a:spcAft>
+              <a:defRPr sz="2000" b="1">
+                <a:solidFill>
+                  <a:srgbClr val="333333"/>
+                </a:solidFill>
+              </a:defRPr>
+            </a:pPr>
+            <a:r>
+              <a:t>Example: Print Only Odd Numbers</a:t>
+            </a:r>
+          </a:p>
+          <a:p>
+            <a:pPr>
+              <a:spcAft>
+                <a:spcPts val="800"/>
+              </a:spcAft>
+              <a:defRPr sz="2000" b="1">
+                <a:solidFill>
+                  <a:srgbClr val="333333"/>
+                </a:solidFill>
+              </a:defRPr>
+            </a:pPr>
+            <a:r>
+              <a:t>Example: Skip Negative Numbers</a:t>
+            </a:r>
+          </a:p>
+          <a:p>
+            <a:pPr>
+              <a:spcAft>
+                <a:spcPts val="800"/>
+              </a:spcAft>
+              <a:defRPr sz="2000" b="1">
+                <a:solidFill>
+                  <a:srgbClr val="333333"/>
+                </a:solidFill>
+              </a:defRPr>
+            </a:pPr>
+            <a:r>
+              <a:t>breakexits the loop completely |continueskips to next iteration</a:t>
             </a:r>
           </a:p>
         </p:txBody>
@@ -3798,14 +3526,6 @@
 <file path=ppt/slides/slide11.xml><?xml version="1.0" encoding="utf-8"?>
 <p:sld xmlns:a="http://schemas.openxmlformats.org/drawingml/2006/main" xmlns:p="http://schemas.openxmlformats.org/presentationml/2006/main" xmlns:r="http://schemas.openxmlformats.org/officeDocument/2006/relationships">
   <p:cSld>
-    <p:bg>
-      <p:bgPr>
-        <a:solidFill>
-          <a:srgbClr val="FFFFFF"/>
-        </a:solidFill>
-        <a:effectLst/>
-      </p:bgPr>
-    </p:bg>
     <p:spTree>
       <p:nvGrpSpPr>
         <p:cNvPr id="1" name=""/>
@@ -3815,55 +3535,20 @@
       <p:grpSpPr/>
       <p:sp>
         <p:nvSpPr>
-          <p:cNvPr id="2" name="TextBox 1"/>
-          <p:cNvSpPr txBox="1"/>
-          <p:nvPr/>
-        </p:nvSpPr>
-        <p:spPr>
-          <a:xfrm>
-            <a:off x="457200" y="457200"/>
-            <a:ext cx="8229600" cy="731520"/>
-          </a:xfrm>
-          <a:prstGeom prst="rect">
-            <a:avLst/>
-          </a:prstGeom>
-          <a:noFill/>
-        </p:spPr>
-        <p:txBody>
-          <a:bodyPr wrap="none">
-            <a:spAutoFit/>
-          </a:bodyPr>
-          <a:lstStyle/>
-          <a:p>
-            <a:pPr>
-              <a:defRPr sz="4000" b="1">
-                <a:solidFill>
-                  <a:srgbClr val="1F2937"/>
-                </a:solidFill>
-              </a:defRPr>
-            </a:pPr>
-            <a:r>
-              <a:t>Nested Loops</a:t>
-            </a:r>
-          </a:p>
-        </p:txBody>
-      </p:sp>
-      <p:sp>
-        <p:nvSpPr>
-          <p:cNvPr id="3" name="Rectangle 2"/>
+          <p:cNvPr id="2" name="Rectangle 1"/>
           <p:cNvSpPr/>
           <p:nvPr/>
         </p:nvSpPr>
         <p:spPr>
           <a:xfrm>
-            <a:off x="457200" y="1280160"/>
-            <a:ext cx="1371600" cy="73152"/>
+            <a:off x="0" y="0"/>
+            <a:ext cx="12191695" cy="6858000"/>
           </a:xfrm>
           <a:prstGeom prst="rect">
             <a:avLst/>
           </a:prstGeom>
           <a:solidFill>
-            <a:srgbClr val="2563EB"/>
+            <a:srgbClr val="FFFFFF"/>
           </a:solidFill>
           <a:ln>
             <a:noFill/>
@@ -3893,95 +3578,23 @@
       </p:sp>
       <p:sp>
         <p:nvSpPr>
-          <p:cNvPr id="4" name="TextBox 3"/>
-          <p:cNvSpPr txBox="1"/>
-          <p:nvPr/>
-        </p:nvSpPr>
-        <p:spPr>
-          <a:xfrm>
-            <a:off x="457200" y="1828800"/>
-            <a:ext cx="8229600" cy="548640"/>
-          </a:xfrm>
-          <a:prstGeom prst="rect">
-            <a:avLst/>
-          </a:prstGeom>
-          <a:noFill/>
-        </p:spPr>
-        <p:txBody>
-          <a:bodyPr wrap="none">
-            <a:spAutoFit/>
-          </a:bodyPr>
-          <a:lstStyle/>
-          <a:p>
-            <a:pPr>
-              <a:defRPr sz="2400">
-                <a:solidFill>
-                  <a:srgbClr val="4B5563"/>
-                </a:solidFill>
-              </a:defRPr>
-            </a:pPr>
-            <a:r>
-              <a:t>Nested loops: a loop inside another loop</a:t>
-            </a:r>
-          </a:p>
-        </p:txBody>
-      </p:sp>
-      <p:sp>
-        <p:nvSpPr>
-          <p:cNvPr id="5" name="TextBox 4"/>
-          <p:cNvSpPr txBox="1"/>
-          <p:nvPr/>
-        </p:nvSpPr>
-        <p:spPr>
-          <a:xfrm>
-            <a:off x="457200" y="2560320"/>
-            <a:ext cx="4114800" cy="365760"/>
-          </a:xfrm>
-          <a:prstGeom prst="rect">
-            <a:avLst/>
-          </a:prstGeom>
-          <a:noFill/>
-        </p:spPr>
-        <p:txBody>
-          <a:bodyPr wrap="none">
-            <a:spAutoFit/>
-          </a:bodyPr>
-          <a:lstStyle/>
-          <a:p>
-            <a:pPr>
-              <a:defRPr sz="2200" b="1">
-                <a:solidFill>
-                  <a:srgbClr val="1F2937"/>
-                </a:solidFill>
-              </a:defRPr>
-            </a:pPr>
-            <a:r>
-              <a:t>Multiplication Table:</a:t>
-            </a:r>
-          </a:p>
-        </p:txBody>
-      </p:sp>
-      <p:sp>
-        <p:nvSpPr>
-          <p:cNvPr id="6" name="Rectangle 5"/>
+          <p:cNvPr id="3" name="Rectangle 2"/>
           <p:cNvSpPr/>
           <p:nvPr/>
         </p:nvSpPr>
         <p:spPr>
           <a:xfrm>
-            <a:off x="457200" y="2926080"/>
-            <a:ext cx="4114800" cy="2560320"/>
+            <a:off x="0" y="0"/>
+            <a:ext cx="12191695" cy="137160"/>
           </a:xfrm>
           <a:prstGeom prst="rect">
             <a:avLst/>
           </a:prstGeom>
           <a:solidFill>
-            <a:srgbClr val="DBEAFE"/>
+            <a:srgbClr val="0066CC"/>
           </a:solidFill>
-          <a:ln w="25400">
-            <a:solidFill>
-              <a:srgbClr val="2563EB"/>
-            </a:solidFill>
+          <a:ln>
+            <a:noFill/>
           </a:ln>
         </p:spPr>
         <p:style>
@@ -3999,134 +3612,23 @@
           </a:fontRef>
         </p:style>
         <p:txBody>
-          <a:bodyPr rtlCol="0" anchor="ctr" wrap="square" lIns="182880" tIns="137160"/>
-          <a:lstStyle/>
-          <a:p>
-            <a:pPr algn="ctr">
-              <a:defRPr sz="1800">
-                <a:solidFill>
-                  <a:srgbClr val="1F2937"/>
-                </a:solidFill>
-                <a:latin typeface="Courier New"/>
-              </a:defRPr>
-            </a:pPr>
-            <a:r>
-              <a:t>for i in range(1, 4):</a:t>
-            </a:r>
-          </a:p>
-          <a:p>
-            <a:pPr>
-              <a:defRPr sz="1800">
-                <a:solidFill>
-                  <a:srgbClr val="1F2937"/>
-                </a:solidFill>
-                <a:latin typeface="Courier New"/>
-              </a:defRPr>
-            </a:pPr>
-            <a:r>
-              <a:t>    for j in range(1, 4):</a:t>
-            </a:r>
-          </a:p>
-          <a:p>
-            <a:pPr>
-              <a:defRPr sz="1800">
-                <a:solidFill>
-                  <a:srgbClr val="1F2937"/>
-                </a:solidFill>
-                <a:latin typeface="Courier New"/>
-              </a:defRPr>
-            </a:pPr>
-            <a:r>
-              <a:t>        print(i * j, end=" ")</a:t>
-            </a:r>
-          </a:p>
-          <a:p>
-            <a:pPr>
-              <a:defRPr sz="1800">
-                <a:solidFill>
-                  <a:srgbClr val="1F2937"/>
-                </a:solidFill>
-                <a:latin typeface="Courier New"/>
-              </a:defRPr>
-            </a:pPr>
-            <a:r>
-              <a:t>    print()</a:t>
-            </a:r>
-          </a:p>
-          <a:p>
-            <a:pPr>
-              <a:defRPr sz="1800">
-                <a:solidFill>
-                  <a:srgbClr val="1F2937"/>
-                </a:solidFill>
-                <a:latin typeface="Courier New"/>
-              </a:defRPr>
-            </a:pPr>
-          </a:p>
-          <a:p>
-            <a:pPr>
-              <a:defRPr sz="1800">
-                <a:solidFill>
-                  <a:srgbClr val="1F2937"/>
-                </a:solidFill>
-                <a:latin typeface="Courier New"/>
-              </a:defRPr>
-            </a:pPr>
-            <a:r>
-              <a:t># Output:</a:t>
-            </a:r>
-          </a:p>
-          <a:p>
-            <a:pPr>
-              <a:defRPr sz="1800">
-                <a:solidFill>
-                  <a:srgbClr val="1F2937"/>
-                </a:solidFill>
-                <a:latin typeface="Courier New"/>
-              </a:defRPr>
-            </a:pPr>
-            <a:r>
-              <a:t># 1 2 3</a:t>
-            </a:r>
-          </a:p>
-          <a:p>
-            <a:pPr>
-              <a:defRPr sz="1800">
-                <a:solidFill>
-                  <a:srgbClr val="1F2937"/>
-                </a:solidFill>
-                <a:latin typeface="Courier New"/>
-              </a:defRPr>
-            </a:pPr>
-            <a:r>
-              <a:t># 2 4 6</a:t>
-            </a:r>
-          </a:p>
-          <a:p>
-            <a:pPr>
-              <a:defRPr sz="1800">
-                <a:solidFill>
-                  <a:srgbClr val="1F2937"/>
-                </a:solidFill>
-                <a:latin typeface="Courier New"/>
-              </a:defRPr>
-            </a:pPr>
-            <a:r>
-              <a:t># 3 6 9</a:t>
-            </a:r>
-          </a:p>
-        </p:txBody>
-      </p:sp>
-      <p:sp>
-        <p:nvSpPr>
-          <p:cNvPr id="7" name="TextBox 6"/>
+          <a:bodyPr rtlCol="0" anchor="ctr"/>
+          <a:lstStyle/>
+          <a:p>
+            <a:pPr algn="ctr"/>
+          </a:p>
+        </p:txBody>
+      </p:sp>
+      <p:sp>
+        <p:nvSpPr>
+          <p:cNvPr id="4" name="TextBox 3"/>
           <p:cNvSpPr txBox="1"/>
           <p:nvPr/>
         </p:nvSpPr>
         <p:spPr>
           <a:xfrm>
-            <a:off x="5029200" y="2560320"/>
-            <a:ext cx="3657600" cy="365760"/>
+            <a:off x="457200" y="365760"/>
+            <a:ext cx="10972800" cy="731520"/>
           </a:xfrm>
           <a:prstGeom prst="rect">
             <a:avLst/>
@@ -4140,39 +3642,37 @@
           <a:lstStyle/>
           <a:p>
             <a:pPr>
-              <a:defRPr sz="2200" b="1">
-                <a:solidFill>
-                  <a:srgbClr val="1F2937"/>
-                </a:solidFill>
-              </a:defRPr>
-            </a:pPr>
-            <a:r>
-              <a:t>Star Pattern:</a:t>
-            </a:r>
-          </a:p>
-        </p:txBody>
-      </p:sp>
-      <p:sp>
-        <p:nvSpPr>
-          <p:cNvPr id="8" name="Rectangle 7"/>
+              <a:defRPr sz="4000" b="1">
+                <a:solidFill>
+                  <a:srgbClr val="003366"/>
+                </a:solidFill>
+              </a:defRPr>
+            </a:pPr>
+            <a:r>
+              <a:t>Nested Loops: Loops Inside Loops 🔄🔄</a:t>
+            </a:r>
+          </a:p>
+        </p:txBody>
+      </p:sp>
+      <p:sp>
+        <p:nvSpPr>
+          <p:cNvPr id="5" name="Rectangle 4"/>
           <p:cNvSpPr/>
           <p:nvPr/>
         </p:nvSpPr>
         <p:spPr>
           <a:xfrm>
-            <a:off x="5029200" y="2926080"/>
-            <a:ext cx="3657600" cy="2560320"/>
+            <a:off x="457200" y="1005840"/>
+            <a:ext cx="1828800" cy="45720"/>
           </a:xfrm>
           <a:prstGeom prst="rect">
             <a:avLst/>
           </a:prstGeom>
           <a:solidFill>
-            <a:srgbClr val="DBEAFE"/>
+            <a:srgbClr val="0066CC"/>
           </a:solidFill>
-          <a:ln w="25400">
-            <a:solidFill>
-              <a:srgbClr val="2563EB"/>
-            </a:solidFill>
+          <a:ln>
+            <a:noFill/>
           </a:ln>
         </p:spPr>
         <p:style>
@@ -4190,133 +3690,92 @@
           </a:fontRef>
         </p:style>
         <p:txBody>
-          <a:bodyPr rtlCol="0" anchor="ctr" wrap="square" lIns="182880" tIns="137160"/>
-          <a:lstStyle/>
-          <a:p>
-            <a:pPr algn="ctr">
-              <a:defRPr sz="1800">
-                <a:solidFill>
-                  <a:srgbClr val="1F2937"/>
-                </a:solidFill>
-                <a:latin typeface="Courier New"/>
-              </a:defRPr>
-            </a:pPr>
-            <a:r>
-              <a:t>for i in range(1, 5):</a:t>
-            </a:r>
-          </a:p>
+          <a:bodyPr rtlCol="0" anchor="ctr"/>
+          <a:lstStyle/>
+          <a:p>
+            <a:pPr algn="ctr"/>
+          </a:p>
+        </p:txBody>
+      </p:sp>
+      <p:sp>
+        <p:nvSpPr>
+          <p:cNvPr id="6" name="TextBox 5"/>
+          <p:cNvSpPr txBox="1"/>
+          <p:nvPr/>
+        </p:nvSpPr>
+        <p:spPr>
+          <a:xfrm>
+            <a:off x="640080" y="1371600"/>
+            <a:ext cx="10789920" cy="4572000"/>
+          </a:xfrm>
+          <a:prstGeom prst="rect">
+            <a:avLst/>
+          </a:prstGeom>
+          <a:noFill/>
+        </p:spPr>
+        <p:txBody>
+          <a:bodyPr wrap="square">
+            <a:spAutoFit/>
+          </a:bodyPr>
+          <a:lstStyle/>
           <a:p>
             <a:pPr>
-              <a:defRPr sz="1800">
-                <a:solidFill>
-                  <a:srgbClr val="1F2937"/>
-                </a:solidFill>
-                <a:latin typeface="Courier New"/>
-              </a:defRPr>
-            </a:pPr>
-            <a:r>
-              <a:t>    for j in range(i):</a:t>
+              <a:spcAft>
+                <a:spcPts val="800"/>
+              </a:spcAft>
+              <a:defRPr sz="2000" b="1">
+                <a:solidFill>
+                  <a:srgbClr val="333333"/>
+                </a:solidFill>
+              </a:defRPr>
+            </a:pPr>
+            <a:r>
+              <a:t>You can put loops inside other loops!</a:t>
             </a:r>
           </a:p>
           <a:p>
             <a:pPr>
-              <a:defRPr sz="1800">
-                <a:solidFill>
-                  <a:srgbClr val="1F2937"/>
-                </a:solidFill>
-                <a:latin typeface="Courier New"/>
-              </a:defRPr>
-            </a:pPr>
-            <a:r>
-              <a:t>        print("*", end="")</a:t>
+              <a:spcAft>
+                <a:spcPts val="800"/>
+              </a:spcAft>
+              <a:defRPr sz="2000" b="1">
+                <a:solidFill>
+                  <a:srgbClr val="333333"/>
+                </a:solidFill>
+              </a:defRPr>
+            </a:pPr>
+            <a:r>
+              <a:t>Example: Multiplication Table</a:t>
             </a:r>
           </a:p>
           <a:p>
             <a:pPr>
-              <a:defRPr sz="1800">
-                <a:solidFill>
-                  <a:srgbClr val="1F2937"/>
-                </a:solidFill>
-                <a:latin typeface="Courier New"/>
-              </a:defRPr>
-            </a:pPr>
-            <a:r>
-              <a:t>    print()</a:t>
+              <a:spcAft>
+                <a:spcPts val="800"/>
+              </a:spcAft>
+              <a:defRPr sz="2000" b="1">
+                <a:solidFill>
+                  <a:srgbClr val="333333"/>
+                </a:solidFill>
+              </a:defRPr>
+            </a:pPr>
+            <a:r>
+              <a:t>Pattern: Rectangle</a:t>
             </a:r>
           </a:p>
           <a:p>
             <a:pPr>
-              <a:defRPr sz="1800">
-                <a:solidFill>
-                  <a:srgbClr val="1F2937"/>
-                </a:solidFill>
-                <a:latin typeface="Courier New"/>
-              </a:defRPr>
-            </a:pPr>
-          </a:p>
-          <a:p>
-            <a:pPr>
-              <a:defRPr sz="1800">
-                <a:solidFill>
-                  <a:srgbClr val="1F2937"/>
-                </a:solidFill>
-                <a:latin typeface="Courier New"/>
-              </a:defRPr>
-            </a:pPr>
-            <a:r>
-              <a:t># Output:</a:t>
-            </a:r>
-          </a:p>
-          <a:p>
-            <a:pPr>
-              <a:defRPr sz="1800">
-                <a:solidFill>
-                  <a:srgbClr val="1F2937"/>
-                </a:solidFill>
-                <a:latin typeface="Courier New"/>
-              </a:defRPr>
-            </a:pPr>
-            <a:r>
-              <a:t># *</a:t>
-            </a:r>
-          </a:p>
-          <a:p>
-            <a:pPr>
-              <a:defRPr sz="1800">
-                <a:solidFill>
-                  <a:srgbClr val="1F2937"/>
-                </a:solidFill>
-                <a:latin typeface="Courier New"/>
-              </a:defRPr>
-            </a:pPr>
-            <a:r>
-              <a:t># **</a:t>
-            </a:r>
-          </a:p>
-          <a:p>
-            <a:pPr>
-              <a:defRPr sz="1800">
-                <a:solidFill>
-                  <a:srgbClr val="1F2937"/>
-                </a:solidFill>
-                <a:latin typeface="Courier New"/>
-              </a:defRPr>
-            </a:pPr>
-            <a:r>
-              <a:t># ***</a:t>
-            </a:r>
-          </a:p>
-          <a:p>
-            <a:pPr>
-              <a:defRPr sz="1800">
-                <a:solidFill>
-                  <a:srgbClr val="1F2937"/>
-                </a:solidFill>
-                <a:latin typeface="Courier New"/>
-              </a:defRPr>
-            </a:pPr>
-            <a:r>
-              <a:t># ****</a:t>
+              <a:spcAft>
+                <a:spcPts val="800"/>
+              </a:spcAft>
+              <a:defRPr sz="2000" b="1">
+                <a:solidFill>
+                  <a:srgbClr val="333333"/>
+                </a:solidFill>
+              </a:defRPr>
+            </a:pPr>
+            <a:r>
+              <a:t>Output:</a:t>
             </a:r>
           </a:p>
         </p:txBody>
@@ -4332,14 +3791,6 @@
 <file path=ppt/slides/slide12.xml><?xml version="1.0" encoding="utf-8"?>
 <p:sld xmlns:a="http://schemas.openxmlformats.org/drawingml/2006/main" xmlns:p="http://schemas.openxmlformats.org/presentationml/2006/main" xmlns:r="http://schemas.openxmlformats.org/officeDocument/2006/relationships">
   <p:cSld>
-    <p:bg>
-      <p:bgPr>
-        <a:solidFill>
-          <a:srgbClr val="FFFFFF"/>
-        </a:solidFill>
-        <a:effectLst/>
-      </p:bgPr>
-    </p:bg>
     <p:spTree>
       <p:nvGrpSpPr>
         <p:cNvPr id="1" name=""/>
@@ -4349,55 +3800,20 @@
       <p:grpSpPr/>
       <p:sp>
         <p:nvSpPr>
-          <p:cNvPr id="2" name="TextBox 1"/>
-          <p:cNvSpPr txBox="1"/>
-          <p:nvPr/>
-        </p:nvSpPr>
-        <p:spPr>
-          <a:xfrm>
-            <a:off x="457200" y="457200"/>
-            <a:ext cx="8229600" cy="731520"/>
-          </a:xfrm>
-          <a:prstGeom prst="rect">
-            <a:avLst/>
-          </a:prstGeom>
-          <a:noFill/>
-        </p:spPr>
-        <p:txBody>
-          <a:bodyPr wrap="none">
-            <a:spAutoFit/>
-          </a:bodyPr>
-          <a:lstStyle/>
-          <a:p>
-            <a:pPr>
-              <a:defRPr sz="4000" b="1">
-                <a:solidFill>
-                  <a:srgbClr val="1F2937"/>
-                </a:solidFill>
-              </a:defRPr>
-            </a:pPr>
-            <a:r>
-              <a:t>Real-World Applications</a:t>
-            </a:r>
-          </a:p>
-        </p:txBody>
-      </p:sp>
-      <p:sp>
-        <p:nvSpPr>
-          <p:cNvPr id="3" name="Rectangle 2"/>
+          <p:cNvPr id="2" name="Rectangle 1"/>
           <p:cNvSpPr/>
           <p:nvPr/>
         </p:nvSpPr>
         <p:spPr>
           <a:xfrm>
-            <a:off x="457200" y="1280160"/>
-            <a:ext cx="1371600" cy="73152"/>
+            <a:off x="0" y="0"/>
+            <a:ext cx="12191695" cy="6858000"/>
           </a:xfrm>
           <a:prstGeom prst="rect">
             <a:avLst/>
           </a:prstGeom>
           <a:solidFill>
-            <a:srgbClr val="2563EB"/>
+            <a:srgbClr val="FFFFFF"/>
           </a:solidFill>
           <a:ln>
             <a:noFill/>
@@ -4427,60 +3843,23 @@
       </p:sp>
       <p:sp>
         <p:nvSpPr>
-          <p:cNvPr id="4" name="TextBox 3"/>
-          <p:cNvSpPr txBox="1"/>
-          <p:nvPr/>
-        </p:nvSpPr>
-        <p:spPr>
-          <a:xfrm>
-            <a:off x="457200" y="1828800"/>
-            <a:ext cx="2743200" cy="365760"/>
-          </a:xfrm>
-          <a:prstGeom prst="rect">
-            <a:avLst/>
-          </a:prstGeom>
-          <a:noFill/>
-        </p:spPr>
-        <p:txBody>
-          <a:bodyPr wrap="none">
-            <a:spAutoFit/>
-          </a:bodyPr>
-          <a:lstStyle/>
-          <a:p>
-            <a:pPr>
-              <a:defRPr sz="2000" b="1">
-                <a:solidFill>
-                  <a:srgbClr val="1F2937"/>
-                </a:solidFill>
-              </a:defRPr>
-            </a:pPr>
-            <a:r>
-              <a:t>Calculate Sum:</a:t>
-            </a:r>
-          </a:p>
-        </p:txBody>
-      </p:sp>
-      <p:sp>
-        <p:nvSpPr>
-          <p:cNvPr id="5" name="Rectangle 4"/>
+          <p:cNvPr id="3" name="Rectangle 2"/>
           <p:cNvSpPr/>
           <p:nvPr/>
         </p:nvSpPr>
         <p:spPr>
           <a:xfrm>
-            <a:off x="457200" y="2194560"/>
-            <a:ext cx="2743200" cy="1645920"/>
+            <a:off x="0" y="0"/>
+            <a:ext cx="12191695" cy="137160"/>
           </a:xfrm>
           <a:prstGeom prst="rect">
             <a:avLst/>
           </a:prstGeom>
           <a:solidFill>
-            <a:srgbClr val="DBEAFE"/>
+            <a:srgbClr val="0066CC"/>
           </a:solidFill>
-          <a:ln w="25400">
-            <a:solidFill>
-              <a:srgbClr val="2563EB"/>
-            </a:solidFill>
+          <a:ln>
+            <a:noFill/>
           </a:ln>
         </p:spPr>
         <p:style>
@@ -4498,85 +3877,23 @@
           </a:fontRef>
         </p:style>
         <p:txBody>
-          <a:bodyPr rtlCol="0" anchor="ctr" wrap="square" lIns="182880" tIns="137160"/>
-          <a:lstStyle/>
-          <a:p>
-            <a:pPr algn="ctr">
-              <a:defRPr sz="1800">
-                <a:solidFill>
-                  <a:srgbClr val="1F2937"/>
-                </a:solidFill>
-                <a:latin typeface="Courier New"/>
-              </a:defRPr>
-            </a:pPr>
-            <a:r>
-              <a:t>total = 0</a:t>
-            </a:r>
-          </a:p>
-          <a:p>
-            <a:pPr>
-              <a:defRPr sz="1800">
-                <a:solidFill>
-                  <a:srgbClr val="1F2937"/>
-                </a:solidFill>
-                <a:latin typeface="Courier New"/>
-              </a:defRPr>
-            </a:pPr>
-            <a:r>
-              <a:t>for i in range(1, 101):</a:t>
-            </a:r>
-          </a:p>
-          <a:p>
-            <a:pPr>
-              <a:defRPr sz="1800">
-                <a:solidFill>
-                  <a:srgbClr val="1F2937"/>
-                </a:solidFill>
-                <a:latin typeface="Courier New"/>
-              </a:defRPr>
-            </a:pPr>
-            <a:r>
-              <a:t>    total += i</a:t>
-            </a:r>
-          </a:p>
-          <a:p>
-            <a:pPr>
-              <a:defRPr sz="1800">
-                <a:solidFill>
-                  <a:srgbClr val="1F2937"/>
-                </a:solidFill>
-                <a:latin typeface="Courier New"/>
-              </a:defRPr>
-            </a:pPr>
-            <a:r>
-              <a:t>print(total)</a:t>
-            </a:r>
-          </a:p>
-          <a:p>
-            <a:pPr>
-              <a:defRPr sz="1800">
-                <a:solidFill>
-                  <a:srgbClr val="1F2937"/>
-                </a:solidFill>
-                <a:latin typeface="Courier New"/>
-              </a:defRPr>
-            </a:pPr>
-            <a:r>
-              <a:t># 5050</a:t>
-            </a:r>
-          </a:p>
-        </p:txBody>
-      </p:sp>
-      <p:sp>
-        <p:nvSpPr>
-          <p:cNvPr id="6" name="TextBox 5"/>
+          <a:bodyPr rtlCol="0" anchor="ctr"/>
+          <a:lstStyle/>
+          <a:p>
+            <a:pPr algn="ctr"/>
+          </a:p>
+        </p:txBody>
+      </p:sp>
+      <p:sp>
+        <p:nvSpPr>
+          <p:cNvPr id="4" name="TextBox 3"/>
           <p:cNvSpPr txBox="1"/>
           <p:nvPr/>
         </p:nvSpPr>
         <p:spPr>
           <a:xfrm>
-            <a:off x="3474720" y="1828800"/>
-            <a:ext cx="2560320" cy="365760"/>
+            <a:off x="457200" y="365760"/>
+            <a:ext cx="10972800" cy="731520"/>
           </a:xfrm>
           <a:prstGeom prst="rect">
             <a:avLst/>
@@ -4590,39 +3907,37 @@
           <a:lstStyle/>
           <a:p>
             <a:pPr>
-              <a:defRPr sz="2000" b="1">
-                <a:solidFill>
-                  <a:srgbClr val="1F2937"/>
-                </a:solidFill>
-              </a:defRPr>
-            </a:pPr>
-            <a:r>
-              <a:t>Find Average:</a:t>
-            </a:r>
-          </a:p>
-        </p:txBody>
-      </p:sp>
-      <p:sp>
-        <p:nvSpPr>
-          <p:cNvPr id="7" name="Rectangle 6"/>
+              <a:defRPr sz="4000" b="1">
+                <a:solidFill>
+                  <a:srgbClr val="003366"/>
+                </a:solidFill>
+              </a:defRPr>
+            </a:pPr>
+            <a:r>
+              <a:t>Real-World Applications 🌍</a:t>
+            </a:r>
+          </a:p>
+        </p:txBody>
+      </p:sp>
+      <p:sp>
+        <p:nvSpPr>
+          <p:cNvPr id="5" name="Rectangle 4"/>
           <p:cNvSpPr/>
           <p:nvPr/>
         </p:nvSpPr>
         <p:spPr>
           <a:xfrm>
-            <a:off x="3474720" y="2194560"/>
-            <a:ext cx="2560320" cy="1645920"/>
+            <a:off x="457200" y="1005840"/>
+            <a:ext cx="1828800" cy="45720"/>
           </a:xfrm>
           <a:prstGeom prst="rect">
             <a:avLst/>
           </a:prstGeom>
           <a:solidFill>
-            <a:srgbClr val="DBEAFE"/>
+            <a:srgbClr val="0066CC"/>
           </a:solidFill>
-          <a:ln w="25400">
-            <a:solidFill>
-              <a:srgbClr val="2563EB"/>
-            </a:solidFill>
+          <a:ln>
+            <a:noFill/>
           </a:ln>
         </p:spPr>
         <p:style>
@@ -4640,85 +3955,23 @@
           </a:fontRef>
         </p:style>
         <p:txBody>
-          <a:bodyPr rtlCol="0" anchor="ctr" wrap="square" lIns="182880" tIns="137160"/>
-          <a:lstStyle/>
-          <a:p>
-            <a:pPr algn="ctr">
-              <a:defRPr sz="1800">
-                <a:solidFill>
-                  <a:srgbClr val="1F2937"/>
-                </a:solidFill>
-                <a:latin typeface="Courier New"/>
-              </a:defRPr>
-            </a:pPr>
-            <a:r>
-              <a:t>scores = [85, 92, 78]</a:t>
-            </a:r>
-          </a:p>
-          <a:p>
-            <a:pPr>
-              <a:defRPr sz="1800">
-                <a:solidFill>
-                  <a:srgbClr val="1F2937"/>
-                </a:solidFill>
-                <a:latin typeface="Courier New"/>
-              </a:defRPr>
-            </a:pPr>
-            <a:r>
-              <a:t>total = 0</a:t>
-            </a:r>
-          </a:p>
-          <a:p>
-            <a:pPr>
-              <a:defRPr sz="1800">
-                <a:solidFill>
-                  <a:srgbClr val="1F2937"/>
-                </a:solidFill>
-                <a:latin typeface="Courier New"/>
-              </a:defRPr>
-            </a:pPr>
-            <a:r>
-              <a:t>for s in scores:</a:t>
-            </a:r>
-          </a:p>
-          <a:p>
-            <a:pPr>
-              <a:defRPr sz="1800">
-                <a:solidFill>
-                  <a:srgbClr val="1F2937"/>
-                </a:solidFill>
-                <a:latin typeface="Courier New"/>
-              </a:defRPr>
-            </a:pPr>
-            <a:r>
-              <a:t>    total += s</a:t>
-            </a:r>
-          </a:p>
-          <a:p>
-            <a:pPr>
-              <a:defRPr sz="1800">
-                <a:solidFill>
-                  <a:srgbClr val="1F2937"/>
-                </a:solidFill>
-                <a:latin typeface="Courier New"/>
-              </a:defRPr>
-            </a:pPr>
-            <a:r>
-              <a:t>avg = total / 3</a:t>
-            </a:r>
-          </a:p>
-        </p:txBody>
-      </p:sp>
-      <p:sp>
-        <p:nvSpPr>
-          <p:cNvPr id="8" name="TextBox 7"/>
+          <a:bodyPr rtlCol="0" anchor="ctr"/>
+          <a:lstStyle/>
+          <a:p>
+            <a:pPr algn="ctr"/>
+          </a:p>
+        </p:txBody>
+      </p:sp>
+      <p:sp>
+        <p:nvSpPr>
+          <p:cNvPr id="6" name="TextBox 5"/>
           <p:cNvSpPr txBox="1"/>
           <p:nvPr/>
         </p:nvSpPr>
         <p:spPr>
           <a:xfrm>
-            <a:off x="6309360" y="1828800"/>
-            <a:ext cx="2560320" cy="365760"/>
+            <a:off x="640080" y="1371600"/>
+            <a:ext cx="10789920" cy="4572000"/>
           </a:xfrm>
           <a:prstGeom prst="rect">
             <a:avLst/>
@@ -4726,385 +3979,53 @@
           <a:noFill/>
         </p:spPr>
         <p:txBody>
-          <a:bodyPr wrap="none">
+          <a:bodyPr wrap="square">
             <a:spAutoFit/>
           </a:bodyPr>
           <a:lstStyle/>
           <a:p>
             <a:pPr>
+              <a:spcAft>
+                <a:spcPts val="800"/>
+              </a:spcAft>
               <a:defRPr sz="2000" b="1">
                 <a:solidFill>
-                  <a:srgbClr val="1F2937"/>
-                </a:solidFill>
-              </a:defRPr>
-            </a:pPr>
-            <a:r>
-              <a:t>Factorial:</a:t>
-            </a:r>
-          </a:p>
-        </p:txBody>
-      </p:sp>
-      <p:sp>
-        <p:nvSpPr>
-          <p:cNvPr id="9" name="Rectangle 8"/>
-          <p:cNvSpPr/>
-          <p:nvPr/>
-        </p:nvSpPr>
-        <p:spPr>
-          <a:xfrm>
-            <a:off x="6309360" y="2194560"/>
-            <a:ext cx="2377440" cy="1645920"/>
-          </a:xfrm>
-          <a:prstGeom prst="rect">
-            <a:avLst/>
-          </a:prstGeom>
-          <a:solidFill>
-            <a:srgbClr val="DBEAFE"/>
-          </a:solidFill>
-          <a:ln w="25400">
-            <a:solidFill>
-              <a:srgbClr val="2563EB"/>
-            </a:solidFill>
-          </a:ln>
-        </p:spPr>
-        <p:style>
-          <a:lnRef idx="1">
-            <a:schemeClr val="accent1"/>
-          </a:lnRef>
-          <a:fillRef idx="3">
-            <a:schemeClr val="accent1"/>
-          </a:fillRef>
-          <a:effectRef idx="2">
-            <a:schemeClr val="accent1"/>
-          </a:effectRef>
-          <a:fontRef idx="minor">
-            <a:schemeClr val="lt1"/>
-          </a:fontRef>
-        </p:style>
-        <p:txBody>
-          <a:bodyPr rtlCol="0" anchor="ctr" wrap="square" lIns="182880" tIns="137160"/>
-          <a:lstStyle/>
-          <a:p>
-            <a:pPr algn="ctr">
-              <a:defRPr sz="1800">
-                <a:solidFill>
-                  <a:srgbClr val="1F2937"/>
-                </a:solidFill>
-                <a:latin typeface="Courier New"/>
-              </a:defRPr>
-            </a:pPr>
-            <a:r>
-              <a:t>n = 5</a:t>
+                  <a:srgbClr val="333333"/>
+                </a:solidFill>
+              </a:defRPr>
+            </a:pPr>
+            <a:r>
+              <a:t>Sum of Numbers</a:t>
             </a:r>
           </a:p>
           <a:p>
             <a:pPr>
-              <a:defRPr sz="1800">
-                <a:solidFill>
-                  <a:srgbClr val="1F2937"/>
-                </a:solidFill>
-                <a:latin typeface="Courier New"/>
-              </a:defRPr>
-            </a:pPr>
-            <a:r>
-              <a:t>result = 1</a:t>
+              <a:spcAft>
+                <a:spcPts val="800"/>
+              </a:spcAft>
+              <a:defRPr sz="2000" b="1">
+                <a:solidFill>
+                  <a:srgbClr val="333333"/>
+                </a:solidFill>
+              </a:defRPr>
+            </a:pPr>
+            <a:r>
+              <a:t>Average Calculator</a:t>
             </a:r>
           </a:p>
           <a:p>
             <a:pPr>
-              <a:defRPr sz="1800">
-                <a:solidFill>
-                  <a:srgbClr val="1F2937"/>
-                </a:solidFill>
-                <a:latin typeface="Courier New"/>
-              </a:defRPr>
-            </a:pPr>
-            <a:r>
-              <a:t>for i in range(1, n+1):</a:t>
-            </a:r>
-          </a:p>
-          <a:p>
-            <a:pPr>
-              <a:defRPr sz="1800">
-                <a:solidFill>
-                  <a:srgbClr val="1F2937"/>
-                </a:solidFill>
-                <a:latin typeface="Courier New"/>
-              </a:defRPr>
-            </a:pPr>
-            <a:r>
-              <a:t>    result *= i</a:t>
-            </a:r>
-          </a:p>
-          <a:p>
-            <a:pPr>
-              <a:defRPr sz="1800">
-                <a:solidFill>
-                  <a:srgbClr val="1F2937"/>
-                </a:solidFill>
-                <a:latin typeface="Courier New"/>
-              </a:defRPr>
-            </a:pPr>
-            <a:r>
-              <a:t># 120</a:t>
-            </a:r>
-          </a:p>
-        </p:txBody>
-      </p:sp>
-      <p:sp>
-        <p:nvSpPr>
-          <p:cNvPr id="10" name="TextBox 9"/>
-          <p:cNvSpPr txBox="1"/>
-          <p:nvPr/>
-        </p:nvSpPr>
-        <p:spPr>
-          <a:xfrm>
-            <a:off x="457200" y="4114800"/>
-            <a:ext cx="4114800" cy="365760"/>
-          </a:xfrm>
-          <a:prstGeom prst="rect">
-            <a:avLst/>
-          </a:prstGeom>
-          <a:noFill/>
-        </p:spPr>
-        <p:txBody>
-          <a:bodyPr wrap="none">
-            <a:spAutoFit/>
-          </a:bodyPr>
-          <a:lstStyle/>
-          <a:p>
-            <a:pPr>
+              <a:spcAft>
+                <a:spcPts val="800"/>
+              </a:spcAft>
               <a:defRPr sz="2000" b="1">
                 <a:solidFill>
-                  <a:srgbClr val="1F2937"/>
-                </a:solidFill>
-              </a:defRPr>
-            </a:pPr>
-            <a:r>
-              <a:t>Input Validation:</a:t>
-            </a:r>
-          </a:p>
-        </p:txBody>
-      </p:sp>
-      <p:sp>
-        <p:nvSpPr>
-          <p:cNvPr id="11" name="Rectangle 10"/>
-          <p:cNvSpPr/>
-          <p:nvPr/>
-        </p:nvSpPr>
-        <p:spPr>
-          <a:xfrm>
-            <a:off x="457200" y="4480560"/>
-            <a:ext cx="4114800" cy="1645920"/>
-          </a:xfrm>
-          <a:prstGeom prst="rect">
-            <a:avLst/>
-          </a:prstGeom>
-          <a:solidFill>
-            <a:srgbClr val="DBEAFE"/>
-          </a:solidFill>
-          <a:ln w="25400">
-            <a:solidFill>
-              <a:srgbClr val="2563EB"/>
-            </a:solidFill>
-          </a:ln>
-        </p:spPr>
-        <p:style>
-          <a:lnRef idx="1">
-            <a:schemeClr val="accent1"/>
-          </a:lnRef>
-          <a:fillRef idx="3">
-            <a:schemeClr val="accent1"/>
-          </a:fillRef>
-          <a:effectRef idx="2">
-            <a:schemeClr val="accent1"/>
-          </a:effectRef>
-          <a:fontRef idx="minor">
-            <a:schemeClr val="lt1"/>
-          </a:fontRef>
-        </p:style>
-        <p:txBody>
-          <a:bodyPr rtlCol="0" anchor="ctr" wrap="square" lIns="182880" tIns="137160"/>
-          <a:lstStyle/>
-          <a:p>
-            <a:pPr algn="ctr">
-              <a:defRPr sz="1800">
-                <a:solidFill>
-                  <a:srgbClr val="1F2937"/>
-                </a:solidFill>
-                <a:latin typeface="Courier New"/>
-              </a:defRPr>
-            </a:pPr>
-            <a:r>
-              <a:t>for attempt in range(3):</a:t>
-            </a:r>
-          </a:p>
-          <a:p>
-            <a:pPr>
-              <a:defRPr sz="1800">
-                <a:solidFill>
-                  <a:srgbClr val="1F2937"/>
-                </a:solidFill>
-                <a:latin typeface="Courier New"/>
-              </a:defRPr>
-            </a:pPr>
-            <a:r>
-              <a:t>    password = input("Password: ")</a:t>
-            </a:r>
-          </a:p>
-          <a:p>
-            <a:pPr>
-              <a:defRPr sz="1800">
-                <a:solidFill>
-                  <a:srgbClr val="1F2937"/>
-                </a:solidFill>
-                <a:latin typeface="Courier New"/>
-              </a:defRPr>
-            </a:pPr>
-            <a:r>
-              <a:t>    if password == "secret":</a:t>
-            </a:r>
-          </a:p>
-          <a:p>
-            <a:pPr>
-              <a:defRPr sz="1800">
-                <a:solidFill>
-                  <a:srgbClr val="1F2937"/>
-                </a:solidFill>
-                <a:latin typeface="Courier New"/>
-              </a:defRPr>
-            </a:pPr>
-            <a:r>
-              <a:t>        break</a:t>
-            </a:r>
-          </a:p>
-        </p:txBody>
-      </p:sp>
-      <p:sp>
-        <p:nvSpPr>
-          <p:cNvPr id="12" name="TextBox 11"/>
-          <p:cNvSpPr txBox="1"/>
-          <p:nvPr/>
-        </p:nvSpPr>
-        <p:spPr>
-          <a:xfrm>
-            <a:off x="5029200" y="4114800"/>
-            <a:ext cx="3657600" cy="365760"/>
-          </a:xfrm>
-          <a:prstGeom prst="rect">
-            <a:avLst/>
-          </a:prstGeom>
-          <a:noFill/>
-        </p:spPr>
-        <p:txBody>
-          <a:bodyPr wrap="none">
-            <a:spAutoFit/>
-          </a:bodyPr>
-          <a:lstStyle/>
-          <a:p>
-            <a:pPr>
-              <a:defRPr sz="2000" b="1">
-                <a:solidFill>
-                  <a:srgbClr val="1F2937"/>
-                </a:solidFill>
-              </a:defRPr>
-            </a:pPr>
-            <a:r>
-              <a:t>Search:</a:t>
-            </a:r>
-          </a:p>
-        </p:txBody>
-      </p:sp>
-      <p:sp>
-        <p:nvSpPr>
-          <p:cNvPr id="13" name="Rectangle 12"/>
-          <p:cNvSpPr/>
-          <p:nvPr/>
-        </p:nvSpPr>
-        <p:spPr>
-          <a:xfrm>
-            <a:off x="5029200" y="4480560"/>
-            <a:ext cx="3657600" cy="1645920"/>
-          </a:xfrm>
-          <a:prstGeom prst="rect">
-            <a:avLst/>
-          </a:prstGeom>
-          <a:solidFill>
-            <a:srgbClr val="DBEAFE"/>
-          </a:solidFill>
-          <a:ln w="25400">
-            <a:solidFill>
-              <a:srgbClr val="2563EB"/>
-            </a:solidFill>
-          </a:ln>
-        </p:spPr>
-        <p:style>
-          <a:lnRef idx="1">
-            <a:schemeClr val="accent1"/>
-          </a:lnRef>
-          <a:fillRef idx="3">
-            <a:schemeClr val="accent1"/>
-          </a:fillRef>
-          <a:effectRef idx="2">
-            <a:schemeClr val="accent1"/>
-          </a:effectRef>
-          <a:fontRef idx="minor">
-            <a:schemeClr val="lt1"/>
-          </a:fontRef>
-        </p:style>
-        <p:txBody>
-          <a:bodyPr rtlCol="0" anchor="ctr" wrap="square" lIns="182880" tIns="137160"/>
-          <a:lstStyle/>
-          <a:p>
-            <a:pPr algn="ctr">
-              <a:defRPr sz="1800">
-                <a:solidFill>
-                  <a:srgbClr val="1F2937"/>
-                </a:solidFill>
-                <a:latin typeface="Courier New"/>
-              </a:defRPr>
-            </a:pPr>
-            <a:r>
-              <a:t>names = ["Alice", "Bob"]</a:t>
-            </a:r>
-          </a:p>
-          <a:p>
-            <a:pPr>
-              <a:defRPr sz="1800">
-                <a:solidFill>
-                  <a:srgbClr val="1F2937"/>
-                </a:solidFill>
-                <a:latin typeface="Courier New"/>
-              </a:defRPr>
-            </a:pPr>
-            <a:r>
-              <a:t>for name in names:</a:t>
-            </a:r>
-          </a:p>
-          <a:p>
-            <a:pPr>
-              <a:defRPr sz="1800">
-                <a:solidFill>
-                  <a:srgbClr val="1F2937"/>
-                </a:solidFill>
-                <a:latin typeface="Courier New"/>
-              </a:defRPr>
-            </a:pPr>
-            <a:r>
-              <a:t>    if name == "Bob":</a:t>
-            </a:r>
-          </a:p>
-          <a:p>
-            <a:pPr>
-              <a:defRPr sz="1800">
-                <a:solidFill>
-                  <a:srgbClr val="1F2937"/>
-                </a:solidFill>
-                <a:latin typeface="Courier New"/>
-              </a:defRPr>
-            </a:pPr>
-            <a:r>
-              <a:t>        print("Found!")</a:t>
+                  <a:srgbClr val="333333"/>
+                </a:solidFill>
+              </a:defRPr>
+            </a:pPr>
+            <a:r>
+              <a:t>Factorial Calculator</a:t>
             </a:r>
           </a:p>
         </p:txBody>
@@ -5120,14 +4041,6 @@
 <file path=ppt/slides/slide13.xml><?xml version="1.0" encoding="utf-8"?>
 <p:sld xmlns:a="http://schemas.openxmlformats.org/drawingml/2006/main" xmlns:p="http://schemas.openxmlformats.org/presentationml/2006/main" xmlns:r="http://schemas.openxmlformats.org/officeDocument/2006/relationships">
   <p:cSld>
-    <p:bg>
-      <p:bgPr>
-        <a:solidFill>
-          <a:srgbClr val="FFFFFF"/>
-        </a:solidFill>
-        <a:effectLst/>
-      </p:bgPr>
-    </p:bg>
     <p:spTree>
       <p:nvGrpSpPr>
         <p:cNvPr id="1" name=""/>
@@ -5137,55 +4050,20 @@
       <p:grpSpPr/>
       <p:sp>
         <p:nvSpPr>
-          <p:cNvPr id="2" name="TextBox 1"/>
-          <p:cNvSpPr txBox="1"/>
-          <p:nvPr/>
-        </p:nvSpPr>
-        <p:spPr>
-          <a:xfrm>
-            <a:off x="457200" y="457200"/>
-            <a:ext cx="8229600" cy="731520"/>
-          </a:xfrm>
-          <a:prstGeom prst="rect">
-            <a:avLst/>
-          </a:prstGeom>
-          <a:noFill/>
-        </p:spPr>
-        <p:txBody>
-          <a:bodyPr wrap="none">
-            <a:spAutoFit/>
-          </a:bodyPr>
-          <a:lstStyle/>
-          <a:p>
-            <a:pPr>
-              <a:defRPr sz="4000" b="1">
-                <a:solidFill>
-                  <a:srgbClr val="1F2937"/>
-                </a:solidFill>
-              </a:defRPr>
-            </a:pPr>
-            <a:r>
-              <a:t>Which Loop to Use When?</a:t>
-            </a:r>
-          </a:p>
-        </p:txBody>
-      </p:sp>
-      <p:sp>
-        <p:nvSpPr>
-          <p:cNvPr id="3" name="Rectangle 2"/>
+          <p:cNvPr id="2" name="Rectangle 1"/>
           <p:cNvSpPr/>
           <p:nvPr/>
         </p:nvSpPr>
         <p:spPr>
           <a:xfrm>
-            <a:off x="457200" y="1280160"/>
-            <a:ext cx="1371600" cy="73152"/>
+            <a:off x="0" y="0"/>
+            <a:ext cx="12191695" cy="6858000"/>
           </a:xfrm>
           <a:prstGeom prst="rect">
             <a:avLst/>
           </a:prstGeom>
           <a:solidFill>
-            <a:srgbClr val="2563EB"/>
+            <a:srgbClr val="FFFFFF"/>
           </a:solidFill>
           <a:ln>
             <a:noFill/>
@@ -5215,25 +4093,23 @@
       </p:sp>
       <p:sp>
         <p:nvSpPr>
-          <p:cNvPr id="4" name="Rectangle 3"/>
+          <p:cNvPr id="3" name="Rectangle 2"/>
           <p:cNvSpPr/>
           <p:nvPr/>
         </p:nvSpPr>
         <p:spPr>
           <a:xfrm>
-            <a:off x="457200" y="1828800"/>
-            <a:ext cx="3931920" cy="1828800"/>
+            <a:off x="0" y="0"/>
+            <a:ext cx="12191695" cy="137160"/>
           </a:xfrm>
           <a:prstGeom prst="rect">
             <a:avLst/>
           </a:prstGeom>
           <a:solidFill>
-            <a:srgbClr val="DBEAFE"/>
+            <a:srgbClr val="0066CC"/>
           </a:solidFill>
-          <a:ln w="25400">
-            <a:solidFill>
-              <a:srgbClr val="2563EB"/>
-            </a:solidFill>
+          <a:ln>
+            <a:noFill/>
           </a:ln>
         </p:spPr>
         <p:style>
@@ -5251,57 +4127,44 @@
           </a:fontRef>
         </p:style>
         <p:txBody>
-          <a:bodyPr rtlCol="0" anchor="ctr" lIns="182880" tIns="137160"/>
-          <a:lstStyle/>
-          <a:p>
-            <a:pPr algn="ctr">
-              <a:defRPr sz="2400" b="1">
-                <a:solidFill>
-                  <a:srgbClr val="2563EB"/>
-                </a:solidFill>
-              </a:defRPr>
-            </a:pPr>
-            <a:r>
-              <a:t>Use WHILE when:</a:t>
-            </a:r>
-          </a:p>
+          <a:bodyPr rtlCol="0" anchor="ctr"/>
+          <a:lstStyle/>
+          <a:p>
+            <a:pPr algn="ctr"/>
+          </a:p>
+        </p:txBody>
+      </p:sp>
+      <p:sp>
+        <p:nvSpPr>
+          <p:cNvPr id="4" name="TextBox 3"/>
+          <p:cNvSpPr txBox="1"/>
+          <p:nvPr/>
+        </p:nvSpPr>
+        <p:spPr>
+          <a:xfrm>
+            <a:off x="457200" y="365760"/>
+            <a:ext cx="10972800" cy="731520"/>
+          </a:xfrm>
+          <a:prstGeom prst="rect">
+            <a:avLst/>
+          </a:prstGeom>
+          <a:noFill/>
+        </p:spPr>
+        <p:txBody>
+          <a:bodyPr wrap="none">
+            <a:spAutoFit/>
+          </a:bodyPr>
+          <a:lstStyle/>
           <a:p>
             <a:pPr>
-              <a:spcBef>
-                <a:spcPts val="1000"/>
-              </a:spcBef>
-              <a:defRPr sz="1800">
-                <a:solidFill>
-                  <a:srgbClr val="1F2937"/>
-                </a:solidFill>
-              </a:defRPr>
-            </a:pPr>
-            <a:r>
-              <a:t>• You don't know how many times to loop</a:t>
-            </a:r>
-          </a:p>
-          <a:p>
-            <a:pPr>
-              <a:defRPr sz="1800">
-                <a:solidFill>
-                  <a:srgbClr val="1F2937"/>
-                </a:solidFill>
-              </a:defRPr>
-            </a:pPr>
-            <a:r>
-              <a:t>• You need to loop until a condition changes</a:t>
-            </a:r>
-          </a:p>
-          <a:p>
-            <a:pPr>
-              <a:defRPr sz="1800">
-                <a:solidFill>
-                  <a:srgbClr val="1F2937"/>
-                </a:solidFill>
-              </a:defRPr>
-            </a:pPr>
-            <a:r>
-              <a:t>• User input validation</a:t>
+              <a:defRPr sz="4000" b="1">
+                <a:solidFill>
+                  <a:srgbClr val="003366"/>
+                </a:solidFill>
+              </a:defRPr>
+            </a:pPr>
+            <a:r>
+              <a:t>Which Loop Should I Use? 🤔</a:t>
             </a:r>
           </a:p>
         </p:txBody>
@@ -5314,19 +4177,17 @@
         </p:nvSpPr>
         <p:spPr>
           <a:xfrm>
-            <a:off x="4754880" y="1828800"/>
-            <a:ext cx="3931920" cy="1828800"/>
+            <a:off x="457200" y="1005840"/>
+            <a:ext cx="1828800" cy="45720"/>
           </a:xfrm>
           <a:prstGeom prst="rect">
             <a:avLst/>
           </a:prstGeom>
           <a:solidFill>
-            <a:srgbClr val="DCFCE7"/>
+            <a:srgbClr val="0066CC"/>
           </a:solidFill>
-          <a:ln w="25400">
-            <a:solidFill>
-              <a:srgbClr val="22C55E"/>
-            </a:solidFill>
+          <a:ln>
+            <a:noFill/>
           </a:ln>
         </p:spPr>
         <p:style>
@@ -5344,58 +4205,10 @@
           </a:fontRef>
         </p:style>
         <p:txBody>
-          <a:bodyPr rtlCol="0" anchor="ctr" lIns="182880" tIns="137160"/>
-          <a:lstStyle/>
-          <a:p>
-            <a:pPr algn="ctr">
-              <a:defRPr sz="2400" b="1">
-                <a:solidFill>
-                  <a:srgbClr val="22C55E"/>
-                </a:solidFill>
-              </a:defRPr>
-            </a:pPr>
-            <a:r>
-              <a:t>Use FOR when:</a:t>
-            </a:r>
-          </a:p>
-          <a:p>
-            <a:pPr>
-              <a:spcBef>
-                <a:spcPts val="1000"/>
-              </a:spcBef>
-              <a:defRPr sz="1800">
-                <a:solidFill>
-                  <a:srgbClr val="1F2937"/>
-                </a:solidFill>
-              </a:defRPr>
-            </a:pPr>
-            <a:r>
-              <a:t>• You know how many times to loop</a:t>
-            </a:r>
-          </a:p>
-          <a:p>
-            <a:pPr>
-              <a:defRPr sz="1800">
-                <a:solidFill>
-                  <a:srgbClr val="1F2937"/>
-                </a:solidFill>
-              </a:defRPr>
-            </a:pPr>
-            <a:r>
-              <a:t>• Iterating through sequences</a:t>
-            </a:r>
-          </a:p>
-          <a:p>
-            <a:pPr>
-              <a:defRPr sz="1800">
-                <a:solidFill>
-                  <a:srgbClr val="1F2937"/>
-                </a:solidFill>
-              </a:defRPr>
-            </a:pPr>
-            <a:r>
-              <a:t>• Counting in a specific range</a:t>
-            </a:r>
+          <a:bodyPr rtlCol="0" anchor="ctr"/>
+          <a:lstStyle/>
+          <a:p>
+            <a:pPr algn="ctr"/>
           </a:p>
         </p:txBody>
       </p:sp>
@@ -5407,8 +4220,8 @@
         </p:nvSpPr>
         <p:spPr>
           <a:xfrm>
-            <a:off x="457200" y="3931920"/>
-            <a:ext cx="8229600" cy="365760"/>
+            <a:off x="640080" y="1371600"/>
+            <a:ext cx="10789920" cy="4572000"/>
           </a:xfrm>
           <a:prstGeom prst="rect">
             <a:avLst/>
@@ -5416,182 +4229,143 @@
           <a:noFill/>
         </p:spPr>
         <p:txBody>
-          <a:bodyPr wrap="none">
+          <a:bodyPr wrap="square">
             <a:spAutoFit/>
           </a:bodyPr>
           <a:lstStyle/>
           <a:p>
             <a:pPr>
-              <a:defRPr sz="2200" b="1">
-                <a:solidFill>
-                  <a:srgbClr val="1F2937"/>
-                </a:solidFill>
-              </a:defRPr>
-            </a:pPr>
-            <a:r>
-              <a:t>Quick Examples:</a:t>
-            </a:r>
-          </a:p>
-        </p:txBody>
-      </p:sp>
-      <p:sp>
-        <p:nvSpPr>
-          <p:cNvPr id="7" name="Rectangle 6"/>
-          <p:cNvSpPr/>
-          <p:nvPr/>
-        </p:nvSpPr>
-        <p:spPr>
-          <a:xfrm>
-            <a:off x="457200" y="4297680"/>
-            <a:ext cx="3931920" cy="1645920"/>
-          </a:xfrm>
-          <a:prstGeom prst="rect">
-            <a:avLst/>
-          </a:prstGeom>
-          <a:solidFill>
-            <a:srgbClr val="DBEAFE"/>
-          </a:solidFill>
-          <a:ln w="25400">
-            <a:solidFill>
-              <a:srgbClr val="2563EB"/>
-            </a:solidFill>
-          </a:ln>
-        </p:spPr>
-        <p:style>
-          <a:lnRef idx="1">
-            <a:schemeClr val="accent1"/>
-          </a:lnRef>
-          <a:fillRef idx="3">
-            <a:schemeClr val="accent1"/>
-          </a:fillRef>
-          <a:effectRef idx="2">
-            <a:schemeClr val="accent1"/>
-          </a:effectRef>
-          <a:fontRef idx="minor">
-            <a:schemeClr val="lt1"/>
-          </a:fontRef>
-        </p:style>
-        <p:txBody>
-          <a:bodyPr rtlCol="0" anchor="ctr" wrap="square" lIns="182880" tIns="137160"/>
-          <a:lstStyle/>
-          <a:p>
-            <a:pPr algn="ctr">
+              <a:spcAft>
+                <a:spcPts val="800"/>
+              </a:spcAft>
+              <a:defRPr sz="2000" b="1">
+                <a:solidFill>
+                  <a:srgbClr val="333333"/>
+                </a:solidFill>
+              </a:defRPr>
+            </a:pPr>
+            <a:r>
+              <a:t>Use FOR loops when:</a:t>
+            </a:r>
+          </a:p>
+          <a:p>
+            <a:pPr>
+              <a:spcAft>
+                <a:spcPts val="800"/>
+              </a:spcAft>
+              <a:defRPr sz="2000" b="1">
+                <a:solidFill>
+                  <a:srgbClr val="333333"/>
+                </a:solidFill>
+              </a:defRPr>
+            </a:pPr>
+            <a:r>
+              <a:t>Use WHILE loops when:</a:t>
+            </a:r>
+          </a:p>
+          <a:p>
+            <a:pPr>
+              <a:spcAft>
+                <a:spcPts val="800"/>
+              </a:spcAft>
+              <a:defRPr sz="2000" b="1">
+                <a:solidFill>
+                  <a:srgbClr val="333333"/>
+                </a:solidFill>
+              </a:defRPr>
+            </a:pPr>
+            <a:r>
+              <a:t>Pro Tip:If you can use a for loop, it's usually better (clearer and safer)!</a:t>
+            </a:r>
+          </a:p>
+          <a:p>
+            <a:pPr lvl="1">
+              <a:spcAft>
+                <a:spcPts val="800"/>
+              </a:spcAft>
               <a:defRPr sz="1800">
                 <a:solidFill>
-                  <a:srgbClr val="1F2937"/>
-                </a:solidFill>
-                <a:latin typeface="Courier New"/>
-              </a:defRPr>
-            </a:pPr>
-            <a:r>
-              <a:t># While: unknown iterations</a:t>
-            </a:r>
-          </a:p>
-          <a:p>
-            <a:pPr>
+                  <a:srgbClr val="333333"/>
+                </a:solidFill>
+              </a:defRPr>
+            </a:pPr>
+            <a:r>
+              <a:t>• ✅ You know how many times to repeat</a:t>
+            </a:r>
+          </a:p>
+          <a:p>
+            <a:pPr lvl="1">
+              <a:spcAft>
+                <a:spcPts val="800"/>
+              </a:spcAft>
               <a:defRPr sz="1800">
                 <a:solidFill>
-                  <a:srgbClr val="1F2937"/>
-                </a:solidFill>
-                <a:latin typeface="Courier New"/>
-              </a:defRPr>
-            </a:pPr>
-            <a:r>
-              <a:t>while user_input != "quit":</a:t>
-            </a:r>
-          </a:p>
-          <a:p>
-            <a:pPr>
+                  <a:srgbClr val="333333"/>
+                </a:solidFill>
+              </a:defRPr>
+            </a:pPr>
+            <a:r>
+              <a:t>• ✅ You're iterating through a sequence (string, list, range)</a:t>
+            </a:r>
+          </a:p>
+          <a:p>
+            <a:pPr lvl="1">
+              <a:spcAft>
+                <a:spcPts val="800"/>
+              </a:spcAft>
               <a:defRPr sz="1800">
                 <a:solidFill>
-                  <a:srgbClr val="1F2937"/>
-                </a:solidFill>
-                <a:latin typeface="Courier New"/>
-              </a:defRPr>
-            </a:pPr>
-            <a:r>
-              <a:t>    user_input = input("&gt; ")</a:t>
-            </a:r>
-          </a:p>
-        </p:txBody>
-      </p:sp>
-      <p:sp>
-        <p:nvSpPr>
-          <p:cNvPr id="8" name="Rectangle 7"/>
-          <p:cNvSpPr/>
-          <p:nvPr/>
-        </p:nvSpPr>
-        <p:spPr>
-          <a:xfrm>
-            <a:off x="4754880" y="4297680"/>
-            <a:ext cx="3931920" cy="1645920"/>
-          </a:xfrm>
-          <a:prstGeom prst="rect">
-            <a:avLst/>
-          </a:prstGeom>
-          <a:solidFill>
-            <a:srgbClr val="DBEAFE"/>
-          </a:solidFill>
-          <a:ln w="25400">
-            <a:solidFill>
-              <a:srgbClr val="2563EB"/>
-            </a:solidFill>
-          </a:ln>
-        </p:spPr>
-        <p:style>
-          <a:lnRef idx="1">
-            <a:schemeClr val="accent1"/>
-          </a:lnRef>
-          <a:fillRef idx="3">
-            <a:schemeClr val="accent1"/>
-          </a:fillRef>
-          <a:effectRef idx="2">
-            <a:schemeClr val="accent1"/>
-          </a:effectRef>
-          <a:fontRef idx="minor">
-            <a:schemeClr val="lt1"/>
-          </a:fontRef>
-        </p:style>
-        <p:txBody>
-          <a:bodyPr rtlCol="0" anchor="ctr" wrap="square" lIns="182880" tIns="137160"/>
-          <a:lstStyle/>
-          <a:p>
-            <a:pPr algn="ctr">
+                  <a:srgbClr val="333333"/>
+                </a:solidFill>
+              </a:defRPr>
+            </a:pPr>
+            <a:r>
+              <a:t>• ✅ You need a counter variable</a:t>
+            </a:r>
+          </a:p>
+          <a:p>
+            <a:pPr lvl="1">
+              <a:spcAft>
+                <a:spcPts val="800"/>
+              </a:spcAft>
               <a:defRPr sz="1800">
                 <a:solidFill>
-                  <a:srgbClr val="1F2937"/>
-                </a:solidFill>
-                <a:latin typeface="Courier New"/>
-              </a:defRPr>
-            </a:pPr>
-            <a:r>
-              <a:t># For: known iterations</a:t>
-            </a:r>
-          </a:p>
-          <a:p>
-            <a:pPr>
+                  <a:srgbClr val="333333"/>
+                </a:solidFill>
+              </a:defRPr>
+            </a:pPr>
+            <a:r>
+              <a:t>• ✅ You don't know how many times to repeat</a:t>
+            </a:r>
+          </a:p>
+          <a:p>
+            <a:pPr lvl="1">
+              <a:spcAft>
+                <a:spcPts val="800"/>
+              </a:spcAft>
               <a:defRPr sz="1800">
                 <a:solidFill>
-                  <a:srgbClr val="1F2937"/>
-                </a:solidFill>
-                <a:latin typeface="Courier New"/>
-              </a:defRPr>
-            </a:pPr>
-            <a:r>
-              <a:t>for i in range(10):</a:t>
-            </a:r>
-          </a:p>
-          <a:p>
-            <a:pPr>
+                  <a:srgbClr val="333333"/>
+                </a:solidFill>
+              </a:defRPr>
+            </a:pPr>
+            <a:r>
+              <a:t>• ✅ You're waiting for a condition to change</a:t>
+            </a:r>
+          </a:p>
+          <a:p>
+            <a:pPr lvl="1">
+              <a:spcAft>
+                <a:spcPts val="800"/>
+              </a:spcAft>
               <a:defRPr sz="1800">
                 <a:solidFill>
-                  <a:srgbClr val="1F2937"/>
-                </a:solidFill>
-                <a:latin typeface="Courier New"/>
-              </a:defRPr>
-            </a:pPr>
-            <a:r>
-              <a:t>    print(i)</a:t>
+                  <a:srgbClr val="333333"/>
+                </a:solidFill>
+              </a:defRPr>
+            </a:pPr>
+            <a:r>
+              <a:t>• ✅ You're validating user input</a:t>
             </a:r>
           </a:p>
         </p:txBody>
@@ -5607,14 +4381,6 @@
 <file path=ppt/slides/slide14.xml><?xml version="1.0" encoding="utf-8"?>
 <p:sld xmlns:a="http://schemas.openxmlformats.org/drawingml/2006/main" xmlns:p="http://schemas.openxmlformats.org/presentationml/2006/main" xmlns:r="http://schemas.openxmlformats.org/officeDocument/2006/relationships">
   <p:cSld>
-    <p:bg>
-      <p:bgPr>
-        <a:solidFill>
-          <a:srgbClr val="FFFFFF"/>
-        </a:solidFill>
-        <a:effectLst/>
-      </p:bgPr>
-    </p:bg>
     <p:spTree>
       <p:nvGrpSpPr>
         <p:cNvPr id="1" name=""/>
@@ -5624,55 +4390,20 @@
       <p:grpSpPr/>
       <p:sp>
         <p:nvSpPr>
-          <p:cNvPr id="2" name="TextBox 1"/>
-          <p:cNvSpPr txBox="1"/>
-          <p:nvPr/>
-        </p:nvSpPr>
-        <p:spPr>
-          <a:xfrm>
-            <a:off x="457200" y="457200"/>
-            <a:ext cx="8229600" cy="731520"/>
-          </a:xfrm>
-          <a:prstGeom prst="rect">
-            <a:avLst/>
-          </a:prstGeom>
-          <a:noFill/>
-        </p:spPr>
-        <p:txBody>
-          <a:bodyPr wrap="none">
-            <a:spAutoFit/>
-          </a:bodyPr>
-          <a:lstStyle/>
-          <a:p>
-            <a:pPr>
-              <a:defRPr sz="4000" b="1">
-                <a:solidFill>
-                  <a:srgbClr val="1F2937"/>
-                </a:solidFill>
-              </a:defRPr>
-            </a:pPr>
-            <a:r>
-              <a:t>Common Mistakes to Avoid</a:t>
-            </a:r>
-          </a:p>
-        </p:txBody>
-      </p:sp>
-      <p:sp>
-        <p:nvSpPr>
-          <p:cNvPr id="3" name="Rectangle 2"/>
+          <p:cNvPr id="2" name="Rectangle 1"/>
           <p:cNvSpPr/>
           <p:nvPr/>
         </p:nvSpPr>
         <p:spPr>
           <a:xfrm>
-            <a:off x="457200" y="1280160"/>
-            <a:ext cx="1371600" cy="73152"/>
+            <a:off x="0" y="0"/>
+            <a:ext cx="12191695" cy="6858000"/>
           </a:xfrm>
           <a:prstGeom prst="rect">
             <a:avLst/>
           </a:prstGeom>
           <a:solidFill>
-            <a:srgbClr val="2563EB"/>
+            <a:srgbClr val="FFFFFF"/>
           </a:solidFill>
           <a:ln>
             <a:noFill/>
@@ -5702,25 +4433,23 @@
       </p:sp>
       <p:sp>
         <p:nvSpPr>
-          <p:cNvPr id="4" name="Rectangle 3"/>
+          <p:cNvPr id="3" name="Rectangle 2"/>
           <p:cNvSpPr/>
           <p:nvPr/>
         </p:nvSpPr>
         <p:spPr>
           <a:xfrm>
-            <a:off x="457200" y="1828800"/>
-            <a:ext cx="4114800" cy="1828800"/>
+            <a:off x="0" y="0"/>
+            <a:ext cx="12191695" cy="137160"/>
           </a:xfrm>
           <a:prstGeom prst="rect">
             <a:avLst/>
           </a:prstGeom>
           <a:solidFill>
-            <a:srgbClr val="FEE2E2"/>
+            <a:srgbClr val="0066CC"/>
           </a:solidFill>
-          <a:ln w="25400">
-            <a:solidFill>
-              <a:srgbClr val="EF4444"/>
-            </a:solidFill>
+          <a:ln>
+            <a:noFill/>
           </a:ln>
         </p:spPr>
         <p:style>
@@ -5738,59 +4467,44 @@
           </a:fontRef>
         </p:style>
         <p:txBody>
-          <a:bodyPr rtlCol="0" anchor="ctr" lIns="182880" tIns="137160"/>
-          <a:lstStyle/>
-          <a:p>
-            <a:pPr algn="ctr">
-              <a:defRPr sz="2200" b="1">
-                <a:solidFill>
-                  <a:srgbClr val="EF4444"/>
-                </a:solidFill>
-              </a:defRPr>
-            </a:pPr>
-            <a:r>
-              <a:t>Infinite Loops ⚠️</a:t>
-            </a:r>
-          </a:p>
+          <a:bodyPr rtlCol="0" anchor="ctr"/>
+          <a:lstStyle/>
+          <a:p>
+            <a:pPr algn="ctr"/>
+          </a:p>
+        </p:txBody>
+      </p:sp>
+      <p:sp>
+        <p:nvSpPr>
+          <p:cNvPr id="4" name="TextBox 3"/>
+          <p:cNvSpPr txBox="1"/>
+          <p:nvPr/>
+        </p:nvSpPr>
+        <p:spPr>
+          <a:xfrm>
+            <a:off x="457200" y="365760"/>
+            <a:ext cx="10972800" cy="731520"/>
+          </a:xfrm>
+          <a:prstGeom prst="rect">
+            <a:avLst/>
+          </a:prstGeom>
+          <a:noFill/>
+        </p:spPr>
+        <p:txBody>
+          <a:bodyPr wrap="none">
+            <a:spAutoFit/>
+          </a:bodyPr>
+          <a:lstStyle/>
           <a:p>
             <a:pPr>
-              <a:spcBef>
-                <a:spcPts val="1000"/>
-              </a:spcBef>
-              <a:defRPr sz="1600">
-                <a:solidFill>
-                  <a:srgbClr val="4B5563"/>
-                </a:solidFill>
-                <a:latin typeface="Courier New"/>
-              </a:defRPr>
-            </a:pPr>
-            <a:r>
-              <a:t># Condition never changes!</a:t>
-            </a:r>
-          </a:p>
-          <a:p>
-            <a:pPr>
-              <a:defRPr sz="1400">
-                <a:solidFill>
-                  <a:srgbClr val="1F2937"/>
-                </a:solidFill>
-                <a:latin typeface="Courier New"/>
-              </a:defRPr>
-            </a:pPr>
-            <a:r>
-              <a:t>count = 0</a:t>
-            </a:r>
-            <a:br/>
-            <a:r>
-              <a:t>while count &lt; 10:</a:t>
-            </a:r>
-            <a:br/>
-            <a:r>
-              <a:t>    print(count)</a:t>
-            </a:r>
-            <a:br/>
-            <a:r>
-              <a:t># Missing: count += 1</a:t>
+              <a:defRPr sz="4000" b="1">
+                <a:solidFill>
+                  <a:srgbClr val="003366"/>
+                </a:solidFill>
+              </a:defRPr>
+            </a:pPr>
+            <a:r>
+              <a:t>Common Mistakes to Avoid ⚠️</a:t>
             </a:r>
           </a:p>
         </p:txBody>
@@ -5803,19 +4517,17 @@
         </p:nvSpPr>
         <p:spPr>
           <a:xfrm>
-            <a:off x="4846320" y="1828800"/>
-            <a:ext cx="3840480" cy="1828800"/>
+            <a:off x="457200" y="1005840"/>
+            <a:ext cx="1828800" cy="45720"/>
           </a:xfrm>
           <a:prstGeom prst="rect">
             <a:avLst/>
           </a:prstGeom>
           <a:solidFill>
-            <a:srgbClr val="FEE2E2"/>
+            <a:srgbClr val="0066CC"/>
           </a:solidFill>
-          <a:ln w="25400">
-            <a:solidFill>
-              <a:srgbClr val="EF4444"/>
-            </a:solidFill>
+          <a:ln>
+            <a:noFill/>
           </a:ln>
         </p:spPr>
         <p:style>
@@ -5833,248 +4545,77 @@
           </a:fontRef>
         </p:style>
         <p:txBody>
-          <a:bodyPr rtlCol="0" anchor="ctr" lIns="182880" tIns="137160"/>
-          <a:lstStyle/>
-          <a:p>
-            <a:pPr algn="ctr">
-              <a:defRPr sz="2200" b="1">
-                <a:solidFill>
-                  <a:srgbClr val="EF4444"/>
-                </a:solidFill>
-              </a:defRPr>
-            </a:pPr>
-            <a:r>
-              <a:t>Off-by-One Errors ⚠️</a:t>
-            </a:r>
-          </a:p>
+          <a:bodyPr rtlCol="0" anchor="ctr"/>
+          <a:lstStyle/>
+          <a:p>
+            <a:pPr algn="ctr"/>
+          </a:p>
+        </p:txBody>
+      </p:sp>
+      <p:sp>
+        <p:nvSpPr>
+          <p:cNvPr id="6" name="TextBox 5"/>
+          <p:cNvSpPr txBox="1"/>
+          <p:nvPr/>
+        </p:nvSpPr>
+        <p:spPr>
+          <a:xfrm>
+            <a:off x="640080" y="1371600"/>
+            <a:ext cx="10789920" cy="4572000"/>
+          </a:xfrm>
+          <a:prstGeom prst="rect">
+            <a:avLst/>
+          </a:prstGeom>
+          <a:noFill/>
+        </p:spPr>
+        <p:txBody>
+          <a:bodyPr wrap="square">
+            <a:spAutoFit/>
+          </a:bodyPr>
+          <a:lstStyle/>
           <a:p>
             <a:pPr>
-              <a:spcBef>
-                <a:spcPts val="1000"/>
-              </a:spcBef>
-              <a:defRPr sz="1600">
-                <a:solidFill>
-                  <a:srgbClr val="4B5563"/>
-                </a:solidFill>
-                <a:latin typeface="Courier New"/>
-              </a:defRPr>
-            </a:pPr>
-            <a:r>
-              <a:t># Want 1-10, but get 1-9</a:t>
+              <a:spcAft>
+                <a:spcPts val="800"/>
+              </a:spcAft>
+              <a:defRPr sz="2000" b="1">
+                <a:solidFill>
+                  <a:srgbClr val="333333"/>
+                </a:solidFill>
+              </a:defRPr>
+            </a:pPr>
+            <a:r>
+              <a:t>Infinite Loop (Never Stops!)</a:t>
             </a:r>
           </a:p>
           <a:p>
             <a:pPr>
-              <a:defRPr sz="1400">
-                <a:solidFill>
-                  <a:srgbClr val="1F2937"/>
-                </a:solidFill>
-                <a:latin typeface="Courier New"/>
-              </a:defRPr>
-            </a:pPr>
-            <a:r>
-              <a:t>for i in range(1, 10):</a:t>
-            </a:r>
-            <a:br/>
-            <a:r>
-              <a:t>    print(i)</a:t>
-            </a:r>
-            <a:br/>
-            <a:br/>
-            <a:r>
-              <a:t># Fix: range(1, 11)</a:t>
-            </a:r>
-          </a:p>
-        </p:txBody>
-      </p:sp>
-      <p:sp>
-        <p:nvSpPr>
-          <p:cNvPr id="6" name="Rectangle 5"/>
-          <p:cNvSpPr/>
-          <p:nvPr/>
-        </p:nvSpPr>
-        <p:spPr>
-          <a:xfrm>
-            <a:off x="457200" y="3931920"/>
-            <a:ext cx="4114800" cy="2011680"/>
-          </a:xfrm>
-          <a:prstGeom prst="rect">
-            <a:avLst/>
-          </a:prstGeom>
-          <a:solidFill>
-            <a:srgbClr val="FEE2E2"/>
-          </a:solidFill>
-          <a:ln w="25400">
-            <a:solidFill>
-              <a:srgbClr val="EF4444"/>
-            </a:solidFill>
-          </a:ln>
-        </p:spPr>
-        <p:style>
-          <a:lnRef idx="1">
-            <a:schemeClr val="accent1"/>
-          </a:lnRef>
-          <a:fillRef idx="3">
-            <a:schemeClr val="accent1"/>
-          </a:fillRef>
-          <a:effectRef idx="2">
-            <a:schemeClr val="accent1"/>
-          </a:effectRef>
-          <a:fontRef idx="minor">
-            <a:schemeClr val="lt1"/>
-          </a:fontRef>
-        </p:style>
-        <p:txBody>
-          <a:bodyPr rtlCol="0" anchor="ctr" lIns="182880" tIns="137160"/>
-          <a:lstStyle/>
-          <a:p>
-            <a:pPr algn="ctr">
-              <a:defRPr sz="2200" b="1">
-                <a:solidFill>
-                  <a:srgbClr val="EF4444"/>
-                </a:solidFill>
-              </a:defRPr>
-            </a:pPr>
-            <a:r>
-              <a:t>Wrong Indentation ⚠️</a:t>
+              <a:spcAft>
+                <a:spcPts val="800"/>
+              </a:spcAft>
+              <a:defRPr sz="2000" b="1">
+                <a:solidFill>
+                  <a:srgbClr val="333333"/>
+                </a:solidFill>
+              </a:defRPr>
+            </a:pPr>
+            <a:r>
+              <a:t>Off-by-One Error</a:t>
             </a:r>
           </a:p>
           <a:p>
             <a:pPr>
-              <a:spcBef>
-                <a:spcPts val="1000"/>
-              </a:spcBef>
-              <a:defRPr sz="1600">
-                <a:solidFill>
-                  <a:srgbClr val="4B5563"/>
-                </a:solidFill>
-                <a:latin typeface="Courier New"/>
-              </a:defRPr>
-            </a:pPr>
-            <a:r>
-              <a:t># Prints once instead of 5x</a:t>
-            </a:r>
-          </a:p>
-          <a:p>
-            <a:pPr>
-              <a:defRPr sz="1400">
-                <a:solidFill>
-                  <a:srgbClr val="1F2937"/>
-                </a:solidFill>
-                <a:latin typeface="Courier New"/>
-              </a:defRPr>
-            </a:pPr>
-            <a:r>
-              <a:t>for i in range(5):</a:t>
-            </a:r>
-            <a:br/>
-            <a:r>
-              <a:t>    total = i</a:t>
-            </a:r>
-            <a:br/>
-            <a:r>
-              <a:t>print(total)  # Wrong!</a:t>
-            </a:r>
-            <a:br/>
-            <a:br/>
-            <a:r>
-              <a:t># Fix: indent print()</a:t>
-            </a:r>
-          </a:p>
-        </p:txBody>
-      </p:sp>
-      <p:sp>
-        <p:nvSpPr>
-          <p:cNvPr id="7" name="Rectangle 6"/>
-          <p:cNvSpPr/>
-          <p:nvPr/>
-        </p:nvSpPr>
-        <p:spPr>
-          <a:xfrm>
-            <a:off x="4846320" y="3931920"/>
-            <a:ext cx="3840480" cy="2011680"/>
-          </a:xfrm>
-          <a:prstGeom prst="rect">
-            <a:avLst/>
-          </a:prstGeom>
-          <a:solidFill>
-            <a:srgbClr val="FEE2E2"/>
-          </a:solidFill>
-          <a:ln w="25400">
-            <a:solidFill>
-              <a:srgbClr val="EF4444"/>
-            </a:solidFill>
-          </a:ln>
-        </p:spPr>
-        <p:style>
-          <a:lnRef idx="1">
-            <a:schemeClr val="accent1"/>
-          </a:lnRef>
-          <a:fillRef idx="3">
-            <a:schemeClr val="accent1"/>
-          </a:fillRef>
-          <a:effectRef idx="2">
-            <a:schemeClr val="accent1"/>
-          </a:effectRef>
-          <a:fontRef idx="minor">
-            <a:schemeClr val="lt1"/>
-          </a:fontRef>
-        </p:style>
-        <p:txBody>
-          <a:bodyPr rtlCol="0" anchor="ctr" lIns="182880" tIns="137160"/>
-          <a:lstStyle/>
-          <a:p>
-            <a:pPr algn="ctr">
-              <a:defRPr sz="2200" b="1">
-                <a:solidFill>
-                  <a:srgbClr val="EF4444"/>
-                </a:solidFill>
-              </a:defRPr>
-            </a:pPr>
-            <a:r>
-              <a:t>Modifying Loop Variable ⚠️</a:t>
-            </a:r>
-          </a:p>
-          <a:p>
-            <a:pPr>
-              <a:spcBef>
-                <a:spcPts val="1000"/>
-              </a:spcBef>
-              <a:defRPr sz="1600">
-                <a:solidFill>
-                  <a:srgbClr val="4B5563"/>
-                </a:solidFill>
-                <a:latin typeface="Courier New"/>
-              </a:defRPr>
-            </a:pPr>
-            <a:r>
-              <a:t># Don't change i in for loop</a:t>
-            </a:r>
-          </a:p>
-          <a:p>
-            <a:pPr>
-              <a:defRPr sz="1400">
-                <a:solidFill>
-                  <a:srgbClr val="1F2937"/>
-                </a:solidFill>
-                <a:latin typeface="Courier New"/>
-              </a:defRPr>
-            </a:pPr>
-            <a:r>
-              <a:t>for i in range(5):</a:t>
-            </a:r>
-            <a:br/>
-            <a:r>
-              <a:t>    print(i)</a:t>
-            </a:r>
-            <a:br/>
-            <a:r>
-              <a:t>    i = 10  # Bad idea!</a:t>
-            </a:r>
-            <a:br/>
-            <a:br/>
-            <a:r>
-              <a:t># Use while if needed</a:t>
+              <a:spcAft>
+                <a:spcPts val="800"/>
+              </a:spcAft>
+              <a:defRPr sz="2000" b="1">
+                <a:solidFill>
+                  <a:srgbClr val="333333"/>
+                </a:solidFill>
+              </a:defRPr>
+            </a:pPr>
+            <a:r>
+              <a:t>Forgetting Indentation</a:t>
             </a:r>
           </a:p>
         </p:txBody>
@@ -6090,14 +4631,6 @@
 <file path=ppt/slides/slide15.xml><?xml version="1.0" encoding="utf-8"?>
 <p:sld xmlns:a="http://schemas.openxmlformats.org/drawingml/2006/main" xmlns:p="http://schemas.openxmlformats.org/presentationml/2006/main" xmlns:r="http://schemas.openxmlformats.org/officeDocument/2006/relationships">
   <p:cSld>
-    <p:bg>
-      <p:bgPr>
-        <a:solidFill>
-          <a:srgbClr val="FFFFFF"/>
-        </a:solidFill>
-        <a:effectLst/>
-      </p:bgPr>
-    </p:bg>
     <p:spTree>
       <p:nvGrpSpPr>
         <p:cNvPr id="1" name=""/>
@@ -6107,55 +4640,20 @@
       <p:grpSpPr/>
       <p:sp>
         <p:nvSpPr>
-          <p:cNvPr id="2" name="TextBox 1"/>
-          <p:cNvSpPr txBox="1"/>
-          <p:nvPr/>
-        </p:nvSpPr>
-        <p:spPr>
-          <a:xfrm>
-            <a:off x="457200" y="457200"/>
-            <a:ext cx="8229600" cy="731520"/>
-          </a:xfrm>
-          <a:prstGeom prst="rect">
-            <a:avLst/>
-          </a:prstGeom>
-          <a:noFill/>
-        </p:spPr>
-        <p:txBody>
-          <a:bodyPr wrap="none">
-            <a:spAutoFit/>
-          </a:bodyPr>
-          <a:lstStyle/>
-          <a:p>
-            <a:pPr>
-              <a:defRPr sz="4000" b="1">
-                <a:solidFill>
-                  <a:srgbClr val="1F2937"/>
-                </a:solidFill>
-              </a:defRPr>
-            </a:pPr>
-            <a:r>
-              <a:t>Ready to Master Loops?</a:t>
-            </a:r>
-          </a:p>
-        </p:txBody>
-      </p:sp>
-      <p:sp>
-        <p:nvSpPr>
-          <p:cNvPr id="3" name="Rectangle 2"/>
+          <p:cNvPr id="2" name="Rectangle 1"/>
           <p:cNvSpPr/>
           <p:nvPr/>
         </p:nvSpPr>
         <p:spPr>
           <a:xfrm>
-            <a:off x="457200" y="1280160"/>
-            <a:ext cx="1371600" cy="73152"/>
+            <a:off x="0" y="0"/>
+            <a:ext cx="12191695" cy="6858000"/>
           </a:xfrm>
           <a:prstGeom prst="rect">
             <a:avLst/>
           </a:prstGeom>
           <a:solidFill>
-            <a:srgbClr val="2563EB"/>
+            <a:srgbClr val="F0F8FF"/>
           </a:solidFill>
           <a:ln>
             <a:noFill/>
@@ -6185,14 +4683,49 @@
       </p:sp>
       <p:sp>
         <p:nvSpPr>
+          <p:cNvPr id="3" name="TextBox 2"/>
+          <p:cNvSpPr txBox="1"/>
+          <p:nvPr/>
+        </p:nvSpPr>
+        <p:spPr>
+          <a:xfrm>
+            <a:off x="914400" y="1828800"/>
+            <a:ext cx="10360152" cy="1371600"/>
+          </a:xfrm>
+          <a:prstGeom prst="rect">
+            <a:avLst/>
+          </a:prstGeom>
+          <a:noFill/>
+        </p:spPr>
+        <p:txBody>
+          <a:bodyPr wrap="none">
+            <a:spAutoFit/>
+          </a:bodyPr>
+          <a:lstStyle/>
+          <a:p>
+            <a:pPr algn="ctr">
+              <a:defRPr sz="5400" b="1">
+                <a:solidFill>
+                  <a:srgbClr val="003366"/>
+                </a:solidFill>
+              </a:defRPr>
+            </a:pPr>
+            <a:r>
+              <a:t>Time to Loop!</a:t>
+            </a:r>
+          </a:p>
+        </p:txBody>
+      </p:sp>
+      <p:sp>
+        <p:nvSpPr>
           <p:cNvPr id="4" name="TextBox 3"/>
           <p:cNvSpPr txBox="1"/>
           <p:nvPr/>
         </p:nvSpPr>
         <p:spPr>
           <a:xfrm>
-            <a:off x="4114800" y="1828800"/>
-            <a:ext cx="914400" cy="731520"/>
+            <a:off x="914400" y="3657600"/>
+            <a:ext cx="10360152" cy="548640"/>
           </a:xfrm>
           <a:prstGeom prst="rect">
             <a:avLst/>
@@ -6206,10 +4739,14 @@
           <a:lstStyle/>
           <a:p>
             <a:pPr algn="ctr">
-              <a:defRPr sz="6000"/>
-            </a:pPr>
-            <a:r>
-              <a:t>🎯</a:t>
+              <a:defRPr sz="2800">
+                <a:solidFill>
+                  <a:srgbClr val="4682B4"/>
+                </a:solidFill>
+              </a:defRPr>
+            </a:pPr>
+            <a:r>
+              <a:t>Open the practice notebook and master repetition</a:t>
             </a:r>
           </a:p>
         </p:txBody>
@@ -6222,8 +4759,8 @@
         </p:nvSpPr>
         <p:spPr>
           <a:xfrm>
-            <a:off x="914400" y="2743200"/>
-            <a:ext cx="7315200" cy="914400"/>
+            <a:off x="914400" y="4297680"/>
+            <a:ext cx="10360152" cy="548640"/>
           </a:xfrm>
           <a:prstGeom prst="rect">
             <a:avLst/>
@@ -6237,178 +4774,14 @@
           <a:lstStyle/>
           <a:p>
             <a:pPr algn="ctr">
-              <a:defRPr sz="4800" b="1">
-                <a:solidFill>
-                  <a:srgbClr val="1F2937"/>
-                </a:solidFill>
-              </a:defRPr>
-            </a:pPr>
-            <a:r>
-              <a:t>Practice Time!</a:t>
-            </a:r>
-          </a:p>
-        </p:txBody>
-      </p:sp>
-      <p:sp>
-        <p:nvSpPr>
-          <p:cNvPr id="6" name="Rectangle 5"/>
-          <p:cNvSpPr/>
-          <p:nvPr/>
-        </p:nvSpPr>
-        <p:spPr>
-          <a:xfrm>
-            <a:off x="1371600" y="3840480"/>
-            <a:ext cx="6400800" cy="1828800"/>
-          </a:xfrm>
-          <a:prstGeom prst="rect">
-            <a:avLst/>
-          </a:prstGeom>
-          <a:solidFill>
-            <a:srgbClr val="DBEAFE"/>
-          </a:solidFill>
-          <a:ln w="25400">
-            <a:solidFill>
-              <a:srgbClr val="2563EB"/>
-            </a:solidFill>
-          </a:ln>
-        </p:spPr>
-        <p:style>
-          <a:lnRef idx="1">
-            <a:schemeClr val="accent1"/>
-          </a:lnRef>
-          <a:fillRef idx="3">
-            <a:schemeClr val="accent1"/>
-          </a:fillRef>
-          <a:effectRef idx="2">
-            <a:schemeClr val="accent1"/>
-          </a:effectRef>
-          <a:fontRef idx="minor">
-            <a:schemeClr val="lt1"/>
-          </a:fontRef>
-        </p:style>
-        <p:txBody>
-          <a:bodyPr rtlCol="0" anchor="ctr" lIns="274320" tIns="182880"/>
-          <a:lstStyle/>
-          <a:p>
-            <a:pPr algn="ctr">
-              <a:defRPr sz="2800" b="1">
-                <a:solidFill>
-                  <a:srgbClr val="2563EB"/>
-                </a:solidFill>
-              </a:defRPr>
-            </a:pPr>
-            <a:r>
-              <a:t>Try These Challenges:</a:t>
-            </a:r>
-          </a:p>
-          <a:p>
-            <a:pPr>
-              <a:spcBef>
-                <a:spcPts val="600"/>
-              </a:spcBef>
-              <a:defRPr sz="2000">
-                <a:solidFill>
-                  <a:srgbClr val="1F2937"/>
-                </a:solidFill>
-              </a:defRPr>
-            </a:pPr>
-            <a:r>
-              <a:t>1. Print all even numbers from 1 to 50</a:t>
-            </a:r>
-          </a:p>
-          <a:p>
-            <a:pPr>
-              <a:spcBef>
-                <a:spcPts val="600"/>
-              </a:spcBef>
-              <a:defRPr sz="2000">
-                <a:solidFill>
-                  <a:srgbClr val="1F2937"/>
-                </a:solidFill>
-              </a:defRPr>
-            </a:pPr>
-            <a:r>
-              <a:t>2. Create a countdown from 10 to 1</a:t>
-            </a:r>
-          </a:p>
-          <a:p>
-            <a:pPr>
-              <a:spcBef>
-                <a:spcPts val="600"/>
-              </a:spcBef>
-              <a:defRPr sz="2000">
-                <a:solidFill>
-                  <a:srgbClr val="1F2937"/>
-                </a:solidFill>
-              </a:defRPr>
-            </a:pPr>
-            <a:r>
-              <a:t>3. Calculate the sum of numbers 1 to 100</a:t>
-            </a:r>
-          </a:p>
-          <a:p>
-            <a:pPr>
-              <a:spcBef>
-                <a:spcPts val="600"/>
-              </a:spcBef>
-              <a:defRPr sz="2000">
-                <a:solidFill>
-                  <a:srgbClr val="1F2937"/>
-                </a:solidFill>
-              </a:defRPr>
-            </a:pPr>
-            <a:r>
-              <a:t>4. Print a multiplication table (1-10)</a:t>
-            </a:r>
-          </a:p>
-          <a:p>
-            <a:pPr>
-              <a:spcBef>
-                <a:spcPts val="600"/>
-              </a:spcBef>
-              <a:defRPr sz="2000">
-                <a:solidFill>
-                  <a:srgbClr val="1F2937"/>
-                </a:solidFill>
-              </a:defRPr>
-            </a:pPr>
-            <a:r>
-              <a:t>5. Build a password validator with 3 attempts</a:t>
-            </a:r>
-          </a:p>
-        </p:txBody>
-      </p:sp>
-      <p:sp>
-        <p:nvSpPr>
-          <p:cNvPr id="7" name="TextBox 6"/>
-          <p:cNvSpPr txBox="1"/>
-          <p:nvPr/>
-        </p:nvSpPr>
-        <p:spPr>
-          <a:xfrm>
-            <a:off x="914400" y="5943600"/>
-            <a:ext cx="7315200" cy="548640"/>
-          </a:xfrm>
-          <a:prstGeom prst="rect">
-            <a:avLst/>
-          </a:prstGeom>
-          <a:noFill/>
-        </p:spPr>
-        <p:txBody>
-          <a:bodyPr wrap="none">
-            <a:spAutoFit/>
-          </a:bodyPr>
-          <a:lstStyle/>
-          <a:p>
-            <a:pPr algn="ctr">
-              <a:defRPr sz="2000" i="1">
-                <a:solidFill>
-                  <a:srgbClr val="4B5563"/>
-                </a:solidFill>
-              </a:defRPr>
-            </a:pPr>
-            <a:r>
-              <a:t>The more you practice loops, the more powerful your programs become!</a:t>
+              <a:defRPr sz="2800">
+                <a:solidFill>
+                  <a:srgbClr val="4682B4"/>
+                </a:solidFill>
+              </a:defRPr>
+            </a:pPr>
+            <a:r>
+              <a:t>Your programs are about to become much more powerful!</a:t>
             </a:r>
           </a:p>
         </p:txBody>
@@ -6424,14 +4797,6 @@
 <file path=ppt/slides/slide2.xml><?xml version="1.0" encoding="utf-8"?>
 <p:sld xmlns:a="http://schemas.openxmlformats.org/drawingml/2006/main" xmlns:p="http://schemas.openxmlformats.org/presentationml/2006/main" xmlns:r="http://schemas.openxmlformats.org/officeDocument/2006/relationships">
   <p:cSld>
-    <p:bg>
-      <p:bgPr>
-        <a:solidFill>
-          <a:srgbClr val="FFFFFF"/>
-        </a:solidFill>
-        <a:effectLst/>
-      </p:bgPr>
-    </p:bg>
     <p:spTree>
       <p:nvGrpSpPr>
         <p:cNvPr id="1" name=""/>
@@ -6441,55 +4806,20 @@
       <p:grpSpPr/>
       <p:sp>
         <p:nvSpPr>
-          <p:cNvPr id="2" name="TextBox 1"/>
-          <p:cNvSpPr txBox="1"/>
-          <p:nvPr/>
-        </p:nvSpPr>
-        <p:spPr>
-          <a:xfrm>
-            <a:off x="457200" y="457200"/>
-            <a:ext cx="8229600" cy="731520"/>
-          </a:xfrm>
-          <a:prstGeom prst="rect">
-            <a:avLst/>
-          </a:prstGeom>
-          <a:noFill/>
-        </p:spPr>
-        <p:txBody>
-          <a:bodyPr wrap="none">
-            <a:spAutoFit/>
-          </a:bodyPr>
-          <a:lstStyle/>
-          <a:p>
-            <a:pPr>
-              <a:defRPr sz="4000" b="1">
-                <a:solidFill>
-                  <a:srgbClr val="1F2937"/>
-                </a:solidFill>
-              </a:defRPr>
-            </a:pPr>
-            <a:r>
-              <a:t>Why Do We Need Loops?</a:t>
-            </a:r>
-          </a:p>
-        </p:txBody>
-      </p:sp>
-      <p:sp>
-        <p:nvSpPr>
-          <p:cNvPr id="3" name="Rectangle 2"/>
+          <p:cNvPr id="2" name="Rectangle 1"/>
           <p:cNvSpPr/>
           <p:nvPr/>
         </p:nvSpPr>
         <p:spPr>
           <a:xfrm>
-            <a:off x="457200" y="1280160"/>
-            <a:ext cx="1371600" cy="73152"/>
+            <a:off x="0" y="0"/>
+            <a:ext cx="12191695" cy="6858000"/>
           </a:xfrm>
           <a:prstGeom prst="rect">
             <a:avLst/>
           </a:prstGeom>
           <a:solidFill>
-            <a:srgbClr val="2563EB"/>
+            <a:srgbClr val="FFFFFF"/>
           </a:solidFill>
           <a:ln>
             <a:noFill/>
@@ -6519,60 +4849,23 @@
       </p:sp>
       <p:sp>
         <p:nvSpPr>
-          <p:cNvPr id="4" name="TextBox 3"/>
-          <p:cNvSpPr txBox="1"/>
-          <p:nvPr/>
-        </p:nvSpPr>
-        <p:spPr>
-          <a:xfrm>
-            <a:off x="457200" y="1828800"/>
-            <a:ext cx="8229600" cy="457200"/>
-          </a:xfrm>
-          <a:prstGeom prst="rect">
-            <a:avLst/>
-          </a:prstGeom>
-          <a:noFill/>
-        </p:spPr>
-        <p:txBody>
-          <a:bodyPr wrap="none">
-            <a:spAutoFit/>
-          </a:bodyPr>
-          <a:lstStyle/>
-          <a:p>
-            <a:pPr>
-              <a:defRPr sz="2400">
-                <a:solidFill>
-                  <a:srgbClr val="4B5563"/>
-                </a:solidFill>
-              </a:defRPr>
-            </a:pPr>
-            <a:r>
-              <a:t>Imagine you need to print 'Hello' 100 times...</a:t>
-            </a:r>
-          </a:p>
-        </p:txBody>
-      </p:sp>
-      <p:sp>
-        <p:nvSpPr>
-          <p:cNvPr id="5" name="Rectangle 4"/>
+          <p:cNvPr id="3" name="Rectangle 2"/>
           <p:cNvSpPr/>
           <p:nvPr/>
         </p:nvSpPr>
         <p:spPr>
           <a:xfrm>
-            <a:off x="457200" y="2560320"/>
-            <a:ext cx="3840480" cy="2286000"/>
+            <a:off x="0" y="0"/>
+            <a:ext cx="12191695" cy="137160"/>
           </a:xfrm>
           <a:prstGeom prst="rect">
             <a:avLst/>
           </a:prstGeom>
           <a:solidFill>
-            <a:srgbClr val="FEE2E2"/>
+            <a:srgbClr val="0066CC"/>
           </a:solidFill>
-          <a:ln w="25400">
-            <a:solidFill>
-              <a:srgbClr val="EF4444"/>
-            </a:solidFill>
+          <a:ln>
+            <a:noFill/>
           </a:ln>
         </p:spPr>
         <p:style>
@@ -6590,76 +4883,67 @@
           </a:fontRef>
         </p:style>
         <p:txBody>
-          <a:bodyPr rtlCol="0" anchor="ctr" lIns="182880" tIns="137160"/>
-          <a:lstStyle/>
-          <a:p>
-            <a:pPr algn="ctr">
-              <a:defRPr sz="2200" b="1">
-                <a:solidFill>
-                  <a:srgbClr val="EF4444"/>
-                </a:solidFill>
-              </a:defRPr>
-            </a:pPr>
-            <a:r>
-              <a:t>Without Loops (Bad!) ❌</a:t>
-            </a:r>
-          </a:p>
+          <a:bodyPr rtlCol="0" anchor="ctr"/>
+          <a:lstStyle/>
+          <a:p>
+            <a:pPr algn="ctr"/>
+          </a:p>
+        </p:txBody>
+      </p:sp>
+      <p:sp>
+        <p:nvSpPr>
+          <p:cNvPr id="4" name="TextBox 3"/>
+          <p:cNvSpPr txBox="1"/>
+          <p:nvPr/>
+        </p:nvSpPr>
+        <p:spPr>
+          <a:xfrm>
+            <a:off x="457200" y="365760"/>
+            <a:ext cx="10972800" cy="731520"/>
+          </a:xfrm>
+          <a:prstGeom prst="rect">
+            <a:avLst/>
+          </a:prstGeom>
+          <a:noFill/>
+        </p:spPr>
+        <p:txBody>
+          <a:bodyPr wrap="none">
+            <a:spAutoFit/>
+          </a:bodyPr>
+          <a:lstStyle/>
           <a:p>
             <a:pPr>
-              <a:defRPr sz="1600">
-                <a:solidFill>
-                  <a:srgbClr val="1F2937"/>
-                </a:solidFill>
-                <a:latin typeface="Courier New"/>
-              </a:defRPr>
-            </a:pPr>
-            <a:r>
-              <a:t>print("Hello")</a:t>
-            </a:r>
-            <a:br/>
-            <a:r>
-              <a:t>print("Hello")</a:t>
-            </a:r>
-            <a:br/>
-            <a:r>
-              <a:t>print("Hello")</a:t>
-            </a:r>
-          </a:p>
-          <a:p>
-            <a:pPr algn="ctr">
-              <a:defRPr sz="1600">
-                <a:solidFill>
-                  <a:srgbClr val="9CA3AF"/>
-                </a:solidFill>
-              </a:defRPr>
-            </a:pPr>
-            <a:r>
-              <a:t>... 97 more times ...</a:t>
-            </a:r>
-          </a:p>
-        </p:txBody>
-      </p:sp>
-      <p:sp>
-        <p:nvSpPr>
-          <p:cNvPr id="6" name="Rectangle 5"/>
+              <a:defRPr sz="4000" b="1">
+                <a:solidFill>
+                  <a:srgbClr val="003366"/>
+                </a:solidFill>
+              </a:defRPr>
+            </a:pPr>
+            <a:r>
+              <a:t>Why Do We Need Loops? 🔄</a:t>
+            </a:r>
+          </a:p>
+        </p:txBody>
+      </p:sp>
+      <p:sp>
+        <p:nvSpPr>
+          <p:cNvPr id="5" name="Rectangle 4"/>
           <p:cNvSpPr/>
           <p:nvPr/>
         </p:nvSpPr>
         <p:spPr>
           <a:xfrm>
-            <a:off x="4846320" y="2560320"/>
-            <a:ext cx="3840480" cy="2286000"/>
+            <a:off x="457200" y="1005840"/>
+            <a:ext cx="1828800" cy="45720"/>
           </a:xfrm>
           <a:prstGeom prst="rect">
             <a:avLst/>
           </a:prstGeom>
           <a:solidFill>
-            <a:srgbClr val="DCFCE7"/>
+            <a:srgbClr val="0066CC"/>
           </a:solidFill>
-          <a:ln w="25400">
-            <a:solidFill>
-              <a:srgbClr val="22C55E"/>
-            </a:solidFill>
+          <a:ln>
+            <a:noFill/>
           </a:ln>
         </p:spPr>
         <p:style>
@@ -6677,13 +4961,72 @@
           </a:fontRef>
         </p:style>
         <p:txBody>
-          <a:bodyPr rtlCol="0" anchor="ctr" lIns="182880" tIns="137160"/>
-          <a:lstStyle/>
-          <a:p>
-            <a:pPr algn="ctr">
-              <a:defRPr sz="2200" b="1">
-                <a:solidFill>
-                  <a:srgbClr val="22C55E"/>
+          <a:bodyPr rtlCol="0" anchor="ctr"/>
+          <a:lstStyle/>
+          <a:p>
+            <a:pPr algn="ctr"/>
+          </a:p>
+        </p:txBody>
+      </p:sp>
+      <p:sp>
+        <p:nvSpPr>
+          <p:cNvPr id="6" name="TextBox 5"/>
+          <p:cNvSpPr txBox="1"/>
+          <p:nvPr/>
+        </p:nvSpPr>
+        <p:spPr>
+          <a:xfrm>
+            <a:off x="640080" y="1371600"/>
+            <a:ext cx="10789920" cy="4572000"/>
+          </a:xfrm>
+          <a:prstGeom prst="rect">
+            <a:avLst/>
+          </a:prstGeom>
+          <a:noFill/>
+        </p:spPr>
+        <p:txBody>
+          <a:bodyPr wrap="square">
+            <a:spAutoFit/>
+          </a:bodyPr>
+          <a:lstStyle/>
+          <a:p>
+            <a:pPr>
+              <a:spcAft>
+                <a:spcPts val="800"/>
+              </a:spcAft>
+              <a:defRPr sz="2000" b="1">
+                <a:solidFill>
+                  <a:srgbClr val="333333"/>
+                </a:solidFill>
+              </a:defRPr>
+            </a:pPr>
+            <a:r>
+              <a:t>Imagine you need to print "Hello" 100 times...</a:t>
+            </a:r>
+          </a:p>
+          <a:p>
+            <a:pPr>
+              <a:spcAft>
+                <a:spcPts val="800"/>
+              </a:spcAft>
+              <a:defRPr sz="2000" b="1">
+                <a:solidFill>
+                  <a:srgbClr val="333333"/>
+                </a:solidFill>
+              </a:defRPr>
+            </a:pPr>
+            <a:r>
+              <a:t>Without Loops (Bad!) ❌</a:t>
+            </a:r>
+          </a:p>
+          <a:p>
+            <a:pPr>
+              <a:spcAft>
+                <a:spcPts val="800"/>
+              </a:spcAft>
+              <a:defRPr sz="2000" b="1">
+                <a:solidFill>
+                  <a:srgbClr val="333333"/>
                 </a:solidFill>
               </a:defRPr>
             </a:pPr>
@@ -6693,66 +5036,12 @@
           </a:p>
           <a:p>
             <a:pPr>
-              <a:defRPr sz="1800">
-                <a:solidFill>
-                  <a:srgbClr val="1F2937"/>
-                </a:solidFill>
-                <a:latin typeface="Courier New"/>
-              </a:defRPr>
-            </a:pPr>
-            <a:r>
-              <a:t>for i in range(100):</a:t>
-            </a:r>
-            <a:br/>
-            <a:r>
-              <a:t>    print("Hello")</a:t>
-            </a:r>
-          </a:p>
-        </p:txBody>
-      </p:sp>
-      <p:sp>
-        <p:nvSpPr>
-          <p:cNvPr id="7" name="Rectangle 6"/>
-          <p:cNvSpPr/>
-          <p:nvPr/>
-        </p:nvSpPr>
-        <p:spPr>
-          <a:xfrm>
-            <a:off x="1371600" y="5303520"/>
-            <a:ext cx="6400800" cy="731520"/>
-          </a:xfrm>
-          <a:prstGeom prst="rect">
-            <a:avLst/>
-          </a:prstGeom>
-          <a:solidFill>
-            <a:srgbClr val="2563EB"/>
-          </a:solidFill>
-          <a:ln>
-            <a:noFill/>
-          </a:ln>
-        </p:spPr>
-        <p:style>
-          <a:lnRef idx="1">
-            <a:schemeClr val="accent1"/>
-          </a:lnRef>
-          <a:fillRef idx="3">
-            <a:schemeClr val="accent1"/>
-          </a:fillRef>
-          <a:effectRef idx="2">
-            <a:schemeClr val="accent1"/>
-          </a:effectRef>
-          <a:fontRef idx="minor">
-            <a:schemeClr val="lt1"/>
-          </a:fontRef>
-        </p:style>
-        <p:txBody>
-          <a:bodyPr rtlCol="0" anchor="ctr"/>
-          <a:lstStyle/>
-          <a:p>
-            <a:pPr algn="ctr">
-              <a:defRPr sz="2800" b="1">
-                <a:solidFill>
-                  <a:srgbClr val="FFFFFF"/>
+              <a:spcAft>
+                <a:spcPts val="800"/>
+              </a:spcAft>
+              <a:defRPr sz="2000" b="1">
+                <a:solidFill>
+                  <a:srgbClr val="333333"/>
                 </a:solidFill>
               </a:defRPr>
             </a:pPr>
@@ -6773,14 +5062,6 @@
 <file path=ppt/slides/slide3.xml><?xml version="1.0" encoding="utf-8"?>
 <p:sld xmlns:a="http://schemas.openxmlformats.org/drawingml/2006/main" xmlns:p="http://schemas.openxmlformats.org/presentationml/2006/main" xmlns:r="http://schemas.openxmlformats.org/officeDocument/2006/relationships">
   <p:cSld>
-    <p:bg>
-      <p:bgPr>
-        <a:solidFill>
-          <a:srgbClr val="FFFFFF"/>
-        </a:solidFill>
-        <a:effectLst/>
-      </p:bgPr>
-    </p:bg>
     <p:spTree>
       <p:nvGrpSpPr>
         <p:cNvPr id="1" name=""/>
@@ -6790,55 +5071,20 @@
       <p:grpSpPr/>
       <p:sp>
         <p:nvSpPr>
-          <p:cNvPr id="2" name="TextBox 1"/>
-          <p:cNvSpPr txBox="1"/>
-          <p:nvPr/>
-        </p:nvSpPr>
-        <p:spPr>
-          <a:xfrm>
-            <a:off x="457200" y="457200"/>
-            <a:ext cx="8229600" cy="731520"/>
-          </a:xfrm>
-          <a:prstGeom prst="rect">
-            <a:avLst/>
-          </a:prstGeom>
-          <a:noFill/>
-        </p:spPr>
-        <p:txBody>
-          <a:bodyPr wrap="none">
-            <a:spAutoFit/>
-          </a:bodyPr>
-          <a:lstStyle/>
-          <a:p>
-            <a:pPr>
-              <a:defRPr sz="4000" b="1">
-                <a:solidFill>
-                  <a:srgbClr val="1F2937"/>
-                </a:solidFill>
-              </a:defRPr>
-            </a:pPr>
-            <a:r>
-              <a:t>While Loops: Repeat While True</a:t>
-            </a:r>
-          </a:p>
-        </p:txBody>
-      </p:sp>
-      <p:sp>
-        <p:nvSpPr>
-          <p:cNvPr id="3" name="Rectangle 2"/>
+          <p:cNvPr id="2" name="Rectangle 1"/>
           <p:cNvSpPr/>
           <p:nvPr/>
         </p:nvSpPr>
         <p:spPr>
           <a:xfrm>
-            <a:off x="457200" y="1280160"/>
-            <a:ext cx="1371600" cy="73152"/>
+            <a:off x="0" y="0"/>
+            <a:ext cx="12191695" cy="6858000"/>
           </a:xfrm>
           <a:prstGeom prst="rect">
             <a:avLst/>
           </a:prstGeom>
           <a:solidFill>
-            <a:srgbClr val="2563EB"/>
+            <a:srgbClr val="FFFFFF"/>
           </a:solidFill>
           <a:ln>
             <a:noFill/>
@@ -6868,95 +5114,23 @@
       </p:sp>
       <p:sp>
         <p:nvSpPr>
-          <p:cNvPr id="4" name="TextBox 3"/>
-          <p:cNvSpPr txBox="1"/>
-          <p:nvPr/>
-        </p:nvSpPr>
-        <p:spPr>
-          <a:xfrm>
-            <a:off x="457200" y="1828800"/>
-            <a:ext cx="8229600" cy="548640"/>
-          </a:xfrm>
-          <a:prstGeom prst="rect">
-            <a:avLst/>
-          </a:prstGeom>
-          <a:noFill/>
-        </p:spPr>
-        <p:txBody>
-          <a:bodyPr wrap="none">
-            <a:spAutoFit/>
-          </a:bodyPr>
-          <a:lstStyle/>
-          <a:p>
-            <a:pPr>
-              <a:defRPr sz="2400">
-                <a:solidFill>
-                  <a:srgbClr val="4B5563"/>
-                </a:solidFill>
-              </a:defRPr>
-            </a:pPr>
-            <a:r>
-              <a:t>A while loop repeats as long as a condition is True</a:t>
-            </a:r>
-          </a:p>
-        </p:txBody>
-      </p:sp>
-      <p:sp>
-        <p:nvSpPr>
-          <p:cNvPr id="5" name="TextBox 4"/>
-          <p:cNvSpPr txBox="1"/>
-          <p:nvPr/>
-        </p:nvSpPr>
-        <p:spPr>
-          <a:xfrm>
-            <a:off x="457200" y="2560320"/>
-            <a:ext cx="3657600" cy="365760"/>
-          </a:xfrm>
-          <a:prstGeom prst="rect">
-            <a:avLst/>
-          </a:prstGeom>
-          <a:noFill/>
-        </p:spPr>
-        <p:txBody>
-          <a:bodyPr wrap="none">
-            <a:spAutoFit/>
-          </a:bodyPr>
-          <a:lstStyle/>
-          <a:p>
-            <a:pPr>
-              <a:defRPr sz="2200" b="1">
-                <a:solidFill>
-                  <a:srgbClr val="1F2937"/>
-                </a:solidFill>
-              </a:defRPr>
-            </a:pPr>
-            <a:r>
-              <a:t>Syntax:</a:t>
-            </a:r>
-          </a:p>
-        </p:txBody>
-      </p:sp>
-      <p:sp>
-        <p:nvSpPr>
-          <p:cNvPr id="6" name="Rectangle 5"/>
+          <p:cNvPr id="3" name="Rectangle 2"/>
           <p:cNvSpPr/>
           <p:nvPr/>
         </p:nvSpPr>
         <p:spPr>
           <a:xfrm>
-            <a:off x="457200" y="2926080"/>
-            <a:ext cx="3657600" cy="1371600"/>
+            <a:off x="0" y="0"/>
+            <a:ext cx="12191695" cy="137160"/>
           </a:xfrm>
           <a:prstGeom prst="rect">
             <a:avLst/>
           </a:prstGeom>
           <a:solidFill>
-            <a:srgbClr val="DBEAFE"/>
+            <a:srgbClr val="0066CC"/>
           </a:solidFill>
-          <a:ln w="25400">
-            <a:solidFill>
-              <a:srgbClr val="2563EB"/>
-            </a:solidFill>
+          <a:ln>
+            <a:noFill/>
           </a:ln>
         </p:spPr>
         <p:style>
@@ -6974,59 +5148,23 @@
           </a:fontRef>
         </p:style>
         <p:txBody>
-          <a:bodyPr rtlCol="0" anchor="ctr" wrap="square" lIns="182880" tIns="137160"/>
-          <a:lstStyle/>
-          <a:p>
-            <a:pPr algn="ctr">
-              <a:defRPr sz="1800">
-                <a:solidFill>
-                  <a:srgbClr val="1F2937"/>
-                </a:solidFill>
-                <a:latin typeface="Courier New"/>
-              </a:defRPr>
-            </a:pPr>
-            <a:r>
-              <a:t>while condition:</a:t>
-            </a:r>
-          </a:p>
-          <a:p>
-            <a:pPr>
-              <a:defRPr sz="1800">
-                <a:solidFill>
-                  <a:srgbClr val="1F2937"/>
-                </a:solidFill>
-                <a:latin typeface="Courier New"/>
-              </a:defRPr>
-            </a:pPr>
-            <a:r>
-              <a:t>    # code to repeat</a:t>
-            </a:r>
-          </a:p>
-          <a:p>
-            <a:pPr>
-              <a:defRPr sz="1800">
-                <a:solidFill>
-                  <a:srgbClr val="1F2937"/>
-                </a:solidFill>
-                <a:latin typeface="Courier New"/>
-              </a:defRPr>
-            </a:pPr>
-            <a:r>
-              <a:t>    # update condition</a:t>
-            </a:r>
-          </a:p>
-        </p:txBody>
-      </p:sp>
-      <p:sp>
-        <p:nvSpPr>
-          <p:cNvPr id="7" name="TextBox 6"/>
+          <a:bodyPr rtlCol="0" anchor="ctr"/>
+          <a:lstStyle/>
+          <a:p>
+            <a:pPr algn="ctr"/>
+          </a:p>
+        </p:txBody>
+      </p:sp>
+      <p:sp>
+        <p:nvSpPr>
+          <p:cNvPr id="4" name="TextBox 3"/>
           <p:cNvSpPr txBox="1"/>
           <p:nvPr/>
         </p:nvSpPr>
         <p:spPr>
           <a:xfrm>
-            <a:off x="4572000" y="2560320"/>
-            <a:ext cx="3657600" cy="365760"/>
+            <a:off x="457200" y="365760"/>
+            <a:ext cx="10972800" cy="731520"/>
           </a:xfrm>
           <a:prstGeom prst="rect">
             <a:avLst/>
@@ -7040,39 +5178,37 @@
           <a:lstStyle/>
           <a:p>
             <a:pPr>
-              <a:defRPr sz="2200" b="1">
-                <a:solidFill>
-                  <a:srgbClr val="1F2937"/>
-                </a:solidFill>
-              </a:defRPr>
-            </a:pPr>
-            <a:r>
-              <a:t>Example:</a:t>
-            </a:r>
-          </a:p>
-        </p:txBody>
-      </p:sp>
-      <p:sp>
-        <p:nvSpPr>
-          <p:cNvPr id="8" name="Rectangle 7"/>
+              <a:defRPr sz="4000" b="1">
+                <a:solidFill>
+                  <a:srgbClr val="003366"/>
+                </a:solidFill>
+              </a:defRPr>
+            </a:pPr>
+            <a:r>
+              <a:t>While Loops: Repeat While True ⏳</a:t>
+            </a:r>
+          </a:p>
+        </p:txBody>
+      </p:sp>
+      <p:sp>
+        <p:nvSpPr>
+          <p:cNvPr id="5" name="Rectangle 4"/>
           <p:cNvSpPr/>
           <p:nvPr/>
         </p:nvSpPr>
         <p:spPr>
           <a:xfrm>
-            <a:off x="4572000" y="2926080"/>
-            <a:ext cx="4114800" cy="1828800"/>
+            <a:off x="457200" y="1005840"/>
+            <a:ext cx="1828800" cy="45720"/>
           </a:xfrm>
           <a:prstGeom prst="rect">
             <a:avLst/>
           </a:prstGeom>
           <a:solidFill>
-            <a:srgbClr val="DBEAFE"/>
+            <a:srgbClr val="0066CC"/>
           </a:solidFill>
-          <a:ln w="25400">
-            <a:solidFill>
-              <a:srgbClr val="2563EB"/>
-            </a:solidFill>
+          <a:ln>
+            <a:noFill/>
           </a:ln>
         </p:spPr>
         <p:style>
@@ -7090,95 +5226,23 @@
           </a:fontRef>
         </p:style>
         <p:txBody>
-          <a:bodyPr rtlCol="0" anchor="ctr" wrap="square" lIns="182880" tIns="137160"/>
-          <a:lstStyle/>
-          <a:p>
-            <a:pPr algn="ctr">
-              <a:defRPr sz="1800">
-                <a:solidFill>
-                  <a:srgbClr val="1F2937"/>
-                </a:solidFill>
-                <a:latin typeface="Courier New"/>
-              </a:defRPr>
-            </a:pPr>
-            <a:r>
-              <a:t>count = 1</a:t>
-            </a:r>
-          </a:p>
-          <a:p>
-            <a:pPr>
-              <a:defRPr sz="1800">
-                <a:solidFill>
-                  <a:srgbClr val="1F2937"/>
-                </a:solidFill>
-                <a:latin typeface="Courier New"/>
-              </a:defRPr>
-            </a:pPr>
-            <a:r>
-              <a:t>while count &lt;= 5:</a:t>
-            </a:r>
-          </a:p>
-          <a:p>
-            <a:pPr>
-              <a:defRPr sz="1800">
-                <a:solidFill>
-                  <a:srgbClr val="1F2937"/>
-                </a:solidFill>
-                <a:latin typeface="Courier New"/>
-              </a:defRPr>
-            </a:pPr>
-            <a:r>
-              <a:t>    print(count)</a:t>
-            </a:r>
-          </a:p>
-          <a:p>
-            <a:pPr>
-              <a:defRPr sz="1800">
-                <a:solidFill>
-                  <a:srgbClr val="1F2937"/>
-                </a:solidFill>
-                <a:latin typeface="Courier New"/>
-              </a:defRPr>
-            </a:pPr>
-            <a:r>
-              <a:t>    count = count + 1</a:t>
-            </a:r>
-          </a:p>
-          <a:p>
-            <a:pPr>
-              <a:defRPr sz="1800">
-                <a:solidFill>
-                  <a:srgbClr val="1F2937"/>
-                </a:solidFill>
-                <a:latin typeface="Courier New"/>
-              </a:defRPr>
-            </a:pPr>
-          </a:p>
-          <a:p>
-            <a:pPr>
-              <a:defRPr sz="1800">
-                <a:solidFill>
-                  <a:srgbClr val="1F2937"/>
-                </a:solidFill>
-                <a:latin typeface="Courier New"/>
-              </a:defRPr>
-            </a:pPr>
-            <a:r>
-              <a:t># Output: 1 2 3 4 5</a:t>
-            </a:r>
-          </a:p>
-        </p:txBody>
-      </p:sp>
-      <p:sp>
-        <p:nvSpPr>
-          <p:cNvPr id="9" name="TextBox 8"/>
+          <a:bodyPr rtlCol="0" anchor="ctr"/>
+          <a:lstStyle/>
+          <a:p>
+            <a:pPr algn="ctr"/>
+          </a:p>
+        </p:txBody>
+      </p:sp>
+      <p:sp>
+        <p:nvSpPr>
+          <p:cNvPr id="6" name="TextBox 5"/>
           <p:cNvSpPr txBox="1"/>
           <p:nvPr/>
         </p:nvSpPr>
         <p:spPr>
           <a:xfrm>
-            <a:off x="457200" y="5029200"/>
-            <a:ext cx="8229600" cy="1097280"/>
+            <a:off x="640080" y="1371600"/>
+            <a:ext cx="10789920" cy="4572000"/>
           </a:xfrm>
           <a:prstGeom prst="rect">
             <a:avLst/>
@@ -7186,20 +5250,83 @@
           <a:noFill/>
         </p:spPr>
         <p:txBody>
-          <a:bodyPr wrap="none">
+          <a:bodyPr wrap="square">
             <a:spAutoFit/>
           </a:bodyPr>
           <a:lstStyle/>
           <a:p>
             <a:pPr>
+              <a:spcAft>
+                <a:spcPts val="800"/>
+              </a:spcAft>
               <a:defRPr sz="2000" b="1">
                 <a:solidFill>
-                  <a:srgbClr val="EF4444"/>
-                </a:solidFill>
-              </a:defRPr>
-            </a:pPr>
-            <a:r>
-              <a:t>⚠️ Important: You must update the condition inside the loop, or it will run forever (infinite loop)!</a:t>
+                  <a:srgbClr val="333333"/>
+                </a:solidFill>
+              </a:defRPr>
+            </a:pPr>
+            <a:r>
+              <a:t>A while loop repeats as long as a condition is True</a:t>
+            </a:r>
+          </a:p>
+          <a:p>
+            <a:pPr>
+              <a:spcAft>
+                <a:spcPts val="800"/>
+              </a:spcAft>
+              <a:defRPr sz="2000" b="1">
+                <a:solidFill>
+                  <a:srgbClr val="333333"/>
+                </a:solidFill>
+              </a:defRPr>
+            </a:pPr>
+            <a:r>
+              <a:t>Syntax:</a:t>
+            </a:r>
+          </a:p>
+          <a:p>
+            <a:pPr>
+              <a:spcAft>
+                <a:spcPts val="800"/>
+              </a:spcAft>
+              <a:defRPr sz="2000" b="1">
+                <a:solidFill>
+                  <a:srgbClr val="333333"/>
+                </a:solidFill>
+              </a:defRPr>
+            </a:pPr>
+            <a:r>
+              <a:t>Example: Count to 5</a:t>
+            </a:r>
+          </a:p>
+          <a:p>
+            <a:pPr>
+              <a:spcAft>
+                <a:spcPts val="800"/>
+              </a:spcAft>
+              <a:defRPr sz="2000" b="1">
+                <a:solidFill>
+                  <a:srgbClr val="333333"/>
+                </a:solidFill>
+              </a:defRPr>
+            </a:pPr>
+            <a:r>
+              <a:t>Output:</a:t>
+            </a:r>
+          </a:p>
+          <a:p>
+            <a:pPr>
+              <a:spcAft>
+                <a:spcPts val="800"/>
+              </a:spcAft>
+              <a:defRPr sz="2000" b="1">
+                <a:solidFill>
+                  <a:srgbClr val="333333"/>
+                </a:solidFill>
+              </a:defRPr>
+            </a:pPr>
+            <a:r>
+              <a:t>Important:Don't forget to update the counter, or the loop runs forever!</a:t>
             </a:r>
           </a:p>
         </p:txBody>
@@ -7215,14 +5342,6 @@
 <file path=ppt/slides/slide4.xml><?xml version="1.0" encoding="utf-8"?>
 <p:sld xmlns:a="http://schemas.openxmlformats.org/drawingml/2006/main" xmlns:p="http://schemas.openxmlformats.org/presentationml/2006/main" xmlns:r="http://schemas.openxmlformats.org/officeDocument/2006/relationships">
   <p:cSld>
-    <p:bg>
-      <p:bgPr>
-        <a:solidFill>
-          <a:srgbClr val="FFFFFF"/>
-        </a:solidFill>
-        <a:effectLst/>
-      </p:bgPr>
-    </p:bg>
     <p:spTree>
       <p:nvGrpSpPr>
         <p:cNvPr id="1" name=""/>
@@ -7232,55 +5351,20 @@
       <p:grpSpPr/>
       <p:sp>
         <p:nvSpPr>
-          <p:cNvPr id="2" name="TextBox 1"/>
-          <p:cNvSpPr txBox="1"/>
-          <p:nvPr/>
-        </p:nvSpPr>
-        <p:spPr>
-          <a:xfrm>
-            <a:off x="457200" y="457200"/>
-            <a:ext cx="8229600" cy="731520"/>
-          </a:xfrm>
-          <a:prstGeom prst="rect">
-            <a:avLst/>
-          </a:prstGeom>
-          <a:noFill/>
-        </p:spPr>
-        <p:txBody>
-          <a:bodyPr wrap="none">
-            <a:spAutoFit/>
-          </a:bodyPr>
-          <a:lstStyle/>
-          <a:p>
-            <a:pPr>
-              <a:defRPr sz="4000" b="1">
-                <a:solidFill>
-                  <a:srgbClr val="1F2937"/>
-                </a:solidFill>
-              </a:defRPr>
-            </a:pPr>
-            <a:r>
-              <a:t>While Loops with Counters</a:t>
-            </a:r>
-          </a:p>
-        </p:txBody>
-      </p:sp>
-      <p:sp>
-        <p:nvSpPr>
-          <p:cNvPr id="3" name="Rectangle 2"/>
+          <p:cNvPr id="2" name="Rectangle 1"/>
           <p:cNvSpPr/>
           <p:nvPr/>
         </p:nvSpPr>
         <p:spPr>
           <a:xfrm>
-            <a:off x="457200" y="1280160"/>
-            <a:ext cx="1371600" cy="73152"/>
+            <a:off x="0" y="0"/>
+            <a:ext cx="12191695" cy="6858000"/>
           </a:xfrm>
           <a:prstGeom prst="rect">
             <a:avLst/>
           </a:prstGeom>
           <a:solidFill>
-            <a:srgbClr val="2563EB"/>
+            <a:srgbClr val="FFFFFF"/>
           </a:solidFill>
           <a:ln>
             <a:noFill/>
@@ -7310,60 +5394,23 @@
       </p:sp>
       <p:sp>
         <p:nvSpPr>
-          <p:cNvPr id="4" name="TextBox 3"/>
-          <p:cNvSpPr txBox="1"/>
-          <p:nvPr/>
-        </p:nvSpPr>
-        <p:spPr>
-          <a:xfrm>
-            <a:off x="457200" y="1828800"/>
-            <a:ext cx="3657600" cy="365760"/>
-          </a:xfrm>
-          <a:prstGeom prst="rect">
-            <a:avLst/>
-          </a:prstGeom>
-          <a:noFill/>
-        </p:spPr>
-        <p:txBody>
-          <a:bodyPr wrap="none">
-            <a:spAutoFit/>
-          </a:bodyPr>
-          <a:lstStyle/>
-          <a:p>
-            <a:pPr>
-              <a:defRPr sz="2200" b="1">
-                <a:solidFill>
-                  <a:srgbClr val="1F2937"/>
-                </a:solidFill>
-              </a:defRPr>
-            </a:pPr>
-            <a:r>
-              <a:t>Countdown Example:</a:t>
-            </a:r>
-          </a:p>
-        </p:txBody>
-      </p:sp>
-      <p:sp>
-        <p:nvSpPr>
-          <p:cNvPr id="5" name="Rectangle 4"/>
+          <p:cNvPr id="3" name="Rectangle 2"/>
           <p:cNvSpPr/>
           <p:nvPr/>
         </p:nvSpPr>
         <p:spPr>
           <a:xfrm>
-            <a:off x="457200" y="2194560"/>
-            <a:ext cx="3931920" cy="2286000"/>
+            <a:off x="0" y="0"/>
+            <a:ext cx="12191695" cy="137160"/>
           </a:xfrm>
           <a:prstGeom prst="rect">
             <a:avLst/>
           </a:prstGeom>
           <a:solidFill>
-            <a:srgbClr val="DBEAFE"/>
+            <a:srgbClr val="0066CC"/>
           </a:solidFill>
-          <a:ln w="25400">
-            <a:solidFill>
-              <a:srgbClr val="2563EB"/>
-            </a:solidFill>
+          <a:ln>
+            <a:noFill/>
           </a:ln>
         </p:spPr>
         <p:style>
@@ -7381,121 +5428,23 @@
           </a:fontRef>
         </p:style>
         <p:txBody>
-          <a:bodyPr rtlCol="0" anchor="ctr" wrap="square" lIns="182880" tIns="137160"/>
-          <a:lstStyle/>
-          <a:p>
-            <a:pPr algn="ctr">
-              <a:defRPr sz="1800">
-                <a:solidFill>
-                  <a:srgbClr val="1F2937"/>
-                </a:solidFill>
-                <a:latin typeface="Courier New"/>
-              </a:defRPr>
-            </a:pPr>
-            <a:r>
-              <a:t>count = 5</a:t>
-            </a:r>
-          </a:p>
-          <a:p>
-            <a:pPr>
-              <a:defRPr sz="1800">
-                <a:solidFill>
-                  <a:srgbClr val="1F2937"/>
-                </a:solidFill>
-                <a:latin typeface="Courier New"/>
-              </a:defRPr>
-            </a:pPr>
-            <a:r>
-              <a:t>while count &gt; 0:</a:t>
-            </a:r>
-          </a:p>
-          <a:p>
-            <a:pPr>
-              <a:defRPr sz="1800">
-                <a:solidFill>
-                  <a:srgbClr val="1F2937"/>
-                </a:solidFill>
-                <a:latin typeface="Courier New"/>
-              </a:defRPr>
-            </a:pPr>
-            <a:r>
-              <a:t>    print(count)</a:t>
-            </a:r>
-          </a:p>
-          <a:p>
-            <a:pPr>
-              <a:defRPr sz="1800">
-                <a:solidFill>
-                  <a:srgbClr val="1F2937"/>
-                </a:solidFill>
-                <a:latin typeface="Courier New"/>
-              </a:defRPr>
-            </a:pPr>
-            <a:r>
-              <a:t>    count -= 1</a:t>
-            </a:r>
-          </a:p>
-          <a:p>
-            <a:pPr>
-              <a:defRPr sz="1800">
-                <a:solidFill>
-                  <a:srgbClr val="1F2937"/>
-                </a:solidFill>
-                <a:latin typeface="Courier New"/>
-              </a:defRPr>
-            </a:pPr>
-            <a:r>
-              <a:t>print('Blastoff!')</a:t>
-            </a:r>
-          </a:p>
-          <a:p>
-            <a:pPr>
-              <a:defRPr sz="1800">
-                <a:solidFill>
-                  <a:srgbClr val="1F2937"/>
-                </a:solidFill>
-                <a:latin typeface="Courier New"/>
-              </a:defRPr>
-            </a:pPr>
-          </a:p>
-          <a:p>
-            <a:pPr>
-              <a:defRPr sz="1800">
-                <a:solidFill>
-                  <a:srgbClr val="1F2937"/>
-                </a:solidFill>
-                <a:latin typeface="Courier New"/>
-              </a:defRPr>
-            </a:pPr>
-            <a:r>
-              <a:t># Output:</a:t>
-            </a:r>
-          </a:p>
-          <a:p>
-            <a:pPr>
-              <a:defRPr sz="1800">
-                <a:solidFill>
-                  <a:srgbClr val="1F2937"/>
-                </a:solidFill>
-                <a:latin typeface="Courier New"/>
-              </a:defRPr>
-            </a:pPr>
-            <a:r>
-              <a:t># 5 4 3 2 1 Blastoff!</a:t>
-            </a:r>
-          </a:p>
-        </p:txBody>
-      </p:sp>
-      <p:sp>
-        <p:nvSpPr>
-          <p:cNvPr id="6" name="TextBox 5"/>
+          <a:bodyPr rtlCol="0" anchor="ctr"/>
+          <a:lstStyle/>
+          <a:p>
+            <a:pPr algn="ctr"/>
+          </a:p>
+        </p:txBody>
+      </p:sp>
+      <p:sp>
+        <p:nvSpPr>
+          <p:cNvPr id="4" name="TextBox 3"/>
           <p:cNvSpPr txBox="1"/>
           <p:nvPr/>
         </p:nvSpPr>
         <p:spPr>
           <a:xfrm>
-            <a:off x="4846320" y="1828800"/>
-            <a:ext cx="3657600" cy="365760"/>
+            <a:off x="457200" y="365760"/>
+            <a:ext cx="10972800" cy="731520"/>
           </a:xfrm>
           <a:prstGeom prst="rect">
             <a:avLst/>
@@ -7509,39 +5458,37 @@
           <a:lstStyle/>
           <a:p>
             <a:pPr>
-              <a:defRPr sz="2200" b="1">
-                <a:solidFill>
-                  <a:srgbClr val="1F2937"/>
-                </a:solidFill>
-              </a:defRPr>
-            </a:pPr>
-            <a:r>
-              <a:t>Sum Example:</a:t>
-            </a:r>
-          </a:p>
-        </p:txBody>
-      </p:sp>
-      <p:sp>
-        <p:nvSpPr>
-          <p:cNvPr id="7" name="Rectangle 6"/>
+              <a:defRPr sz="4000" b="1">
+                <a:solidFill>
+                  <a:srgbClr val="003366"/>
+                </a:solidFill>
+              </a:defRPr>
+            </a:pPr>
+            <a:r>
+              <a:t>While Loops with Counters 🔢</a:t>
+            </a:r>
+          </a:p>
+        </p:txBody>
+      </p:sp>
+      <p:sp>
+        <p:nvSpPr>
+          <p:cNvPr id="5" name="Rectangle 4"/>
           <p:cNvSpPr/>
           <p:nvPr/>
         </p:nvSpPr>
         <p:spPr>
           <a:xfrm>
-            <a:off x="4846320" y="2194560"/>
-            <a:ext cx="3840480" cy="2286000"/>
+            <a:off x="457200" y="1005840"/>
+            <a:ext cx="1828800" cy="45720"/>
           </a:xfrm>
           <a:prstGeom prst="rect">
             <a:avLst/>
           </a:prstGeom>
           <a:solidFill>
-            <a:srgbClr val="DBEAFE"/>
+            <a:srgbClr val="0066CC"/>
           </a:solidFill>
-          <a:ln w="25400">
-            <a:solidFill>
-              <a:srgbClr val="2563EB"/>
-            </a:solidFill>
+          <a:ln>
+            <a:noFill/>
           </a:ln>
         </p:spPr>
         <p:style>
@@ -7559,161 +5506,77 @@
           </a:fontRef>
         </p:style>
         <p:txBody>
-          <a:bodyPr rtlCol="0" anchor="ctr" wrap="square" lIns="182880" tIns="137160"/>
-          <a:lstStyle/>
-          <a:p>
-            <a:pPr algn="ctr">
-              <a:defRPr sz="1800">
-                <a:solidFill>
-                  <a:srgbClr val="1F2937"/>
-                </a:solidFill>
-                <a:latin typeface="Courier New"/>
-              </a:defRPr>
-            </a:pPr>
-            <a:r>
-              <a:t>total = 0</a:t>
-            </a:r>
-          </a:p>
+          <a:bodyPr rtlCol="0" anchor="ctr"/>
+          <a:lstStyle/>
+          <a:p>
+            <a:pPr algn="ctr"/>
+          </a:p>
+        </p:txBody>
+      </p:sp>
+      <p:sp>
+        <p:nvSpPr>
+          <p:cNvPr id="6" name="TextBox 5"/>
+          <p:cNvSpPr txBox="1"/>
+          <p:nvPr/>
+        </p:nvSpPr>
+        <p:spPr>
+          <a:xfrm>
+            <a:off x="640080" y="1371600"/>
+            <a:ext cx="10789920" cy="4572000"/>
+          </a:xfrm>
+          <a:prstGeom prst="rect">
+            <a:avLst/>
+          </a:prstGeom>
+          <a:noFill/>
+        </p:spPr>
+        <p:txBody>
+          <a:bodyPr wrap="square">
+            <a:spAutoFit/>
+          </a:bodyPr>
+          <a:lstStyle/>
           <a:p>
             <a:pPr>
-              <a:defRPr sz="1800">
-                <a:solidFill>
-                  <a:srgbClr val="1F2937"/>
-                </a:solidFill>
-                <a:latin typeface="Courier New"/>
-              </a:defRPr>
-            </a:pPr>
-            <a:r>
-              <a:t>num = 1</a:t>
+              <a:spcAft>
+                <a:spcPts val="800"/>
+              </a:spcAft>
+              <a:defRPr sz="2000" b="1">
+                <a:solidFill>
+                  <a:srgbClr val="333333"/>
+                </a:solidFill>
+              </a:defRPr>
+            </a:pPr>
+            <a:r>
+              <a:t>Pattern for Counter Loops:</a:t>
             </a:r>
           </a:p>
           <a:p>
             <a:pPr>
-              <a:defRPr sz="1800">
-                <a:solidFill>
-                  <a:srgbClr val="1F2937"/>
-                </a:solidFill>
-                <a:latin typeface="Courier New"/>
-              </a:defRPr>
-            </a:pPr>
-            <a:r>
-              <a:t>while num &lt;= 5:</a:t>
+              <a:spcAft>
+                <a:spcPts val="800"/>
+              </a:spcAft>
+              <a:defRPr sz="2000" b="1">
+                <a:solidFill>
+                  <a:srgbClr val="333333"/>
+                </a:solidFill>
+              </a:defRPr>
+            </a:pPr>
+            <a:r>
+              <a:t>Countdown</a:t>
             </a:r>
           </a:p>
           <a:p>
             <a:pPr>
-              <a:defRPr sz="1800">
-                <a:solidFill>
-                  <a:srgbClr val="1F2937"/>
-                </a:solidFill>
-                <a:latin typeface="Courier New"/>
-              </a:defRPr>
-            </a:pPr>
-            <a:r>
-              <a:t>    total += num</a:t>
-            </a:r>
-          </a:p>
-          <a:p>
-            <a:pPr>
-              <a:defRPr sz="1800">
-                <a:solidFill>
-                  <a:srgbClr val="1F2937"/>
-                </a:solidFill>
-                <a:latin typeface="Courier New"/>
-              </a:defRPr>
-            </a:pPr>
-            <a:r>
-              <a:t>    num += 1</a:t>
-            </a:r>
-          </a:p>
-          <a:p>
-            <a:pPr>
-              <a:defRPr sz="1800">
-                <a:solidFill>
-                  <a:srgbClr val="1F2937"/>
-                </a:solidFill>
-                <a:latin typeface="Courier New"/>
-              </a:defRPr>
-            </a:pPr>
-            <a:r>
-              <a:t>print(total)</a:t>
-            </a:r>
-          </a:p>
-          <a:p>
-            <a:pPr>
-              <a:defRPr sz="1800">
-                <a:solidFill>
-                  <a:srgbClr val="1F2937"/>
-                </a:solidFill>
-                <a:latin typeface="Courier New"/>
-              </a:defRPr>
-            </a:pPr>
-          </a:p>
-          <a:p>
-            <a:pPr>
-              <a:defRPr sz="1800">
-                <a:solidFill>
-                  <a:srgbClr val="1F2937"/>
-                </a:solidFill>
-                <a:latin typeface="Courier New"/>
-              </a:defRPr>
-            </a:pPr>
-            <a:r>
-              <a:t># Output: 15</a:t>
-            </a:r>
-          </a:p>
-        </p:txBody>
-      </p:sp>
-      <p:sp>
-        <p:nvSpPr>
-          <p:cNvPr id="8" name="Rectangle 7"/>
-          <p:cNvSpPr/>
-          <p:nvPr/>
-        </p:nvSpPr>
-        <p:spPr>
-          <a:xfrm>
-            <a:off x="914400" y="5029200"/>
-            <a:ext cx="7315200" cy="914400"/>
-          </a:xfrm>
-          <a:prstGeom prst="rect">
-            <a:avLst/>
-          </a:prstGeom>
-          <a:solidFill>
-            <a:srgbClr val="DBEAFE"/>
-          </a:solidFill>
-          <a:ln w="25400">
-            <a:solidFill>
-              <a:srgbClr val="2563EB"/>
-            </a:solidFill>
-          </a:ln>
-        </p:spPr>
-        <p:style>
-          <a:lnRef idx="1">
-            <a:schemeClr val="accent1"/>
-          </a:lnRef>
-          <a:fillRef idx="3">
-            <a:schemeClr val="accent1"/>
-          </a:fillRef>
-          <a:effectRef idx="2">
-            <a:schemeClr val="accent1"/>
-          </a:effectRef>
-          <a:fontRef idx="minor">
-            <a:schemeClr val="lt1"/>
-          </a:fontRef>
-        </p:style>
-        <p:txBody>
-          <a:bodyPr rtlCol="0" anchor="ctr"/>
-          <a:lstStyle/>
-          <a:p>
-            <a:pPr algn="ctr">
-              <a:defRPr sz="2200" b="1">
-                <a:solidFill>
-                  <a:srgbClr val="2563EB"/>
-                </a:solidFill>
-              </a:defRPr>
-            </a:pPr>
-            <a:r>
-              <a:t>💡 Tip: Use += and -= for cleaner counter updates!</a:t>
+              <a:spcAft>
+                <a:spcPts val="800"/>
+              </a:spcAft>
+              <a:defRPr sz="2000" b="1">
+                <a:solidFill>
+                  <a:srgbClr val="333333"/>
+                </a:solidFill>
+              </a:defRPr>
+            </a:pPr>
+            <a:r>
+              <a:t>Sum Numbers</a:t>
             </a:r>
           </a:p>
         </p:txBody>
@@ -7729,14 +5592,6 @@
 <file path=ppt/slides/slide5.xml><?xml version="1.0" encoding="utf-8"?>
 <p:sld xmlns:a="http://schemas.openxmlformats.org/drawingml/2006/main" xmlns:p="http://schemas.openxmlformats.org/presentationml/2006/main" xmlns:r="http://schemas.openxmlformats.org/officeDocument/2006/relationships">
   <p:cSld>
-    <p:bg>
-      <p:bgPr>
-        <a:solidFill>
-          <a:srgbClr val="FFFFFF"/>
-        </a:solidFill>
-        <a:effectLst/>
-      </p:bgPr>
-    </p:bg>
     <p:spTree>
       <p:nvGrpSpPr>
         <p:cNvPr id="1" name=""/>
@@ -7746,55 +5601,20 @@
       <p:grpSpPr/>
       <p:sp>
         <p:nvSpPr>
-          <p:cNvPr id="2" name="TextBox 1"/>
-          <p:cNvSpPr txBox="1"/>
-          <p:nvPr/>
-        </p:nvSpPr>
-        <p:spPr>
-          <a:xfrm>
-            <a:off x="457200" y="457200"/>
-            <a:ext cx="8229600" cy="731520"/>
-          </a:xfrm>
-          <a:prstGeom prst="rect">
-            <a:avLst/>
-          </a:prstGeom>
-          <a:noFill/>
-        </p:spPr>
-        <p:txBody>
-          <a:bodyPr wrap="none">
-            <a:spAutoFit/>
-          </a:bodyPr>
-          <a:lstStyle/>
-          <a:p>
-            <a:pPr>
-              <a:defRPr sz="4000" b="1">
-                <a:solidFill>
-                  <a:srgbClr val="1F2937"/>
-                </a:solidFill>
-              </a:defRPr>
-            </a:pPr>
-            <a:r>
-              <a:t>While Loops with Conditions</a:t>
-            </a:r>
-          </a:p>
-        </p:txBody>
-      </p:sp>
-      <p:sp>
-        <p:nvSpPr>
-          <p:cNvPr id="3" name="Rectangle 2"/>
+          <p:cNvPr id="2" name="Rectangle 1"/>
           <p:cNvSpPr/>
           <p:nvPr/>
         </p:nvSpPr>
         <p:spPr>
           <a:xfrm>
-            <a:off x="457200" y="1280160"/>
-            <a:ext cx="1371600" cy="73152"/>
+            <a:off x="0" y="0"/>
+            <a:ext cx="12191695" cy="6858000"/>
           </a:xfrm>
           <a:prstGeom prst="rect">
             <a:avLst/>
           </a:prstGeom>
           <a:solidFill>
-            <a:srgbClr val="2563EB"/>
+            <a:srgbClr val="FFFFFF"/>
           </a:solidFill>
           <a:ln>
             <a:noFill/>
@@ -7824,60 +5644,23 @@
       </p:sp>
       <p:sp>
         <p:nvSpPr>
-          <p:cNvPr id="4" name="TextBox 3"/>
-          <p:cNvSpPr txBox="1"/>
-          <p:nvPr/>
-        </p:nvSpPr>
-        <p:spPr>
-          <a:xfrm>
-            <a:off x="457200" y="1828800"/>
-            <a:ext cx="8229600" cy="365760"/>
-          </a:xfrm>
-          <a:prstGeom prst="rect">
-            <a:avLst/>
-          </a:prstGeom>
-          <a:noFill/>
-        </p:spPr>
-        <p:txBody>
-          <a:bodyPr wrap="none">
-            <a:spAutoFit/>
-          </a:bodyPr>
-          <a:lstStyle/>
-          <a:p>
-            <a:pPr>
-              <a:defRPr sz="2200" b="1">
-                <a:solidFill>
-                  <a:srgbClr val="1F2937"/>
-                </a:solidFill>
-              </a:defRPr>
-            </a:pPr>
-            <a:r>
-              <a:t>User Input Example:</a:t>
-            </a:r>
-          </a:p>
-        </p:txBody>
-      </p:sp>
-      <p:sp>
-        <p:nvSpPr>
-          <p:cNvPr id="5" name="Rectangle 4"/>
+          <p:cNvPr id="3" name="Rectangle 2"/>
           <p:cNvSpPr/>
           <p:nvPr/>
         </p:nvSpPr>
         <p:spPr>
           <a:xfrm>
-            <a:off x="457200" y="2286000"/>
-            <a:ext cx="8229600" cy="1828800"/>
+            <a:off x="0" y="0"/>
+            <a:ext cx="12191695" cy="137160"/>
           </a:xfrm>
           <a:prstGeom prst="rect">
             <a:avLst/>
           </a:prstGeom>
           <a:solidFill>
-            <a:srgbClr val="DBEAFE"/>
+            <a:srgbClr val="0066CC"/>
           </a:solidFill>
-          <a:ln w="25400">
-            <a:solidFill>
-              <a:srgbClr val="2563EB"/>
-            </a:solidFill>
+          <a:ln>
+            <a:noFill/>
           </a:ln>
         </p:spPr>
         <p:style>
@@ -7895,72 +5678,23 @@
           </a:fontRef>
         </p:style>
         <p:txBody>
-          <a:bodyPr rtlCol="0" anchor="ctr" wrap="square" lIns="182880" tIns="137160"/>
-          <a:lstStyle/>
-          <a:p>
-            <a:pPr algn="ctr">
-              <a:defRPr sz="1800">
-                <a:solidFill>
-                  <a:srgbClr val="1F2937"/>
-                </a:solidFill>
-                <a:latin typeface="Courier New"/>
-              </a:defRPr>
-            </a:pPr>
-            <a:r>
-              <a:t>password = ""</a:t>
-            </a:r>
-          </a:p>
-          <a:p>
-            <a:pPr>
-              <a:defRPr sz="1800">
-                <a:solidFill>
-                  <a:srgbClr val="1F2937"/>
-                </a:solidFill>
-                <a:latin typeface="Courier New"/>
-              </a:defRPr>
-            </a:pPr>
-            <a:r>
-              <a:t>while password != "python123":</a:t>
-            </a:r>
-          </a:p>
-          <a:p>
-            <a:pPr>
-              <a:defRPr sz="1800">
-                <a:solidFill>
-                  <a:srgbClr val="1F2937"/>
-                </a:solidFill>
-                <a:latin typeface="Courier New"/>
-              </a:defRPr>
-            </a:pPr>
-            <a:r>
-              <a:t>    password = input("Enter password: ")</a:t>
-            </a:r>
-          </a:p>
-          <a:p>
-            <a:pPr>
-              <a:defRPr sz="1800">
-                <a:solidFill>
-                  <a:srgbClr val="1F2937"/>
-                </a:solidFill>
-                <a:latin typeface="Courier New"/>
-              </a:defRPr>
-            </a:pPr>
-            <a:r>
-              <a:t>print("Access granted!")</a:t>
-            </a:r>
-          </a:p>
-        </p:txBody>
-      </p:sp>
-      <p:sp>
-        <p:nvSpPr>
-          <p:cNvPr id="6" name="TextBox 5"/>
+          <a:bodyPr rtlCol="0" anchor="ctr"/>
+          <a:lstStyle/>
+          <a:p>
+            <a:pPr algn="ctr"/>
+          </a:p>
+        </p:txBody>
+      </p:sp>
+      <p:sp>
+        <p:nvSpPr>
+          <p:cNvPr id="4" name="TextBox 3"/>
           <p:cNvSpPr txBox="1"/>
           <p:nvPr/>
         </p:nvSpPr>
         <p:spPr>
           <a:xfrm>
-            <a:off x="457200" y="4389120"/>
-            <a:ext cx="8229600" cy="365760"/>
+            <a:off x="457200" y="365760"/>
+            <a:ext cx="10972800" cy="731520"/>
           </a:xfrm>
           <a:prstGeom prst="rect">
             <a:avLst/>
@@ -7974,39 +5708,37 @@
           <a:lstStyle/>
           <a:p>
             <a:pPr>
-              <a:defRPr sz="2200" b="1">
-                <a:solidFill>
-                  <a:srgbClr val="1F2937"/>
-                </a:solidFill>
-              </a:defRPr>
-            </a:pPr>
-            <a:r>
-              <a:t>Validation Example:</a:t>
-            </a:r>
-          </a:p>
-        </p:txBody>
-      </p:sp>
-      <p:sp>
-        <p:nvSpPr>
-          <p:cNvPr id="7" name="Rectangle 6"/>
+              <a:defRPr sz="4000" b="1">
+                <a:solidFill>
+                  <a:srgbClr val="003366"/>
+                </a:solidFill>
+              </a:defRPr>
+            </a:pPr>
+            <a:r>
+              <a:t>While Loops with Conditions 🎯</a:t>
+            </a:r>
+          </a:p>
+        </p:txBody>
+      </p:sp>
+      <p:sp>
+        <p:nvSpPr>
+          <p:cNvPr id="5" name="Rectangle 4"/>
           <p:cNvSpPr/>
           <p:nvPr/>
         </p:nvSpPr>
         <p:spPr>
           <a:xfrm>
-            <a:off x="457200" y="4754880"/>
-            <a:ext cx="8229600" cy="1645920"/>
+            <a:off x="457200" y="1005840"/>
+            <a:ext cx="1828800" cy="45720"/>
           </a:xfrm>
           <a:prstGeom prst="rect">
             <a:avLst/>
           </a:prstGeom>
           <a:solidFill>
-            <a:srgbClr val="DBEAFE"/>
+            <a:srgbClr val="0066CC"/>
           </a:solidFill>
-          <a:ln w="25400">
-            <a:solidFill>
-              <a:srgbClr val="2563EB"/>
-            </a:solidFill>
+          <a:ln>
+            <a:noFill/>
           </a:ln>
         </p:spPr>
         <p:style>
@@ -8024,58 +5756,77 @@
           </a:fontRef>
         </p:style>
         <p:txBody>
-          <a:bodyPr rtlCol="0" anchor="ctr" wrap="square" lIns="182880" tIns="137160"/>
-          <a:lstStyle/>
-          <a:p>
-            <a:pPr algn="ctr">
-              <a:defRPr sz="1800">
-                <a:solidFill>
-                  <a:srgbClr val="1F2937"/>
-                </a:solidFill>
-                <a:latin typeface="Courier New"/>
-              </a:defRPr>
-            </a:pPr>
-            <a:r>
-              <a:t>age = -1</a:t>
-            </a:r>
-          </a:p>
+          <a:bodyPr rtlCol="0" anchor="ctr"/>
+          <a:lstStyle/>
+          <a:p>
+            <a:pPr algn="ctr"/>
+          </a:p>
+        </p:txBody>
+      </p:sp>
+      <p:sp>
+        <p:nvSpPr>
+          <p:cNvPr id="6" name="TextBox 5"/>
+          <p:cNvSpPr txBox="1"/>
+          <p:nvPr/>
+        </p:nvSpPr>
+        <p:spPr>
+          <a:xfrm>
+            <a:off x="640080" y="1371600"/>
+            <a:ext cx="10789920" cy="4572000"/>
+          </a:xfrm>
+          <a:prstGeom prst="rect">
+            <a:avLst/>
+          </a:prstGeom>
+          <a:noFill/>
+        </p:spPr>
+        <p:txBody>
+          <a:bodyPr wrap="square">
+            <a:spAutoFit/>
+          </a:bodyPr>
+          <a:lstStyle/>
           <a:p>
             <a:pPr>
-              <a:defRPr sz="1800">
-                <a:solidFill>
-                  <a:srgbClr val="1F2937"/>
-                </a:solidFill>
-                <a:latin typeface="Courier New"/>
-              </a:defRPr>
-            </a:pPr>
-            <a:r>
-              <a:t>while age &lt; 0 or age &gt; 120:</a:t>
+              <a:spcAft>
+                <a:spcPts val="800"/>
+              </a:spcAft>
+              <a:defRPr sz="2000" b="1">
+                <a:solidFill>
+                  <a:srgbClr val="333333"/>
+                </a:solidFill>
+              </a:defRPr>
+            </a:pPr>
+            <a:r>
+              <a:t>While loops can use any condition, not just counters</a:t>
             </a:r>
           </a:p>
           <a:p>
             <a:pPr>
-              <a:defRPr sz="1800">
-                <a:solidFill>
-                  <a:srgbClr val="1F2937"/>
-                </a:solidFill>
-                <a:latin typeface="Courier New"/>
-              </a:defRPr>
-            </a:pPr>
-            <a:r>
-              <a:t>    age = int(input("Enter your age: "))</a:t>
+              <a:spcAft>
+                <a:spcPts val="800"/>
+              </a:spcAft>
+              <a:defRPr sz="2000" b="1">
+                <a:solidFill>
+                  <a:srgbClr val="333333"/>
+                </a:solidFill>
+              </a:defRPr>
+            </a:pPr>
+            <a:r>
+              <a:t>User Input Loop</a:t>
             </a:r>
           </a:p>
           <a:p>
             <a:pPr>
-              <a:defRPr sz="1800">
-                <a:solidFill>
-                  <a:srgbClr val="1F2937"/>
-                </a:solidFill>
-                <a:latin typeface="Courier New"/>
-              </a:defRPr>
-            </a:pPr>
-            <a:r>
-              <a:t>print(f"You are {age} years old")</a:t>
+              <a:spcAft>
+                <a:spcPts val="800"/>
+              </a:spcAft>
+              <a:defRPr sz="2000" b="1">
+                <a:solidFill>
+                  <a:srgbClr val="333333"/>
+                </a:solidFill>
+              </a:defRPr>
+            </a:pPr>
+            <a:r>
+              <a:t>Keep Doubling Until Large</a:t>
             </a:r>
           </a:p>
         </p:txBody>
@@ -8091,14 +5842,6 @@
 <file path=ppt/slides/slide6.xml><?xml version="1.0" encoding="utf-8"?>
 <p:sld xmlns:a="http://schemas.openxmlformats.org/drawingml/2006/main" xmlns:p="http://schemas.openxmlformats.org/presentationml/2006/main" xmlns:r="http://schemas.openxmlformats.org/officeDocument/2006/relationships">
   <p:cSld>
-    <p:bg>
-      <p:bgPr>
-        <a:solidFill>
-          <a:srgbClr val="FFFFFF"/>
-        </a:solidFill>
-        <a:effectLst/>
-      </p:bgPr>
-    </p:bg>
     <p:spTree>
       <p:nvGrpSpPr>
         <p:cNvPr id="1" name=""/>
@@ -8108,55 +5851,20 @@
       <p:grpSpPr/>
       <p:sp>
         <p:nvSpPr>
-          <p:cNvPr id="2" name="TextBox 1"/>
-          <p:cNvSpPr txBox="1"/>
-          <p:nvPr/>
-        </p:nvSpPr>
-        <p:spPr>
-          <a:xfrm>
-            <a:off x="457200" y="457200"/>
-            <a:ext cx="8229600" cy="731520"/>
-          </a:xfrm>
-          <a:prstGeom prst="rect">
-            <a:avLst/>
-          </a:prstGeom>
-          <a:noFill/>
-        </p:spPr>
-        <p:txBody>
-          <a:bodyPr wrap="none">
-            <a:spAutoFit/>
-          </a:bodyPr>
-          <a:lstStyle/>
-          <a:p>
-            <a:pPr>
-              <a:defRPr sz="4000" b="1">
-                <a:solidFill>
-                  <a:srgbClr val="1F2937"/>
-                </a:solidFill>
-              </a:defRPr>
-            </a:pPr>
-            <a:r>
-              <a:t>For Loops Introduction</a:t>
-            </a:r>
-          </a:p>
-        </p:txBody>
-      </p:sp>
-      <p:sp>
-        <p:nvSpPr>
-          <p:cNvPr id="3" name="Rectangle 2"/>
+          <p:cNvPr id="2" name="Rectangle 1"/>
           <p:cNvSpPr/>
           <p:nvPr/>
         </p:nvSpPr>
         <p:spPr>
           <a:xfrm>
-            <a:off x="457200" y="1280160"/>
-            <a:ext cx="1371600" cy="73152"/>
+            <a:off x="0" y="0"/>
+            <a:ext cx="12191695" cy="6858000"/>
           </a:xfrm>
           <a:prstGeom prst="rect">
             <a:avLst/>
           </a:prstGeom>
           <a:solidFill>
-            <a:srgbClr val="2563EB"/>
+            <a:srgbClr val="FFFFFF"/>
           </a:solidFill>
           <a:ln>
             <a:noFill/>
@@ -8186,95 +5894,23 @@
       </p:sp>
       <p:sp>
         <p:nvSpPr>
-          <p:cNvPr id="4" name="TextBox 3"/>
-          <p:cNvSpPr txBox="1"/>
-          <p:nvPr/>
-        </p:nvSpPr>
-        <p:spPr>
-          <a:xfrm>
-            <a:off x="457200" y="1828800"/>
-            <a:ext cx="8229600" cy="548640"/>
-          </a:xfrm>
-          <a:prstGeom prst="rect">
-            <a:avLst/>
-          </a:prstGeom>
-          <a:noFill/>
-        </p:spPr>
-        <p:txBody>
-          <a:bodyPr wrap="none">
-            <a:spAutoFit/>
-          </a:bodyPr>
-          <a:lstStyle/>
-          <a:p>
-            <a:pPr>
-              <a:defRPr sz="2400">
-                <a:solidFill>
-                  <a:srgbClr val="4B5563"/>
-                </a:solidFill>
-              </a:defRPr>
-            </a:pPr>
-            <a:r>
-              <a:t>For loops iterate through sequences (strings, lists, ranges)</a:t>
-            </a:r>
-          </a:p>
-        </p:txBody>
-      </p:sp>
-      <p:sp>
-        <p:nvSpPr>
-          <p:cNvPr id="5" name="TextBox 4"/>
-          <p:cNvSpPr txBox="1"/>
-          <p:nvPr/>
-        </p:nvSpPr>
-        <p:spPr>
-          <a:xfrm>
-            <a:off x="457200" y="2560320"/>
-            <a:ext cx="4114800" cy="365760"/>
-          </a:xfrm>
-          <a:prstGeom prst="rect">
-            <a:avLst/>
-          </a:prstGeom>
-          <a:noFill/>
-        </p:spPr>
-        <p:txBody>
-          <a:bodyPr wrap="none">
-            <a:spAutoFit/>
-          </a:bodyPr>
-          <a:lstStyle/>
-          <a:p>
-            <a:pPr>
-              <a:defRPr sz="2200" b="1">
-                <a:solidFill>
-                  <a:srgbClr val="1F2937"/>
-                </a:solidFill>
-              </a:defRPr>
-            </a:pPr>
-            <a:r>
-              <a:t>Iterating Through a String:</a:t>
-            </a:r>
-          </a:p>
-        </p:txBody>
-      </p:sp>
-      <p:sp>
-        <p:nvSpPr>
-          <p:cNvPr id="6" name="Rectangle 5"/>
+          <p:cNvPr id="3" name="Rectangle 2"/>
           <p:cNvSpPr/>
           <p:nvPr/>
         </p:nvSpPr>
         <p:spPr>
           <a:xfrm>
-            <a:off x="457200" y="2926080"/>
-            <a:ext cx="4114800" cy="2011680"/>
+            <a:off x="0" y="0"/>
+            <a:ext cx="12191695" cy="137160"/>
           </a:xfrm>
           <a:prstGeom prst="rect">
             <a:avLst/>
           </a:prstGeom>
           <a:solidFill>
-            <a:srgbClr val="DBEAFE"/>
+            <a:srgbClr val="0066CC"/>
           </a:solidFill>
-          <a:ln w="25400">
-            <a:solidFill>
-              <a:srgbClr val="2563EB"/>
-            </a:solidFill>
+          <a:ln>
+            <a:noFill/>
           </a:ln>
         </p:spPr>
         <p:style>
@@ -8292,95 +5928,23 @@
           </a:fontRef>
         </p:style>
         <p:txBody>
-          <a:bodyPr rtlCol="0" anchor="ctr" wrap="square" lIns="182880" tIns="137160"/>
-          <a:lstStyle/>
-          <a:p>
-            <a:pPr algn="ctr">
-              <a:defRPr sz="1800">
-                <a:solidFill>
-                  <a:srgbClr val="1F2937"/>
-                </a:solidFill>
-                <a:latin typeface="Courier New"/>
-              </a:defRPr>
-            </a:pPr>
-            <a:r>
-              <a:t>word = "Python"</a:t>
-            </a:r>
-          </a:p>
-          <a:p>
-            <a:pPr>
-              <a:defRPr sz="1800">
-                <a:solidFill>
-                  <a:srgbClr val="1F2937"/>
-                </a:solidFill>
-                <a:latin typeface="Courier New"/>
-              </a:defRPr>
-            </a:pPr>
-            <a:r>
-              <a:t>for letter in word:</a:t>
-            </a:r>
-          </a:p>
-          <a:p>
-            <a:pPr>
-              <a:defRPr sz="1800">
-                <a:solidFill>
-                  <a:srgbClr val="1F2937"/>
-                </a:solidFill>
-                <a:latin typeface="Courier New"/>
-              </a:defRPr>
-            </a:pPr>
-            <a:r>
-              <a:t>    print(letter)</a:t>
-            </a:r>
-          </a:p>
-          <a:p>
-            <a:pPr>
-              <a:defRPr sz="1800">
-                <a:solidFill>
-                  <a:srgbClr val="1F2937"/>
-                </a:solidFill>
-                <a:latin typeface="Courier New"/>
-              </a:defRPr>
-            </a:pPr>
-          </a:p>
-          <a:p>
-            <a:pPr>
-              <a:defRPr sz="1800">
-                <a:solidFill>
-                  <a:srgbClr val="1F2937"/>
-                </a:solidFill>
-                <a:latin typeface="Courier New"/>
-              </a:defRPr>
-            </a:pPr>
-            <a:r>
-              <a:t># Output:</a:t>
-            </a:r>
-          </a:p>
-          <a:p>
-            <a:pPr>
-              <a:defRPr sz="1800">
-                <a:solidFill>
-                  <a:srgbClr val="1F2937"/>
-                </a:solidFill>
-                <a:latin typeface="Courier New"/>
-              </a:defRPr>
-            </a:pPr>
-            <a:r>
-              <a:t># P y t h o n</a:t>
-            </a:r>
-          </a:p>
-        </p:txBody>
-      </p:sp>
-      <p:sp>
-        <p:nvSpPr>
-          <p:cNvPr id="7" name="TextBox 6"/>
+          <a:bodyPr rtlCol="0" anchor="ctr"/>
+          <a:lstStyle/>
+          <a:p>
+            <a:pPr algn="ctr"/>
+          </a:p>
+        </p:txBody>
+      </p:sp>
+      <p:sp>
+        <p:nvSpPr>
+          <p:cNvPr id="4" name="TextBox 3"/>
           <p:cNvSpPr txBox="1"/>
           <p:nvPr/>
         </p:nvSpPr>
         <p:spPr>
           <a:xfrm>
-            <a:off x="5029200" y="2560320"/>
-            <a:ext cx="3657600" cy="365760"/>
+            <a:off x="457200" y="365760"/>
+            <a:ext cx="10972800" cy="731520"/>
           </a:xfrm>
           <a:prstGeom prst="rect">
             <a:avLst/>
@@ -8394,39 +5958,37 @@
           <a:lstStyle/>
           <a:p>
             <a:pPr>
-              <a:defRPr sz="2200" b="1">
-                <a:solidFill>
-                  <a:srgbClr val="1F2937"/>
-                </a:solidFill>
-              </a:defRPr>
-            </a:pPr>
-            <a:r>
-              <a:t>Counting Characters:</a:t>
-            </a:r>
-          </a:p>
-        </p:txBody>
-      </p:sp>
-      <p:sp>
-        <p:nvSpPr>
-          <p:cNvPr id="8" name="Rectangle 7"/>
+              <a:defRPr sz="4000" b="1">
+                <a:solidFill>
+                  <a:srgbClr val="003366"/>
+                </a:solidFill>
+              </a:defRPr>
+            </a:pPr>
+            <a:r>
+              <a:t>For Loops: Iterate Through Items 🔁</a:t>
+            </a:r>
+          </a:p>
+        </p:txBody>
+      </p:sp>
+      <p:sp>
+        <p:nvSpPr>
+          <p:cNvPr id="5" name="Rectangle 4"/>
           <p:cNvSpPr/>
           <p:nvPr/>
         </p:nvSpPr>
         <p:spPr>
           <a:xfrm>
-            <a:off x="5029200" y="2926080"/>
-            <a:ext cx="3657600" cy="2011680"/>
+            <a:off x="457200" y="1005840"/>
+            <a:ext cx="1828800" cy="45720"/>
           </a:xfrm>
           <a:prstGeom prst="rect">
             <a:avLst/>
           </a:prstGeom>
           <a:solidFill>
-            <a:srgbClr val="DBEAFE"/>
+            <a:srgbClr val="0066CC"/>
           </a:solidFill>
-          <a:ln w="25400">
-            <a:solidFill>
-              <a:srgbClr val="2563EB"/>
-            </a:solidFill>
+          <a:ln>
+            <a:noFill/>
           </a:ln>
         </p:spPr>
         <p:style>
@@ -8444,95 +6006,23 @@
           </a:fontRef>
         </p:style>
         <p:txBody>
-          <a:bodyPr rtlCol="0" anchor="ctr" wrap="square" lIns="182880" tIns="137160"/>
-          <a:lstStyle/>
-          <a:p>
-            <a:pPr algn="ctr">
-              <a:defRPr sz="1800">
-                <a:solidFill>
-                  <a:srgbClr val="1F2937"/>
-                </a:solidFill>
-                <a:latin typeface="Courier New"/>
-              </a:defRPr>
-            </a:pPr>
-            <a:r>
-              <a:t>count = 0</a:t>
-            </a:r>
-          </a:p>
-          <a:p>
-            <a:pPr>
-              <a:defRPr sz="1800">
-                <a:solidFill>
-                  <a:srgbClr val="1F2937"/>
-                </a:solidFill>
-                <a:latin typeface="Courier New"/>
-              </a:defRPr>
-            </a:pPr>
-            <a:r>
-              <a:t>for char in "Hello":</a:t>
-            </a:r>
-          </a:p>
-          <a:p>
-            <a:pPr>
-              <a:defRPr sz="1800">
-                <a:solidFill>
-                  <a:srgbClr val="1F2937"/>
-                </a:solidFill>
-                <a:latin typeface="Courier New"/>
-              </a:defRPr>
-            </a:pPr>
-            <a:r>
-              <a:t>    count += 1</a:t>
-            </a:r>
-          </a:p>
-          <a:p>
-            <a:pPr>
-              <a:defRPr sz="1800">
-                <a:solidFill>
-                  <a:srgbClr val="1F2937"/>
-                </a:solidFill>
-                <a:latin typeface="Courier New"/>
-              </a:defRPr>
-            </a:pPr>
-            <a:r>
-              <a:t>print(count)</a:t>
-            </a:r>
-          </a:p>
-          <a:p>
-            <a:pPr>
-              <a:defRPr sz="1800">
-                <a:solidFill>
-                  <a:srgbClr val="1F2937"/>
-                </a:solidFill>
-                <a:latin typeface="Courier New"/>
-              </a:defRPr>
-            </a:pPr>
-          </a:p>
-          <a:p>
-            <a:pPr>
-              <a:defRPr sz="1800">
-                <a:solidFill>
-                  <a:srgbClr val="1F2937"/>
-                </a:solidFill>
-                <a:latin typeface="Courier New"/>
-              </a:defRPr>
-            </a:pPr>
-            <a:r>
-              <a:t># Output: 5</a:t>
-            </a:r>
-          </a:p>
-        </p:txBody>
-      </p:sp>
-      <p:sp>
-        <p:nvSpPr>
-          <p:cNvPr id="9" name="TextBox 8"/>
+          <a:bodyPr rtlCol="0" anchor="ctr"/>
+          <a:lstStyle/>
+          <a:p>
+            <a:pPr algn="ctr"/>
+          </a:p>
+        </p:txBody>
+      </p:sp>
+      <p:sp>
+        <p:nvSpPr>
+          <p:cNvPr id="6" name="TextBox 5"/>
           <p:cNvSpPr txBox="1"/>
           <p:nvPr/>
         </p:nvSpPr>
         <p:spPr>
           <a:xfrm>
-            <a:off x="457200" y="5303520"/>
-            <a:ext cx="8229600" cy="731520"/>
+            <a:off x="640080" y="1371600"/>
+            <a:ext cx="10789920" cy="4572000"/>
           </a:xfrm>
           <a:prstGeom prst="rect">
             <a:avLst/>
@@ -8540,20 +6030,83 @@
           <a:noFill/>
         </p:spPr>
         <p:txBody>
-          <a:bodyPr wrap="none">
+          <a:bodyPr wrap="square">
             <a:spAutoFit/>
           </a:bodyPr>
           <a:lstStyle/>
           <a:p>
             <a:pPr>
+              <a:spcAft>
+                <a:spcPts val="800"/>
+              </a:spcAft>
               <a:defRPr sz="2000" b="1">
                 <a:solidFill>
-                  <a:srgbClr val="2563EB"/>
-                </a:solidFill>
-              </a:defRPr>
-            </a:pPr>
-            <a:r>
-              <a:t>💡 The loop variable (e.g., 'letter', 'char') takes each value in sequence</a:t>
+                  <a:srgbClr val="333333"/>
+                </a:solidFill>
+              </a:defRPr>
+            </a:pPr>
+            <a:r>
+              <a:t>For loops iterate through a sequence of items</a:t>
+            </a:r>
+          </a:p>
+          <a:p>
+            <a:pPr>
+              <a:spcAft>
+                <a:spcPts val="800"/>
+              </a:spcAft>
+              <a:defRPr sz="2000" b="1">
+                <a:solidFill>
+                  <a:srgbClr val="333333"/>
+                </a:solidFill>
+              </a:defRPr>
+            </a:pPr>
+            <a:r>
+              <a:t>Syntax:</a:t>
+            </a:r>
+          </a:p>
+          <a:p>
+            <a:pPr>
+              <a:spcAft>
+                <a:spcPts val="800"/>
+              </a:spcAft>
+              <a:defRPr sz="2000" b="1">
+                <a:solidFill>
+                  <a:srgbClr val="333333"/>
+                </a:solidFill>
+              </a:defRPr>
+            </a:pPr>
+            <a:r>
+              <a:t>Example: Loop Through a String</a:t>
+            </a:r>
+          </a:p>
+          <a:p>
+            <a:pPr>
+              <a:spcAft>
+                <a:spcPts val="800"/>
+              </a:spcAft>
+              <a:defRPr sz="2000" b="1">
+                <a:solidFill>
+                  <a:srgbClr val="333333"/>
+                </a:solidFill>
+              </a:defRPr>
+            </a:pPr>
+            <a:r>
+              <a:t>Output:</a:t>
+            </a:r>
+          </a:p>
+          <a:p>
+            <a:pPr>
+              <a:spcAft>
+                <a:spcPts val="800"/>
+              </a:spcAft>
+              <a:defRPr sz="2000" b="1">
+                <a:solidFill>
+                  <a:srgbClr val="333333"/>
+                </a:solidFill>
+              </a:defRPr>
+            </a:pPr>
+            <a:r>
+              <a:t>Each iteration:letter gets the next character from the string</a:t>
             </a:r>
           </a:p>
         </p:txBody>
@@ -8569,14 +6122,6 @@
 <file path=ppt/slides/slide7.xml><?xml version="1.0" encoding="utf-8"?>
 <p:sld xmlns:a="http://schemas.openxmlformats.org/drawingml/2006/main" xmlns:p="http://schemas.openxmlformats.org/presentationml/2006/main" xmlns:r="http://schemas.openxmlformats.org/officeDocument/2006/relationships">
   <p:cSld>
-    <p:bg>
-      <p:bgPr>
-        <a:solidFill>
-          <a:srgbClr val="FFFFFF"/>
-        </a:solidFill>
-        <a:effectLst/>
-      </p:bgPr>
-    </p:bg>
     <p:spTree>
       <p:nvGrpSpPr>
         <p:cNvPr id="1" name=""/>
@@ -8586,55 +6131,20 @@
       <p:grpSpPr/>
       <p:sp>
         <p:nvSpPr>
-          <p:cNvPr id="2" name="TextBox 1"/>
-          <p:cNvSpPr txBox="1"/>
-          <p:nvPr/>
-        </p:nvSpPr>
-        <p:spPr>
-          <a:xfrm>
-            <a:off x="457200" y="457200"/>
-            <a:ext cx="8229600" cy="731520"/>
-          </a:xfrm>
-          <a:prstGeom prst="rect">
-            <a:avLst/>
-          </a:prstGeom>
-          <a:noFill/>
-        </p:spPr>
-        <p:txBody>
-          <a:bodyPr wrap="none">
-            <a:spAutoFit/>
-          </a:bodyPr>
-          <a:lstStyle/>
-          <a:p>
-            <a:pPr>
-              <a:defRPr sz="4000" b="1">
-                <a:solidFill>
-                  <a:srgbClr val="1F2937"/>
-                </a:solidFill>
-              </a:defRPr>
-            </a:pPr>
-            <a:r>
-              <a:t>The range() Function</a:t>
-            </a:r>
-          </a:p>
-        </p:txBody>
-      </p:sp>
-      <p:sp>
-        <p:nvSpPr>
-          <p:cNvPr id="3" name="Rectangle 2"/>
+          <p:cNvPr id="2" name="Rectangle 1"/>
           <p:cNvSpPr/>
           <p:nvPr/>
         </p:nvSpPr>
         <p:spPr>
           <a:xfrm>
-            <a:off x="457200" y="1280160"/>
-            <a:ext cx="1371600" cy="73152"/>
+            <a:off x="0" y="0"/>
+            <a:ext cx="12191695" cy="6858000"/>
           </a:xfrm>
           <a:prstGeom prst="rect">
             <a:avLst/>
           </a:prstGeom>
           <a:solidFill>
-            <a:srgbClr val="2563EB"/>
+            <a:srgbClr val="FFFFFF"/>
           </a:solidFill>
           <a:ln>
             <a:noFill/>
@@ -8664,95 +6174,23 @@
       </p:sp>
       <p:sp>
         <p:nvSpPr>
-          <p:cNvPr id="4" name="TextBox 3"/>
-          <p:cNvSpPr txBox="1"/>
-          <p:nvPr/>
-        </p:nvSpPr>
-        <p:spPr>
-          <a:xfrm>
-            <a:off x="457200" y="1828800"/>
-            <a:ext cx="8229600" cy="457200"/>
-          </a:xfrm>
-          <a:prstGeom prst="rect">
-            <a:avLst/>
-          </a:prstGeom>
-          <a:noFill/>
-        </p:spPr>
-        <p:txBody>
-          <a:bodyPr wrap="none">
-            <a:spAutoFit/>
-          </a:bodyPr>
-          <a:lstStyle/>
-          <a:p>
-            <a:pPr>
-              <a:defRPr sz="2400">
-                <a:solidFill>
-                  <a:srgbClr val="4B5563"/>
-                </a:solidFill>
-              </a:defRPr>
-            </a:pPr>
-            <a:r>
-              <a:t>range() generates sequences of numbers - perfect for loops!</a:t>
-            </a:r>
-          </a:p>
-        </p:txBody>
-      </p:sp>
-      <p:sp>
-        <p:nvSpPr>
-          <p:cNvPr id="5" name="TextBox 4"/>
-          <p:cNvSpPr txBox="1"/>
-          <p:nvPr/>
-        </p:nvSpPr>
-        <p:spPr>
-          <a:xfrm>
-            <a:off x="457200" y="2560320"/>
-            <a:ext cx="2743200" cy="365760"/>
-          </a:xfrm>
-          <a:prstGeom prst="rect">
-            <a:avLst/>
-          </a:prstGeom>
-          <a:noFill/>
-        </p:spPr>
-        <p:txBody>
-          <a:bodyPr wrap="none">
-            <a:spAutoFit/>
-          </a:bodyPr>
-          <a:lstStyle/>
-          <a:p>
-            <a:pPr>
-              <a:defRPr sz="2000" b="1">
-                <a:solidFill>
-                  <a:srgbClr val="1F2937"/>
-                </a:solidFill>
-              </a:defRPr>
-            </a:pPr>
-            <a:r>
-              <a:t>range(stop):</a:t>
-            </a:r>
-          </a:p>
-        </p:txBody>
-      </p:sp>
-      <p:sp>
-        <p:nvSpPr>
-          <p:cNvPr id="6" name="Rectangle 5"/>
+          <p:cNvPr id="3" name="Rectangle 2"/>
           <p:cNvSpPr/>
           <p:nvPr/>
         </p:nvSpPr>
         <p:spPr>
           <a:xfrm>
-            <a:off x="457200" y="2926080"/>
-            <a:ext cx="2743200" cy="1645920"/>
+            <a:off x="0" y="0"/>
+            <a:ext cx="12191695" cy="137160"/>
           </a:xfrm>
           <a:prstGeom prst="rect">
             <a:avLst/>
           </a:prstGeom>
           <a:solidFill>
-            <a:srgbClr val="DBEAFE"/>
+            <a:srgbClr val="0066CC"/>
           </a:solidFill>
-          <a:ln w="25400">
-            <a:solidFill>
-              <a:srgbClr val="2563EB"/>
-            </a:solidFill>
+          <a:ln>
+            <a:noFill/>
           </a:ln>
         </p:spPr>
         <p:style>
@@ -8770,82 +6208,23 @@
           </a:fontRef>
         </p:style>
         <p:txBody>
-          <a:bodyPr rtlCol="0" anchor="ctr" wrap="square" lIns="182880" tIns="137160"/>
-          <a:lstStyle/>
-          <a:p>
-            <a:pPr algn="ctr">
-              <a:defRPr sz="1800">
-                <a:solidFill>
-                  <a:srgbClr val="1F2937"/>
-                </a:solidFill>
-                <a:latin typeface="Courier New"/>
-              </a:defRPr>
-            </a:pPr>
-            <a:r>
-              <a:t>for i in range(5):</a:t>
-            </a:r>
-          </a:p>
-          <a:p>
-            <a:pPr>
-              <a:defRPr sz="1800">
-                <a:solidFill>
-                  <a:srgbClr val="1F2937"/>
-                </a:solidFill>
-                <a:latin typeface="Courier New"/>
-              </a:defRPr>
-            </a:pPr>
-            <a:r>
-              <a:t>    print(i)</a:t>
-            </a:r>
-          </a:p>
-          <a:p>
-            <a:pPr>
-              <a:defRPr sz="1800">
-                <a:solidFill>
-                  <a:srgbClr val="1F2937"/>
-                </a:solidFill>
-                <a:latin typeface="Courier New"/>
-              </a:defRPr>
-            </a:pPr>
-          </a:p>
-          <a:p>
-            <a:pPr>
-              <a:defRPr sz="1800">
-                <a:solidFill>
-                  <a:srgbClr val="1F2937"/>
-                </a:solidFill>
-                <a:latin typeface="Courier New"/>
-              </a:defRPr>
-            </a:pPr>
-            <a:r>
-              <a:t># Output:</a:t>
-            </a:r>
-          </a:p>
-          <a:p>
-            <a:pPr>
-              <a:defRPr sz="1800">
-                <a:solidFill>
-                  <a:srgbClr val="1F2937"/>
-                </a:solidFill>
-                <a:latin typeface="Courier New"/>
-              </a:defRPr>
-            </a:pPr>
-            <a:r>
-              <a:t># 0 1 2 3 4</a:t>
-            </a:r>
-          </a:p>
-        </p:txBody>
-      </p:sp>
-      <p:sp>
-        <p:nvSpPr>
-          <p:cNvPr id="7" name="TextBox 6"/>
+          <a:bodyPr rtlCol="0" anchor="ctr"/>
+          <a:lstStyle/>
+          <a:p>
+            <a:pPr algn="ctr"/>
+          </a:p>
+        </p:txBody>
+      </p:sp>
+      <p:sp>
+        <p:nvSpPr>
+          <p:cNvPr id="4" name="TextBox 3"/>
           <p:cNvSpPr txBox="1"/>
           <p:nvPr/>
         </p:nvSpPr>
         <p:spPr>
           <a:xfrm>
-            <a:off x="3474720" y="2560320"/>
-            <a:ext cx="2743200" cy="365760"/>
+            <a:off x="457200" y="365760"/>
+            <a:ext cx="10972800" cy="731520"/>
           </a:xfrm>
           <a:prstGeom prst="rect">
             <a:avLst/>
@@ -8859,39 +6238,37 @@
           <a:lstStyle/>
           <a:p>
             <a:pPr>
-              <a:defRPr sz="2000" b="1">
-                <a:solidFill>
-                  <a:srgbClr val="1F2937"/>
-                </a:solidFill>
-              </a:defRPr>
-            </a:pPr>
-            <a:r>
-              <a:t>range(start, stop):</a:t>
-            </a:r>
-          </a:p>
-        </p:txBody>
-      </p:sp>
-      <p:sp>
-        <p:nvSpPr>
-          <p:cNvPr id="8" name="Rectangle 7"/>
+              <a:defRPr sz="4000" b="1">
+                <a:solidFill>
+                  <a:srgbClr val="003366"/>
+                </a:solidFill>
+              </a:defRPr>
+            </a:pPr>
+            <a:r>
+              <a:t>The range() Function 📊</a:t>
+            </a:r>
+          </a:p>
+        </p:txBody>
+      </p:sp>
+      <p:sp>
+        <p:nvSpPr>
+          <p:cNvPr id="5" name="Rectangle 4"/>
           <p:cNvSpPr/>
           <p:nvPr/>
         </p:nvSpPr>
         <p:spPr>
           <a:xfrm>
-            <a:off x="3474720" y="2926080"/>
-            <a:ext cx="2743200" cy="1645920"/>
+            <a:off x="457200" y="1005840"/>
+            <a:ext cx="1828800" cy="45720"/>
           </a:xfrm>
           <a:prstGeom prst="rect">
             <a:avLst/>
           </a:prstGeom>
           <a:solidFill>
-            <a:srgbClr val="DBEAFE"/>
+            <a:srgbClr val="0066CC"/>
           </a:solidFill>
-          <a:ln w="25400">
-            <a:solidFill>
-              <a:srgbClr val="2563EB"/>
-            </a:solidFill>
+          <a:ln>
+            <a:noFill/>
           </a:ln>
         </p:spPr>
         <p:style>
@@ -8909,82 +6286,23 @@
           </a:fontRef>
         </p:style>
         <p:txBody>
-          <a:bodyPr rtlCol="0" anchor="ctr" wrap="square" lIns="182880" tIns="137160"/>
-          <a:lstStyle/>
-          <a:p>
-            <a:pPr algn="ctr">
-              <a:defRPr sz="1800">
-                <a:solidFill>
-                  <a:srgbClr val="1F2937"/>
-                </a:solidFill>
-                <a:latin typeface="Courier New"/>
-              </a:defRPr>
-            </a:pPr>
-            <a:r>
-              <a:t>for i in range(1, 6):</a:t>
-            </a:r>
-          </a:p>
-          <a:p>
-            <a:pPr>
-              <a:defRPr sz="1800">
-                <a:solidFill>
-                  <a:srgbClr val="1F2937"/>
-                </a:solidFill>
-                <a:latin typeface="Courier New"/>
-              </a:defRPr>
-            </a:pPr>
-            <a:r>
-              <a:t>    print(i)</a:t>
-            </a:r>
-          </a:p>
-          <a:p>
-            <a:pPr>
-              <a:defRPr sz="1800">
-                <a:solidFill>
-                  <a:srgbClr val="1F2937"/>
-                </a:solidFill>
-                <a:latin typeface="Courier New"/>
-              </a:defRPr>
-            </a:pPr>
-          </a:p>
-          <a:p>
-            <a:pPr>
-              <a:defRPr sz="1800">
-                <a:solidFill>
-                  <a:srgbClr val="1F2937"/>
-                </a:solidFill>
-                <a:latin typeface="Courier New"/>
-              </a:defRPr>
-            </a:pPr>
-            <a:r>
-              <a:t># Output:</a:t>
-            </a:r>
-          </a:p>
-          <a:p>
-            <a:pPr>
-              <a:defRPr sz="1800">
-                <a:solidFill>
-                  <a:srgbClr val="1F2937"/>
-                </a:solidFill>
-                <a:latin typeface="Courier New"/>
-              </a:defRPr>
-            </a:pPr>
-            <a:r>
-              <a:t># 1 2 3 4 5</a:t>
-            </a:r>
-          </a:p>
-        </p:txBody>
-      </p:sp>
-      <p:sp>
-        <p:nvSpPr>
-          <p:cNvPr id="9" name="TextBox 8"/>
+          <a:bodyPr rtlCol="0" anchor="ctr"/>
+          <a:lstStyle/>
+          <a:p>
+            <a:pPr algn="ctr"/>
+          </a:p>
+        </p:txBody>
+      </p:sp>
+      <p:sp>
+        <p:nvSpPr>
+          <p:cNvPr id="6" name="TextBox 5"/>
           <p:cNvSpPr txBox="1"/>
           <p:nvPr/>
         </p:nvSpPr>
         <p:spPr>
           <a:xfrm>
-            <a:off x="6492240" y="2560320"/>
-            <a:ext cx="2286000" cy="365760"/>
+            <a:off x="640080" y="1371600"/>
+            <a:ext cx="10789920" cy="4572000"/>
           </a:xfrm>
           <a:prstGeom prst="rect">
             <a:avLst/>
@@ -8992,178 +6310,68 @@
           <a:noFill/>
         </p:spPr>
         <p:txBody>
-          <a:bodyPr wrap="none">
+          <a:bodyPr wrap="square">
             <a:spAutoFit/>
           </a:bodyPr>
           <a:lstStyle/>
           <a:p>
             <a:pPr>
-              <a:defRPr sz="1800" b="1">
-                <a:solidFill>
-                  <a:srgbClr val="1F2937"/>
-                </a:solidFill>
-              </a:defRPr>
-            </a:pPr>
-            <a:r>
-              <a:t>range(start, stop, step):</a:t>
-            </a:r>
-          </a:p>
-        </p:txBody>
-      </p:sp>
-      <p:sp>
-        <p:nvSpPr>
-          <p:cNvPr id="10" name="Rectangle 9"/>
-          <p:cNvSpPr/>
-          <p:nvPr/>
-        </p:nvSpPr>
-        <p:spPr>
-          <a:xfrm>
-            <a:off x="6492240" y="2926080"/>
-            <a:ext cx="2194560" cy="1645920"/>
-          </a:xfrm>
-          <a:prstGeom prst="rect">
-            <a:avLst/>
-          </a:prstGeom>
-          <a:solidFill>
-            <a:srgbClr val="DBEAFE"/>
-          </a:solidFill>
-          <a:ln w="25400">
-            <a:solidFill>
-              <a:srgbClr val="2563EB"/>
-            </a:solidFill>
-          </a:ln>
-        </p:spPr>
-        <p:style>
-          <a:lnRef idx="1">
-            <a:schemeClr val="accent1"/>
-          </a:lnRef>
-          <a:fillRef idx="3">
-            <a:schemeClr val="accent1"/>
-          </a:fillRef>
-          <a:effectRef idx="2">
-            <a:schemeClr val="accent1"/>
-          </a:effectRef>
-          <a:fontRef idx="minor">
-            <a:schemeClr val="lt1"/>
-          </a:fontRef>
-        </p:style>
-        <p:txBody>
-          <a:bodyPr rtlCol="0" anchor="ctr" wrap="square" lIns="182880" tIns="137160"/>
-          <a:lstStyle/>
-          <a:p>
-            <a:pPr algn="ctr">
-              <a:defRPr sz="1800">
-                <a:solidFill>
-                  <a:srgbClr val="1F2937"/>
-                </a:solidFill>
-                <a:latin typeface="Courier New"/>
-              </a:defRPr>
-            </a:pPr>
-            <a:r>
-              <a:t>for i in range(0, 11, 2):</a:t>
+              <a:spcAft>
+                <a:spcPts val="800"/>
+              </a:spcAft>
+              <a:defRPr sz="2000" b="1">
+                <a:solidFill>
+                  <a:srgbClr val="333333"/>
+                </a:solidFill>
+              </a:defRPr>
+            </a:pPr>
+            <a:r>
+              <a:t>range() generates a sequence of numbers for loops</a:t>
             </a:r>
           </a:p>
           <a:p>
             <a:pPr>
-              <a:defRPr sz="1800">
-                <a:solidFill>
-                  <a:srgbClr val="1F2937"/>
-                </a:solidFill>
-                <a:latin typeface="Courier New"/>
-              </a:defRPr>
-            </a:pPr>
-            <a:r>
-              <a:t>    print(i)</a:t>
+              <a:spcAft>
+                <a:spcPts val="800"/>
+              </a:spcAft>
+              <a:defRPr sz="2000" b="1">
+                <a:solidFill>
+                  <a:srgbClr val="333333"/>
+                </a:solidFill>
+              </a:defRPr>
+            </a:pPr>
+            <a:r>
+              <a:t>1. range(stop) - Single Parameter</a:t>
             </a:r>
           </a:p>
           <a:p>
             <a:pPr>
-              <a:defRPr sz="1800">
-                <a:solidFill>
-                  <a:srgbClr val="1F2937"/>
-                </a:solidFill>
-                <a:latin typeface="Courier New"/>
-              </a:defRPr>
-            </a:pPr>
+              <a:spcAft>
+                <a:spcPts val="800"/>
+              </a:spcAft>
+              <a:defRPr sz="2000" b="1">
+                <a:solidFill>
+                  <a:srgbClr val="333333"/>
+                </a:solidFill>
+              </a:defRPr>
+            </a:pPr>
+            <a:r>
+              <a:t>2. range(start, stop) - Two Parameters</a:t>
+            </a:r>
           </a:p>
           <a:p>
             <a:pPr>
-              <a:defRPr sz="1800">
-                <a:solidFill>
-                  <a:srgbClr val="1F2937"/>
-                </a:solidFill>
-                <a:latin typeface="Courier New"/>
-              </a:defRPr>
-            </a:pPr>
-            <a:r>
-              <a:t># 0 2 4</a:t>
-            </a:r>
-          </a:p>
-          <a:p>
-            <a:pPr>
-              <a:defRPr sz="1800">
-                <a:solidFill>
-                  <a:srgbClr val="1F2937"/>
-                </a:solidFill>
-                <a:latin typeface="Courier New"/>
-              </a:defRPr>
-            </a:pPr>
-            <a:r>
-              <a:t># 6 8 10</a:t>
-            </a:r>
-          </a:p>
-        </p:txBody>
-      </p:sp>
-      <p:sp>
-        <p:nvSpPr>
-          <p:cNvPr id="11" name="Rectangle 10"/>
-          <p:cNvSpPr/>
-          <p:nvPr/>
-        </p:nvSpPr>
-        <p:spPr>
-          <a:xfrm>
-            <a:off x="914400" y="5029200"/>
-            <a:ext cx="7315200" cy="914400"/>
-          </a:xfrm>
-          <a:prstGeom prst="rect">
-            <a:avLst/>
-          </a:prstGeom>
-          <a:solidFill>
-            <a:srgbClr val="DBEAFE"/>
-          </a:solidFill>
-          <a:ln w="25400">
-            <a:solidFill>
-              <a:srgbClr val="2563EB"/>
-            </a:solidFill>
-          </a:ln>
-        </p:spPr>
-        <p:style>
-          <a:lnRef idx="1">
-            <a:schemeClr val="accent1"/>
-          </a:lnRef>
-          <a:fillRef idx="3">
-            <a:schemeClr val="accent1"/>
-          </a:fillRef>
-          <a:effectRef idx="2">
-            <a:schemeClr val="accent1"/>
-          </a:effectRef>
-          <a:fontRef idx="minor">
-            <a:schemeClr val="lt1"/>
-          </a:fontRef>
-        </p:style>
-        <p:txBody>
-          <a:bodyPr rtlCol="0" anchor="ctr"/>
-          <a:lstStyle/>
-          <a:p>
-            <a:pPr algn="ctr">
-              <a:defRPr sz="2200" b="1">
-                <a:solidFill>
-                  <a:srgbClr val="2563EB"/>
-                </a:solidFill>
-              </a:defRPr>
-            </a:pPr>
-            <a:r>
-              <a:t>⚠️ Remember: range() stops BEFORE the stop value!</a:t>
+              <a:spcAft>
+                <a:spcPts val="800"/>
+              </a:spcAft>
+              <a:defRPr sz="2000" b="1">
+                <a:solidFill>
+                  <a:srgbClr val="333333"/>
+                </a:solidFill>
+              </a:defRPr>
+            </a:pPr>
+            <a:r>
+              <a:t>3. range(start, stop, step) - Three Parameters</a:t>
             </a:r>
           </a:p>
         </p:txBody>
@@ -9179,14 +6387,6 @@
 <file path=ppt/slides/slide8.xml><?xml version="1.0" encoding="utf-8"?>
 <p:sld xmlns:a="http://schemas.openxmlformats.org/drawingml/2006/main" xmlns:p="http://schemas.openxmlformats.org/presentationml/2006/main" xmlns:r="http://schemas.openxmlformats.org/officeDocument/2006/relationships">
   <p:cSld>
-    <p:bg>
-      <p:bgPr>
-        <a:solidFill>
-          <a:srgbClr val="FFFFFF"/>
-        </a:solidFill>
-        <a:effectLst/>
-      </p:bgPr>
-    </p:bg>
     <p:spTree>
       <p:nvGrpSpPr>
         <p:cNvPr id="1" name=""/>
@@ -9196,55 +6396,20 @@
       <p:grpSpPr/>
       <p:sp>
         <p:nvSpPr>
-          <p:cNvPr id="2" name="TextBox 1"/>
-          <p:cNvSpPr txBox="1"/>
-          <p:nvPr/>
-        </p:nvSpPr>
-        <p:spPr>
-          <a:xfrm>
-            <a:off x="457200" y="457200"/>
-            <a:ext cx="8229600" cy="731520"/>
-          </a:xfrm>
-          <a:prstGeom prst="rect">
-            <a:avLst/>
-          </a:prstGeom>
-          <a:noFill/>
-        </p:spPr>
-        <p:txBody>
-          <a:bodyPr wrap="none">
-            <a:spAutoFit/>
-          </a:bodyPr>
-          <a:lstStyle/>
-          <a:p>
-            <a:pPr>
-              <a:defRPr sz="4000" b="1">
-                <a:solidFill>
-                  <a:srgbClr val="1F2937"/>
-                </a:solidFill>
-              </a:defRPr>
-            </a:pPr>
-            <a:r>
-              <a:t>More range() Patterns</a:t>
-            </a:r>
-          </a:p>
-        </p:txBody>
-      </p:sp>
-      <p:sp>
-        <p:nvSpPr>
-          <p:cNvPr id="3" name="Rectangle 2"/>
+          <p:cNvPr id="2" name="Rectangle 1"/>
           <p:cNvSpPr/>
           <p:nvPr/>
         </p:nvSpPr>
         <p:spPr>
           <a:xfrm>
-            <a:off x="457200" y="1280160"/>
-            <a:ext cx="1371600" cy="73152"/>
+            <a:off x="0" y="0"/>
+            <a:ext cx="12191695" cy="6858000"/>
           </a:xfrm>
           <a:prstGeom prst="rect">
             <a:avLst/>
           </a:prstGeom>
           <a:solidFill>
-            <a:srgbClr val="2563EB"/>
+            <a:srgbClr val="FFFFFF"/>
           </a:solidFill>
           <a:ln>
             <a:noFill/>
@@ -9274,60 +6439,23 @@
       </p:sp>
       <p:sp>
         <p:nvSpPr>
-          <p:cNvPr id="4" name="TextBox 3"/>
-          <p:cNvSpPr txBox="1"/>
-          <p:nvPr/>
-        </p:nvSpPr>
-        <p:spPr>
-          <a:xfrm>
-            <a:off x="457200" y="1828800"/>
-            <a:ext cx="4114800" cy="365760"/>
-          </a:xfrm>
-          <a:prstGeom prst="rect">
-            <a:avLst/>
-          </a:prstGeom>
-          <a:noFill/>
-        </p:spPr>
-        <p:txBody>
-          <a:bodyPr wrap="none">
-            <a:spAutoFit/>
-          </a:bodyPr>
-          <a:lstStyle/>
-          <a:p>
-            <a:pPr>
-              <a:defRPr sz="2200" b="1">
-                <a:solidFill>
-                  <a:srgbClr val="1F2937"/>
-                </a:solidFill>
-              </a:defRPr>
-            </a:pPr>
-            <a:r>
-              <a:t>Count by 10s:</a:t>
-            </a:r>
-          </a:p>
-        </p:txBody>
-      </p:sp>
-      <p:sp>
-        <p:nvSpPr>
-          <p:cNvPr id="5" name="Rectangle 4"/>
+          <p:cNvPr id="3" name="Rectangle 2"/>
           <p:cNvSpPr/>
           <p:nvPr/>
         </p:nvSpPr>
         <p:spPr>
           <a:xfrm>
-            <a:off x="457200" y="2194560"/>
-            <a:ext cx="4114800" cy="1645920"/>
+            <a:off x="0" y="0"/>
+            <a:ext cx="12191695" cy="137160"/>
           </a:xfrm>
           <a:prstGeom prst="rect">
             <a:avLst/>
           </a:prstGeom>
           <a:solidFill>
-            <a:srgbClr val="DBEAFE"/>
+            <a:srgbClr val="0066CC"/>
           </a:solidFill>
-          <a:ln w="25400">
-            <a:solidFill>
-              <a:srgbClr val="2563EB"/>
-            </a:solidFill>
+          <a:ln>
+            <a:noFill/>
           </a:ln>
         </p:spPr>
         <p:style>
@@ -9345,69 +6473,23 @@
           </a:fontRef>
         </p:style>
         <p:txBody>
-          <a:bodyPr rtlCol="0" anchor="ctr" wrap="square" lIns="182880" tIns="137160"/>
-          <a:lstStyle/>
-          <a:p>
-            <a:pPr algn="ctr">
-              <a:defRPr sz="1800">
-                <a:solidFill>
-                  <a:srgbClr val="1F2937"/>
-                </a:solidFill>
-                <a:latin typeface="Courier New"/>
-              </a:defRPr>
-            </a:pPr>
-            <a:r>
-              <a:t>for i in range(0, 101, 10):</a:t>
-            </a:r>
-          </a:p>
-          <a:p>
-            <a:pPr>
-              <a:defRPr sz="1800">
-                <a:solidFill>
-                  <a:srgbClr val="1F2937"/>
-                </a:solidFill>
-                <a:latin typeface="Courier New"/>
-              </a:defRPr>
-            </a:pPr>
-            <a:r>
-              <a:t>    print(i)</a:t>
-            </a:r>
-          </a:p>
-          <a:p>
-            <a:pPr>
-              <a:defRPr sz="1800">
-                <a:solidFill>
-                  <a:srgbClr val="1F2937"/>
-                </a:solidFill>
-                <a:latin typeface="Courier New"/>
-              </a:defRPr>
-            </a:pPr>
-          </a:p>
-          <a:p>
-            <a:pPr>
-              <a:defRPr sz="1800">
-                <a:solidFill>
-                  <a:srgbClr val="1F2937"/>
-                </a:solidFill>
-                <a:latin typeface="Courier New"/>
-              </a:defRPr>
-            </a:pPr>
-            <a:r>
-              <a:t># 0 10 20 30 ... 100</a:t>
-            </a:r>
-          </a:p>
-        </p:txBody>
-      </p:sp>
-      <p:sp>
-        <p:nvSpPr>
-          <p:cNvPr id="6" name="TextBox 5"/>
+          <a:bodyPr rtlCol="0" anchor="ctr"/>
+          <a:lstStyle/>
+          <a:p>
+            <a:pPr algn="ctr"/>
+          </a:p>
+        </p:txBody>
+      </p:sp>
+      <p:sp>
+        <p:nvSpPr>
+          <p:cNvPr id="4" name="TextBox 3"/>
           <p:cNvSpPr txBox="1"/>
           <p:nvPr/>
         </p:nvSpPr>
         <p:spPr>
           <a:xfrm>
-            <a:off x="5029200" y="1828800"/>
-            <a:ext cx="3657600" cy="365760"/>
+            <a:off x="457200" y="365760"/>
+            <a:ext cx="10972800" cy="731520"/>
           </a:xfrm>
           <a:prstGeom prst="rect">
             <a:avLst/>
@@ -9421,39 +6503,37 @@
           <a:lstStyle/>
           <a:p>
             <a:pPr>
-              <a:defRPr sz="2200" b="1">
-                <a:solidFill>
-                  <a:srgbClr val="1F2937"/>
-                </a:solidFill>
-              </a:defRPr>
-            </a:pPr>
-            <a:r>
-              <a:t>Countdown:</a:t>
-            </a:r>
-          </a:p>
-        </p:txBody>
-      </p:sp>
-      <p:sp>
-        <p:nvSpPr>
-          <p:cNvPr id="7" name="Rectangle 6"/>
+              <a:defRPr sz="4000" b="1">
+                <a:solidFill>
+                  <a:srgbClr val="003366"/>
+                </a:solidFill>
+              </a:defRPr>
+            </a:pPr>
+            <a:r>
+              <a:t>range() Patterns 🎨</a:t>
+            </a:r>
+          </a:p>
+        </p:txBody>
+      </p:sp>
+      <p:sp>
+        <p:nvSpPr>
+          <p:cNvPr id="5" name="Rectangle 4"/>
           <p:cNvSpPr/>
           <p:nvPr/>
         </p:nvSpPr>
         <p:spPr>
           <a:xfrm>
-            <a:off x="5029200" y="2194560"/>
-            <a:ext cx="3657600" cy="1645920"/>
+            <a:off x="457200" y="1005840"/>
+            <a:ext cx="1828800" cy="45720"/>
           </a:xfrm>
           <a:prstGeom prst="rect">
             <a:avLst/>
           </a:prstGeom>
           <a:solidFill>
-            <a:srgbClr val="DBEAFE"/>
+            <a:srgbClr val="0066CC"/>
           </a:solidFill>
-          <a:ln w="25400">
-            <a:solidFill>
-              <a:srgbClr val="2563EB"/>
-            </a:solidFill>
+          <a:ln>
+            <a:noFill/>
           </a:ln>
         </p:spPr>
         <p:style>
@@ -9471,69 +6551,23 @@
           </a:fontRef>
         </p:style>
         <p:txBody>
-          <a:bodyPr rtlCol="0" anchor="ctr" wrap="square" lIns="182880" tIns="137160"/>
-          <a:lstStyle/>
-          <a:p>
-            <a:pPr algn="ctr">
-              <a:defRPr sz="1800">
-                <a:solidFill>
-                  <a:srgbClr val="1F2937"/>
-                </a:solidFill>
-                <a:latin typeface="Courier New"/>
-              </a:defRPr>
-            </a:pPr>
-            <a:r>
-              <a:t>for i in range(10, 0, -1):</a:t>
-            </a:r>
-          </a:p>
-          <a:p>
-            <a:pPr>
-              <a:defRPr sz="1800">
-                <a:solidFill>
-                  <a:srgbClr val="1F2937"/>
-                </a:solidFill>
-                <a:latin typeface="Courier New"/>
-              </a:defRPr>
-            </a:pPr>
-            <a:r>
-              <a:t>    print(i)</a:t>
-            </a:r>
-          </a:p>
-          <a:p>
-            <a:pPr>
-              <a:defRPr sz="1800">
-                <a:solidFill>
-                  <a:srgbClr val="1F2937"/>
-                </a:solidFill>
-                <a:latin typeface="Courier New"/>
-              </a:defRPr>
-            </a:pPr>
-          </a:p>
-          <a:p>
-            <a:pPr>
-              <a:defRPr sz="1800">
-                <a:solidFill>
-                  <a:srgbClr val="1F2937"/>
-                </a:solidFill>
-                <a:latin typeface="Courier New"/>
-              </a:defRPr>
-            </a:pPr>
-            <a:r>
-              <a:t># 10 9 8 ... 1</a:t>
-            </a:r>
-          </a:p>
-        </p:txBody>
-      </p:sp>
-      <p:sp>
-        <p:nvSpPr>
-          <p:cNvPr id="8" name="TextBox 7"/>
+          <a:bodyPr rtlCol="0" anchor="ctr"/>
+          <a:lstStyle/>
+          <a:p>
+            <a:pPr algn="ctr"/>
+          </a:p>
+        </p:txBody>
+      </p:sp>
+      <p:sp>
+        <p:nvSpPr>
+          <p:cNvPr id="6" name="TextBox 5"/>
           <p:cNvSpPr txBox="1"/>
           <p:nvPr/>
         </p:nvSpPr>
         <p:spPr>
           <a:xfrm>
-            <a:off x="457200" y="4114800"/>
-            <a:ext cx="4114800" cy="365760"/>
+            <a:off x="640080" y="1371600"/>
+            <a:ext cx="10789920" cy="4572000"/>
           </a:xfrm>
           <a:prstGeom prst="rect">
             <a:avLst/>
@@ -9541,237 +6575,83 @@
           <a:noFill/>
         </p:spPr>
         <p:txBody>
-          <a:bodyPr wrap="none">
+          <a:bodyPr wrap="square">
             <a:spAutoFit/>
           </a:bodyPr>
           <a:lstStyle/>
           <a:p>
             <a:pPr>
-              <a:defRPr sz="2200" b="1">
-                <a:solidFill>
-                  <a:srgbClr val="1F2937"/>
-                </a:solidFill>
-              </a:defRPr>
-            </a:pPr>
-            <a:r>
-              <a:t>Odd Numbers:</a:t>
-            </a:r>
-          </a:p>
-        </p:txBody>
-      </p:sp>
-      <p:sp>
-        <p:nvSpPr>
-          <p:cNvPr id="9" name="Rectangle 8"/>
-          <p:cNvSpPr/>
-          <p:nvPr/>
-        </p:nvSpPr>
-        <p:spPr>
-          <a:xfrm>
-            <a:off x="457200" y="4480560"/>
-            <a:ext cx="4114800" cy="1645920"/>
-          </a:xfrm>
-          <a:prstGeom prst="rect">
-            <a:avLst/>
-          </a:prstGeom>
-          <a:solidFill>
-            <a:srgbClr val="DBEAFE"/>
-          </a:solidFill>
-          <a:ln w="25400">
-            <a:solidFill>
-              <a:srgbClr val="2563EB"/>
-            </a:solidFill>
-          </a:ln>
-        </p:spPr>
-        <p:style>
-          <a:lnRef idx="1">
-            <a:schemeClr val="accent1"/>
-          </a:lnRef>
-          <a:fillRef idx="3">
-            <a:schemeClr val="accent1"/>
-          </a:fillRef>
-          <a:effectRef idx="2">
-            <a:schemeClr val="accent1"/>
-          </a:effectRef>
-          <a:fontRef idx="minor">
-            <a:schemeClr val="lt1"/>
-          </a:fontRef>
-        </p:style>
-        <p:txBody>
-          <a:bodyPr rtlCol="0" anchor="ctr" wrap="square" lIns="182880" tIns="137160"/>
-          <a:lstStyle/>
-          <a:p>
-            <a:pPr algn="ctr">
-              <a:defRPr sz="1800">
-                <a:solidFill>
-                  <a:srgbClr val="1F2937"/>
-                </a:solidFill>
-                <a:latin typeface="Courier New"/>
-              </a:defRPr>
-            </a:pPr>
-            <a:r>
-              <a:t>for i in range(1, 10, 2):</a:t>
+              <a:spcAft>
+                <a:spcPts val="800"/>
+              </a:spcAft>
+              <a:defRPr sz="2000" b="1">
+                <a:solidFill>
+                  <a:srgbClr val="333333"/>
+                </a:solidFill>
+              </a:defRPr>
+            </a:pPr>
+            <a:r>
+              <a:t>Count by 10s</a:t>
             </a:r>
           </a:p>
           <a:p>
             <a:pPr>
-              <a:defRPr sz="1800">
-                <a:solidFill>
-                  <a:srgbClr val="1F2937"/>
-                </a:solidFill>
-                <a:latin typeface="Courier New"/>
-              </a:defRPr>
-            </a:pPr>
-            <a:r>
-              <a:t>    print(i)</a:t>
+              <a:spcAft>
+                <a:spcPts val="800"/>
+              </a:spcAft>
+              <a:defRPr sz="2000" b="1">
+                <a:solidFill>
+                  <a:srgbClr val="333333"/>
+                </a:solidFill>
+              </a:defRPr>
+            </a:pPr>
+            <a:r>
+              <a:t>Countdown</a:t>
             </a:r>
           </a:p>
           <a:p>
             <a:pPr>
-              <a:defRPr sz="1800">
-                <a:solidFill>
-                  <a:srgbClr val="1F2937"/>
-                </a:solidFill>
-                <a:latin typeface="Courier New"/>
-              </a:defRPr>
-            </a:pPr>
+              <a:spcAft>
+                <a:spcPts val="800"/>
+              </a:spcAft>
+              <a:defRPr sz="2000" b="1">
+                <a:solidFill>
+                  <a:srgbClr val="333333"/>
+                </a:solidFill>
+              </a:defRPr>
+            </a:pPr>
+            <a:r>
+              <a:t>Odd Numbers</a:t>
+            </a:r>
           </a:p>
           <a:p>
             <a:pPr>
-              <a:defRPr sz="1800">
-                <a:solidFill>
-                  <a:srgbClr val="1F2937"/>
-                </a:solidFill>
-                <a:latin typeface="Courier New"/>
-              </a:defRPr>
-            </a:pPr>
-            <a:r>
-              <a:t># 1 3 5 7 9</a:t>
-            </a:r>
-          </a:p>
-        </p:txBody>
-      </p:sp>
-      <p:sp>
-        <p:nvSpPr>
-          <p:cNvPr id="10" name="TextBox 9"/>
-          <p:cNvSpPr txBox="1"/>
-          <p:nvPr/>
-        </p:nvSpPr>
-        <p:spPr>
-          <a:xfrm>
-            <a:off x="5029200" y="4114800"/>
-            <a:ext cx="3657600" cy="365760"/>
-          </a:xfrm>
-          <a:prstGeom prst="rect">
-            <a:avLst/>
-          </a:prstGeom>
-          <a:noFill/>
-        </p:spPr>
-        <p:txBody>
-          <a:bodyPr wrap="none">
-            <a:spAutoFit/>
-          </a:bodyPr>
-          <a:lstStyle/>
+              <a:spcAft>
+                <a:spcPts val="800"/>
+              </a:spcAft>
+              <a:defRPr sz="2000" b="1">
+                <a:solidFill>
+                  <a:srgbClr val="333333"/>
+                </a:solidFill>
+              </a:defRPr>
+            </a:pPr>
+            <a:r>
+              <a:t>Repeat N Times</a:t>
+            </a:r>
+          </a:p>
           <a:p>
             <a:pPr>
-              <a:defRPr sz="2200" b="1">
-                <a:solidFill>
-                  <a:srgbClr val="1F2937"/>
-                </a:solidFill>
-              </a:defRPr>
-            </a:pPr>
-            <a:r>
-              <a:t>Even Numbers:</a:t>
-            </a:r>
-          </a:p>
-        </p:txBody>
-      </p:sp>
-      <p:sp>
-        <p:nvSpPr>
-          <p:cNvPr id="11" name="Rectangle 10"/>
-          <p:cNvSpPr/>
-          <p:nvPr/>
-        </p:nvSpPr>
-        <p:spPr>
-          <a:xfrm>
-            <a:off x="5029200" y="4480560"/>
-            <a:ext cx="3657600" cy="1645920"/>
-          </a:xfrm>
-          <a:prstGeom prst="rect">
-            <a:avLst/>
-          </a:prstGeom>
-          <a:solidFill>
-            <a:srgbClr val="DBEAFE"/>
-          </a:solidFill>
-          <a:ln w="25400">
-            <a:solidFill>
-              <a:srgbClr val="2563EB"/>
-            </a:solidFill>
-          </a:ln>
-        </p:spPr>
-        <p:style>
-          <a:lnRef idx="1">
-            <a:schemeClr val="accent1"/>
-          </a:lnRef>
-          <a:fillRef idx="3">
-            <a:schemeClr val="accent1"/>
-          </a:fillRef>
-          <a:effectRef idx="2">
-            <a:schemeClr val="accent1"/>
-          </a:effectRef>
-          <a:fontRef idx="minor">
-            <a:schemeClr val="lt1"/>
-          </a:fontRef>
-        </p:style>
-        <p:txBody>
-          <a:bodyPr rtlCol="0" anchor="ctr" wrap="square" lIns="182880" tIns="137160"/>
-          <a:lstStyle/>
-          <a:p>
-            <a:pPr algn="ctr">
-              <a:defRPr sz="1800">
-                <a:solidFill>
-                  <a:srgbClr val="1F2937"/>
-                </a:solidFill>
-                <a:latin typeface="Courier New"/>
-              </a:defRPr>
-            </a:pPr>
-            <a:r>
-              <a:t>for i in range(0, 10, 2):</a:t>
-            </a:r>
-          </a:p>
-          <a:p>
-            <a:pPr>
-              <a:defRPr sz="1800">
-                <a:solidFill>
-                  <a:srgbClr val="1F2937"/>
-                </a:solidFill>
-                <a:latin typeface="Courier New"/>
-              </a:defRPr>
-            </a:pPr>
-            <a:r>
-              <a:t>    print(i)</a:t>
-            </a:r>
-          </a:p>
-          <a:p>
-            <a:pPr>
-              <a:defRPr sz="1800">
-                <a:solidFill>
-                  <a:srgbClr val="1F2937"/>
-                </a:solidFill>
-                <a:latin typeface="Courier New"/>
-              </a:defRPr>
-            </a:pPr>
-          </a:p>
-          <a:p>
-            <a:pPr>
-              <a:defRPr sz="1800">
-                <a:solidFill>
-                  <a:srgbClr val="1F2937"/>
-                </a:solidFill>
-                <a:latin typeface="Courier New"/>
-              </a:defRPr>
-            </a:pPr>
-            <a:r>
-              <a:t># 0 2 4 6 8</a:t>
+              <a:spcAft>
+                <a:spcPts val="800"/>
+              </a:spcAft>
+              <a:defRPr sz="2000" b="1">
+                <a:solidFill>
+                  <a:srgbClr val="333333"/>
+                </a:solidFill>
+              </a:defRPr>
+            </a:pPr>
+            <a:r>
+              <a:t>Remember:range(stop) starts at 0 and stops BEFORE stop</a:t>
             </a:r>
           </a:p>
         </p:txBody>
@@ -9787,14 +6667,6 @@
 <file path=ppt/slides/slide9.xml><?xml version="1.0" encoding="utf-8"?>
 <p:sld xmlns:a="http://schemas.openxmlformats.org/drawingml/2006/main" xmlns:p="http://schemas.openxmlformats.org/presentationml/2006/main" xmlns:r="http://schemas.openxmlformats.org/officeDocument/2006/relationships">
   <p:cSld>
-    <p:bg>
-      <p:bgPr>
-        <a:solidFill>
-          <a:srgbClr val="FFFFFF"/>
-        </a:solidFill>
-        <a:effectLst/>
-      </p:bgPr>
-    </p:bg>
     <p:spTree>
       <p:nvGrpSpPr>
         <p:cNvPr id="1" name=""/>
@@ -9804,55 +6676,20 @@
       <p:grpSpPr/>
       <p:sp>
         <p:nvSpPr>
-          <p:cNvPr id="2" name="TextBox 1"/>
-          <p:cNvSpPr txBox="1"/>
-          <p:nvPr/>
-        </p:nvSpPr>
-        <p:spPr>
-          <a:xfrm>
-            <a:off x="457200" y="457200"/>
-            <a:ext cx="8229600" cy="731520"/>
-          </a:xfrm>
-          <a:prstGeom prst="rect">
-            <a:avLst/>
-          </a:prstGeom>
-          <a:noFill/>
-        </p:spPr>
-        <p:txBody>
-          <a:bodyPr wrap="none">
-            <a:spAutoFit/>
-          </a:bodyPr>
-          <a:lstStyle/>
-          <a:p>
-            <a:pPr>
-              <a:defRPr sz="4000" b="1">
-                <a:solidFill>
-                  <a:srgbClr val="1F2937"/>
-                </a:solidFill>
-              </a:defRPr>
-            </a:pPr>
-            <a:r>
-              <a:t>Break Statement</a:t>
-            </a:r>
-          </a:p>
-        </p:txBody>
-      </p:sp>
-      <p:sp>
-        <p:nvSpPr>
-          <p:cNvPr id="3" name="Rectangle 2"/>
+          <p:cNvPr id="2" name="Rectangle 1"/>
           <p:cNvSpPr/>
           <p:nvPr/>
         </p:nvSpPr>
         <p:spPr>
           <a:xfrm>
-            <a:off x="457200" y="1280160"/>
-            <a:ext cx="1371600" cy="73152"/>
+            <a:off x="0" y="0"/>
+            <a:ext cx="12191695" cy="6858000"/>
           </a:xfrm>
           <a:prstGeom prst="rect">
             <a:avLst/>
           </a:prstGeom>
           <a:solidFill>
-            <a:srgbClr val="2563EB"/>
+            <a:srgbClr val="FFFFFF"/>
           </a:solidFill>
           <a:ln>
             <a:noFill/>
@@ -9882,95 +6719,23 @@
       </p:sp>
       <p:sp>
         <p:nvSpPr>
-          <p:cNvPr id="4" name="TextBox 3"/>
-          <p:cNvSpPr txBox="1"/>
-          <p:nvPr/>
-        </p:nvSpPr>
-        <p:spPr>
-          <a:xfrm>
-            <a:off x="457200" y="1828800"/>
-            <a:ext cx="8229600" cy="548640"/>
-          </a:xfrm>
-          <a:prstGeom prst="rect">
-            <a:avLst/>
-          </a:prstGeom>
-          <a:noFill/>
-        </p:spPr>
-        <p:txBody>
-          <a:bodyPr wrap="none">
-            <a:spAutoFit/>
-          </a:bodyPr>
-          <a:lstStyle/>
-          <a:p>
-            <a:pPr>
-              <a:defRPr sz="2400">
-                <a:solidFill>
-                  <a:srgbClr val="4B5563"/>
-                </a:solidFill>
-              </a:defRPr>
-            </a:pPr>
-            <a:r>
-              <a:t>The break statement exits a loop early</a:t>
-            </a:r>
-          </a:p>
-        </p:txBody>
-      </p:sp>
-      <p:sp>
-        <p:nvSpPr>
-          <p:cNvPr id="5" name="TextBox 4"/>
-          <p:cNvSpPr txBox="1"/>
-          <p:nvPr/>
-        </p:nvSpPr>
-        <p:spPr>
-          <a:xfrm>
-            <a:off x="457200" y="2560320"/>
-            <a:ext cx="4114800" cy="365760"/>
-          </a:xfrm>
-          <a:prstGeom prst="rect">
-            <a:avLst/>
-          </a:prstGeom>
-          <a:noFill/>
-        </p:spPr>
-        <p:txBody>
-          <a:bodyPr wrap="none">
-            <a:spAutoFit/>
-          </a:bodyPr>
-          <a:lstStyle/>
-          <a:p>
-            <a:pPr>
-              <a:defRPr sz="2200" b="1">
-                <a:solidFill>
-                  <a:srgbClr val="1F2937"/>
-                </a:solidFill>
-              </a:defRPr>
-            </a:pPr>
-            <a:r>
-              <a:t>Find First Match:</a:t>
-            </a:r>
-          </a:p>
-        </p:txBody>
-      </p:sp>
-      <p:sp>
-        <p:nvSpPr>
-          <p:cNvPr id="6" name="Rectangle 5"/>
+          <p:cNvPr id="3" name="Rectangle 2"/>
           <p:cNvSpPr/>
           <p:nvPr/>
         </p:nvSpPr>
         <p:spPr>
           <a:xfrm>
-            <a:off x="457200" y="2926080"/>
-            <a:ext cx="4114800" cy="2286000"/>
+            <a:off x="0" y="0"/>
+            <a:ext cx="12191695" cy="137160"/>
           </a:xfrm>
           <a:prstGeom prst="rect">
             <a:avLst/>
           </a:prstGeom>
           <a:solidFill>
-            <a:srgbClr val="DBEAFE"/>
+            <a:srgbClr val="0066CC"/>
           </a:solidFill>
-          <a:ln w="25400">
-            <a:solidFill>
-              <a:srgbClr val="2563EB"/>
-            </a:solidFill>
+          <a:ln>
+            <a:noFill/>
           </a:ln>
         </p:spPr>
         <p:style>
@@ -9988,95 +6753,23 @@
           </a:fontRef>
         </p:style>
         <p:txBody>
-          <a:bodyPr rtlCol="0" anchor="ctr" wrap="square" lIns="182880" tIns="137160"/>
-          <a:lstStyle/>
-          <a:p>
-            <a:pPr algn="ctr">
-              <a:defRPr sz="1800">
-                <a:solidFill>
-                  <a:srgbClr val="1F2937"/>
-                </a:solidFill>
-                <a:latin typeface="Courier New"/>
-              </a:defRPr>
-            </a:pPr>
-            <a:r>
-              <a:t>for num in range(1, 100):</a:t>
-            </a:r>
-          </a:p>
-          <a:p>
-            <a:pPr>
-              <a:defRPr sz="1800">
-                <a:solidFill>
-                  <a:srgbClr val="1F2937"/>
-                </a:solidFill>
-                <a:latin typeface="Courier New"/>
-              </a:defRPr>
-            </a:pPr>
-            <a:r>
-              <a:t>    if num % 7 == 0:</a:t>
-            </a:r>
-          </a:p>
-          <a:p>
-            <a:pPr>
-              <a:defRPr sz="1800">
-                <a:solidFill>
-                  <a:srgbClr val="1F2937"/>
-                </a:solidFill>
-                <a:latin typeface="Courier New"/>
-              </a:defRPr>
-            </a:pPr>
-            <a:r>
-              <a:t>        print(f"Found: {num}")</a:t>
-            </a:r>
-          </a:p>
-          <a:p>
-            <a:pPr>
-              <a:defRPr sz="1800">
-                <a:solidFill>
-                  <a:srgbClr val="1F2937"/>
-                </a:solidFill>
-                <a:latin typeface="Courier New"/>
-              </a:defRPr>
-            </a:pPr>
-            <a:r>
-              <a:t>        break</a:t>
-            </a:r>
-          </a:p>
-          <a:p>
-            <a:pPr>
-              <a:defRPr sz="1800">
-                <a:solidFill>
-                  <a:srgbClr val="1F2937"/>
-                </a:solidFill>
-                <a:latin typeface="Courier New"/>
-              </a:defRPr>
-            </a:pPr>
-          </a:p>
-          <a:p>
-            <a:pPr>
-              <a:defRPr sz="1800">
-                <a:solidFill>
-                  <a:srgbClr val="1F2937"/>
-                </a:solidFill>
-                <a:latin typeface="Courier New"/>
-              </a:defRPr>
-            </a:pPr>
-            <a:r>
-              <a:t># Output: Found: 7</a:t>
-            </a:r>
-          </a:p>
-        </p:txBody>
-      </p:sp>
-      <p:sp>
-        <p:nvSpPr>
-          <p:cNvPr id="7" name="TextBox 6"/>
+          <a:bodyPr rtlCol="0" anchor="ctr"/>
+          <a:lstStyle/>
+          <a:p>
+            <a:pPr algn="ctr"/>
+          </a:p>
+        </p:txBody>
+      </p:sp>
+      <p:sp>
+        <p:nvSpPr>
+          <p:cNvPr id="4" name="TextBox 3"/>
           <p:cNvSpPr txBox="1"/>
           <p:nvPr/>
         </p:nvSpPr>
         <p:spPr>
           <a:xfrm>
-            <a:off x="5029200" y="2560320"/>
-            <a:ext cx="3657600" cy="365760"/>
+            <a:off x="457200" y="365760"/>
+            <a:ext cx="10972800" cy="731520"/>
           </a:xfrm>
           <a:prstGeom prst="rect">
             <a:avLst/>
@@ -10090,39 +6783,37 @@
           <a:lstStyle/>
           <a:p>
             <a:pPr>
-              <a:defRPr sz="2200" b="1">
-                <a:solidFill>
-                  <a:srgbClr val="1F2937"/>
-                </a:solidFill>
-              </a:defRPr>
-            </a:pPr>
-            <a:r>
-              <a:t>Exit on Condition:</a:t>
-            </a:r>
-          </a:p>
-        </p:txBody>
-      </p:sp>
-      <p:sp>
-        <p:nvSpPr>
-          <p:cNvPr id="8" name="Rectangle 7"/>
+              <a:defRPr sz="4000" b="1">
+                <a:solidFill>
+                  <a:srgbClr val="003366"/>
+                </a:solidFill>
+              </a:defRPr>
+            </a:pPr>
+            <a:r>
+              <a:t>Break Statement: Exit Early</a:t>
+            </a:r>
+          </a:p>
+        </p:txBody>
+      </p:sp>
+      <p:sp>
+        <p:nvSpPr>
+          <p:cNvPr id="5" name="Rectangle 4"/>
           <p:cNvSpPr/>
           <p:nvPr/>
         </p:nvSpPr>
         <p:spPr>
           <a:xfrm>
-            <a:off x="5029200" y="2926080"/>
-            <a:ext cx="3657600" cy="2286000"/>
+            <a:off x="457200" y="1005840"/>
+            <a:ext cx="1828800" cy="45720"/>
           </a:xfrm>
           <a:prstGeom prst="rect">
             <a:avLst/>
           </a:prstGeom>
           <a:solidFill>
-            <a:srgbClr val="DBEAFE"/>
+            <a:srgbClr val="0066CC"/>
           </a:solidFill>
-          <a:ln w="25400">
-            <a:solidFill>
-              <a:srgbClr val="2563EB"/>
-            </a:solidFill>
+          <a:ln>
+            <a:noFill/>
           </a:ln>
         </p:spPr>
         <p:style>
@@ -10140,72 +6831,23 @@
           </a:fontRef>
         </p:style>
         <p:txBody>
-          <a:bodyPr rtlCol="0" anchor="ctr" wrap="square" lIns="182880" tIns="137160"/>
-          <a:lstStyle/>
-          <a:p>
-            <a:pPr algn="ctr">
-              <a:defRPr sz="1800">
-                <a:solidFill>
-                  <a:srgbClr val="1F2937"/>
-                </a:solidFill>
-                <a:latin typeface="Courier New"/>
-              </a:defRPr>
-            </a:pPr>
-            <a:r>
-              <a:t>while True:</a:t>
-            </a:r>
-          </a:p>
-          <a:p>
-            <a:pPr>
-              <a:defRPr sz="1800">
-                <a:solidFill>
-                  <a:srgbClr val="1F2937"/>
-                </a:solidFill>
-                <a:latin typeface="Courier New"/>
-              </a:defRPr>
-            </a:pPr>
-            <a:r>
-              <a:t>    answer = input("Continue? ")</a:t>
-            </a:r>
-          </a:p>
-          <a:p>
-            <a:pPr>
-              <a:defRPr sz="1800">
-                <a:solidFill>
-                  <a:srgbClr val="1F2937"/>
-                </a:solidFill>
-                <a:latin typeface="Courier New"/>
-              </a:defRPr>
-            </a:pPr>
-            <a:r>
-              <a:t>    if answer == "no":</a:t>
-            </a:r>
-          </a:p>
-          <a:p>
-            <a:pPr>
-              <a:defRPr sz="1800">
-                <a:solidFill>
-                  <a:srgbClr val="1F2937"/>
-                </a:solidFill>
-                <a:latin typeface="Courier New"/>
-              </a:defRPr>
-            </a:pPr>
-            <a:r>
-              <a:t>        break</a:t>
-            </a:r>
-          </a:p>
-        </p:txBody>
-      </p:sp>
-      <p:sp>
-        <p:nvSpPr>
-          <p:cNvPr id="9" name="TextBox 8"/>
+          <a:bodyPr rtlCol="0" anchor="ctr"/>
+          <a:lstStyle/>
+          <a:p>
+            <a:pPr algn="ctr"/>
+          </a:p>
+        </p:txBody>
+      </p:sp>
+      <p:sp>
+        <p:nvSpPr>
+          <p:cNvPr id="6" name="TextBox 5"/>
           <p:cNvSpPr txBox="1"/>
           <p:nvPr/>
         </p:nvSpPr>
         <p:spPr>
           <a:xfrm>
-            <a:off x="457200" y="5486400"/>
-            <a:ext cx="8229600" cy="731520"/>
+            <a:off x="640080" y="1371600"/>
+            <a:ext cx="10789920" cy="4572000"/>
           </a:xfrm>
           <a:prstGeom prst="rect">
             <a:avLst/>
@@ -10213,20 +6855,53 @@
           <a:noFill/>
         </p:spPr>
         <p:txBody>
-          <a:bodyPr wrap="none">
+          <a:bodyPr wrap="square">
             <a:spAutoFit/>
           </a:bodyPr>
           <a:lstStyle/>
           <a:p>
             <a:pPr>
+              <a:spcAft>
+                <a:spcPts val="800"/>
+              </a:spcAft>
               <a:defRPr sz="2000" b="1">
                 <a:solidFill>
-                  <a:srgbClr val="2563EB"/>
-                </a:solidFill>
-              </a:defRPr>
-            </a:pPr>
-            <a:r>
-              <a:t>💡 Use break when you find what you're looking for and don't need to continue</a:t>
+                  <a:srgbClr val="333333"/>
+                </a:solidFill>
+              </a:defRPr>
+            </a:pPr>
+            <a:r>
+              <a:t>The break statement immediately exits the loop</a:t>
+            </a:r>
+          </a:p>
+          <a:p>
+            <a:pPr>
+              <a:spcAft>
+                <a:spcPts val="800"/>
+              </a:spcAft>
+              <a:defRPr sz="2000" b="1">
+                <a:solidFill>
+                  <a:srgbClr val="333333"/>
+                </a:solidFill>
+              </a:defRPr>
+            </a:pPr>
+            <a:r>
+              <a:t>Example: Find First Even Number</a:t>
+            </a:r>
+          </a:p>
+          <a:p>
+            <a:pPr>
+              <a:spcAft>
+                <a:spcPts val="800"/>
+              </a:spcAft>
+              <a:defRPr sz="2000" b="1">
+                <a:solidFill>
+                  <a:srgbClr val="333333"/>
+                </a:solidFill>
+              </a:defRPr>
+            </a:pPr>
+            <a:r>
+              <a:t>Example: Guessing Game</a:t>
             </a:r>
           </a:p>
         </p:txBody>
